--- a/ZenabuPhD/PRESENTATIONS/Annual Doctoral Committee Meeting1_2025.pptx
+++ b/ZenabuPhD/PRESENTATIONS/Annual Doctoral Committee Meeting1_2025.pptx
@@ -4255,10 +4255,9 @@
         <a:lstStyle/>
         <a:p>
           <a:r>
-            <a:rPr lang="en-US" sz="1800" dirty="0" smtClean="0"/>
+            <a:rPr lang="en-US" sz="1800" dirty="0"/>
             <a:t>Stochastic uncertainty</a:t>
           </a:r>
-          <a:endParaRPr lang="en-US" sz="1800" dirty="0"/>
         </a:p>
       </dgm:t>
     </dgm:pt>
@@ -4296,7 +4295,7 @@
         <a:lstStyle/>
         <a:p>
           <a:r>
-            <a:rPr lang="de-CH" sz="1800" dirty="0" smtClean="0"/>
+            <a:rPr lang="de-CH" sz="1800" dirty="0"/>
             <a:t>Parameter uncertainty</a:t>
           </a:r>
           <a:endParaRPr lang="en-US" sz="1800" dirty="0"/>
@@ -4333,10 +4332,9 @@
         <a:lstStyle/>
         <a:p>
           <a:r>
-            <a:rPr lang="en-US" sz="1800" dirty="0" smtClean="0"/>
+            <a:rPr lang="en-US" sz="1800" dirty="0"/>
             <a:t>Observation uncertainty</a:t>
           </a:r>
-          <a:endParaRPr lang="en-US" sz="1800" dirty="0"/>
         </a:p>
       </dgm:t>
     </dgm:pt>
@@ -4385,10 +4383,9 @@
         <a:lstStyle/>
         <a:p>
           <a:r>
-            <a:rPr lang="en-US" b="1" dirty="0" smtClean="0"/>
+            <a:rPr lang="en-US" b="1" dirty="0"/>
             <a:t>Model output</a:t>
           </a:r>
-          <a:endParaRPr lang="en-US" b="1" dirty="0"/>
         </a:p>
       </dgm:t>
     </dgm:pt>
@@ -4587,13 +4584,6 @@
         </dgm:presLayoutVars>
       </dgm:prSet>
       <dgm:spPr/>
-      <dgm:t>
-        <a:bodyPr/>
-        <a:lstStyle/>
-        <a:p>
-          <a:endParaRPr lang="en-US"/>
-        </a:p>
-      </dgm:t>
     </dgm:pt>
     <dgm:pt modelId="{02A94B04-561F-4A3F-8A13-B44A66714783}" type="pres">
       <dgm:prSet presAssocID="{30EBB7A9-639C-433D-AD86-ABD1A08D0DFB}" presName="ellipse" presStyleLbl="trBgShp" presStyleIdx="0" presStyleCnt="1"/>
@@ -4610,13 +4600,6 @@
         </dgm:presLayoutVars>
       </dgm:prSet>
       <dgm:spPr/>
-      <dgm:t>
-        <a:bodyPr/>
-        <a:lstStyle/>
-        <a:p>
-          <a:endParaRPr lang="en-US"/>
-        </a:p>
-      </dgm:t>
     </dgm:pt>
     <dgm:pt modelId="{7EB7BEDA-EAA0-4588-9965-61DB484A81FA}" type="pres">
       <dgm:prSet presAssocID="{BFA5B54B-E3C9-488F-9D12-20464E250A83}" presName="item1" presStyleLbl="node1" presStyleIdx="0" presStyleCnt="3" custScaleX="109981" custScaleY="102022">
@@ -4625,13 +4608,6 @@
         </dgm:presLayoutVars>
       </dgm:prSet>
       <dgm:spPr/>
-      <dgm:t>
-        <a:bodyPr/>
-        <a:lstStyle/>
-        <a:p>
-          <a:endParaRPr lang="en-US"/>
-        </a:p>
-      </dgm:t>
     </dgm:pt>
     <dgm:pt modelId="{D34CBCCF-7B05-46AA-9DEC-C91D8F452F47}" type="pres">
       <dgm:prSet presAssocID="{EFA8F9EC-0026-41A2-9BC9-0DC913983FD3}" presName="item2" presStyleLbl="node1" presStyleIdx="1" presStyleCnt="3">
@@ -4640,13 +4616,6 @@
         </dgm:presLayoutVars>
       </dgm:prSet>
       <dgm:spPr/>
-      <dgm:t>
-        <a:bodyPr/>
-        <a:lstStyle/>
-        <a:p>
-          <a:endParaRPr lang="en-US"/>
-        </a:p>
-      </dgm:t>
     </dgm:pt>
     <dgm:pt modelId="{F5C58BDE-6AAD-48C2-92F8-600F87DDA1E7}" type="pres">
       <dgm:prSet presAssocID="{EA889E3C-27F9-4860-A3C1-0C4474CFB1EF}" presName="item3" presStyleLbl="node1" presStyleIdx="2" presStyleCnt="3" custLinFactNeighborX="34143" custLinFactNeighborY="14488">
@@ -4655,13 +4624,6 @@
         </dgm:presLayoutVars>
       </dgm:prSet>
       <dgm:spPr/>
-      <dgm:t>
-        <a:bodyPr/>
-        <a:lstStyle/>
-        <a:p>
-          <a:endParaRPr lang="en-US"/>
-        </a:p>
-      </dgm:t>
     </dgm:pt>
     <dgm:pt modelId="{4510A7FD-85AA-4037-BBEA-3F9A69AB7F58}" type="pres">
       <dgm:prSet presAssocID="{30EBB7A9-639C-433D-AD86-ABD1A08D0DFB}" presName="funnel" presStyleLbl="trAlignAcc1" presStyleIdx="0" presStyleCnt="1" custLinFactNeighborX="-257" custLinFactNeighborY="-350"/>
@@ -4669,20 +4631,20 @@
     </dgm:pt>
   </dgm:ptLst>
   <dgm:cxnLst>
+    <dgm:cxn modelId="{A190F906-40D3-4096-8098-B20DDF74DFDC}" srcId="{30EBB7A9-639C-433D-AD86-ABD1A08D0DFB}" destId="{A87646CD-5340-4056-82D3-F0704E92B0CB}" srcOrd="6" destOrd="0" parTransId="{DF7B2379-0F20-42C0-A957-4309A1BBCB17}" sibTransId="{024E1755-A4C5-4B76-AF68-AE441E8803B3}"/>
+    <dgm:cxn modelId="{895D8410-1024-4346-8150-F818B42B8D3C}" srcId="{30EBB7A9-639C-433D-AD86-ABD1A08D0DFB}" destId="{AC1D0FFB-A0BA-45E0-9DC2-D61290E2BE68}" srcOrd="7" destOrd="0" parTransId="{A3F1B3F4-ABC9-4BA1-95AC-064F42CB9BDC}" sibTransId="{F8EA7188-1EC8-441B-91B8-8AAA06374A16}"/>
+    <dgm:cxn modelId="{177C382B-B2E4-47A1-AA7B-1981BAC87565}" srcId="{30EBB7A9-639C-433D-AD86-ABD1A08D0DFB}" destId="{EA889E3C-27F9-4860-A3C1-0C4474CFB1EF}" srcOrd="3" destOrd="0" parTransId="{FC498E5E-56D7-4FA9-BD9D-8A71EC48422D}" sibTransId="{001655EE-7820-428B-8BA0-58686DB31CEE}"/>
     <dgm:cxn modelId="{8F21F931-6938-4FE9-939A-F6F40D0FCF9F}" type="presOf" srcId="{2AB6660C-CA1C-442D-B8DC-EA526E686EAC}" destId="{F5C58BDE-6AAD-48C2-92F8-600F87DDA1E7}" srcOrd="0" destOrd="0" presId="urn:microsoft.com/office/officeart/2005/8/layout/funnel1"/>
+    <dgm:cxn modelId="{C8AFFC5B-C73F-4F62-82B3-5059D45DDFAF}" srcId="{30EBB7A9-639C-433D-AD86-ABD1A08D0DFB}" destId="{3C8D4E16-0D1E-4562-B484-A5F8CA170C49}" srcOrd="8" destOrd="0" parTransId="{C3205081-2957-4A53-887E-C02222A87D6A}" sibTransId="{C3A0E5FE-B4F9-43D7-BBBC-C1CF24CE7782}"/>
+    <dgm:cxn modelId="{DF39F156-49D8-4A61-95F6-13E4797AE526}" srcId="{30EBB7A9-639C-433D-AD86-ABD1A08D0DFB}" destId="{4351CD10-AD7E-4A4F-96C1-8D6BA62696EF}" srcOrd="5" destOrd="0" parTransId="{8D702E36-BB2F-4BDB-AF41-825856FCC5F1}" sibTransId="{FCA90A99-4935-445B-9015-F671A9DE6FAE}"/>
+    <dgm:cxn modelId="{B0848E58-1C12-4D8C-8AA6-C2C0B62FE952}" srcId="{30EBB7A9-639C-433D-AD86-ABD1A08D0DFB}" destId="{EFA8F9EC-0026-41A2-9BC9-0DC913983FD3}" srcOrd="2" destOrd="0" parTransId="{76519805-CA40-4FAE-A0EA-756C25DA61F6}" sibTransId="{CC699950-0BB8-4688-BBF3-2CAF0CD473B6}"/>
+    <dgm:cxn modelId="{07362480-7872-4B83-8C6A-BA707C2F4EBD}" srcId="{30EBB7A9-639C-433D-AD86-ABD1A08D0DFB}" destId="{2AB6660C-CA1C-442D-B8DC-EA526E686EAC}" srcOrd="0" destOrd="0" parTransId="{93AD3E00-EFDE-4C4D-BDC1-1D1EC4DDDA9B}" sibTransId="{BC10C2BA-FF6E-43C1-A789-3A26792C959E}"/>
+    <dgm:cxn modelId="{96A3E9A3-0196-4481-9520-A2F4142E8D11}" srcId="{30EBB7A9-639C-433D-AD86-ABD1A08D0DFB}" destId="{BFA5B54B-E3C9-488F-9D12-20464E250A83}" srcOrd="1" destOrd="0" parTransId="{CF8094FD-C536-4FDB-8C9D-03D7F3E2A3B4}" sibTransId="{54F6258E-FA7E-4A4D-9FAE-23B34ED95312}"/>
+    <dgm:cxn modelId="{152F2EA7-F674-4F54-BF70-9D4203199550}" type="presOf" srcId="{EFA8F9EC-0026-41A2-9BC9-0DC913983FD3}" destId="{7EB7BEDA-EAA0-4588-9965-61DB484A81FA}" srcOrd="0" destOrd="0" presId="urn:microsoft.com/office/officeart/2005/8/layout/funnel1"/>
+    <dgm:cxn modelId="{0C0374BE-01D8-408B-9250-368FEADC9E02}" type="presOf" srcId="{EA889E3C-27F9-4860-A3C1-0C4474CFB1EF}" destId="{157FB8B2-163E-43AA-9EC8-EEB7D217E086}" srcOrd="0" destOrd="0" presId="urn:microsoft.com/office/officeart/2005/8/layout/funnel1"/>
+    <dgm:cxn modelId="{812969DD-EF6E-4020-8EE7-F7AA79149894}" srcId="{30EBB7A9-639C-433D-AD86-ABD1A08D0DFB}" destId="{4843BD31-1265-401A-AF03-8D35E04468BE}" srcOrd="4" destOrd="0" parTransId="{FF9BF031-B268-4AE0-A9F9-E3E6F8951D66}" sibTransId="{9347537C-65E9-4B4A-A3B4-7B451CC9E2E2}"/>
+    <dgm:cxn modelId="{BE8A1DF6-4FEC-4D21-B8B5-0BCE7C4B4CD0}" type="presOf" srcId="{BFA5B54B-E3C9-488F-9D12-20464E250A83}" destId="{D34CBCCF-7B05-46AA-9DEC-C91D8F452F47}" srcOrd="0" destOrd="0" presId="urn:microsoft.com/office/officeart/2005/8/layout/funnel1"/>
     <dgm:cxn modelId="{A49C3CF9-3E67-4BEE-A2EF-A875F8022B5E}" type="presOf" srcId="{30EBB7A9-639C-433D-AD86-ABD1A08D0DFB}" destId="{D3A58B72-0D9D-4FB0-ACF6-76ABA25CC1EF}" srcOrd="0" destOrd="0" presId="urn:microsoft.com/office/officeart/2005/8/layout/funnel1"/>
-    <dgm:cxn modelId="{BE8A1DF6-4FEC-4D21-B8B5-0BCE7C4B4CD0}" type="presOf" srcId="{BFA5B54B-E3C9-488F-9D12-20464E250A83}" destId="{D34CBCCF-7B05-46AA-9DEC-C91D8F452F47}" srcOrd="0" destOrd="0" presId="urn:microsoft.com/office/officeart/2005/8/layout/funnel1"/>
-    <dgm:cxn modelId="{152F2EA7-F674-4F54-BF70-9D4203199550}" type="presOf" srcId="{EFA8F9EC-0026-41A2-9BC9-0DC913983FD3}" destId="{7EB7BEDA-EAA0-4588-9965-61DB484A81FA}" srcOrd="0" destOrd="0" presId="urn:microsoft.com/office/officeart/2005/8/layout/funnel1"/>
-    <dgm:cxn modelId="{A190F906-40D3-4096-8098-B20DDF74DFDC}" srcId="{30EBB7A9-639C-433D-AD86-ABD1A08D0DFB}" destId="{A87646CD-5340-4056-82D3-F0704E92B0CB}" srcOrd="6" destOrd="0" parTransId="{DF7B2379-0F20-42C0-A957-4309A1BBCB17}" sibTransId="{024E1755-A4C5-4B76-AF68-AE441E8803B3}"/>
-    <dgm:cxn modelId="{96A3E9A3-0196-4481-9520-A2F4142E8D11}" srcId="{30EBB7A9-639C-433D-AD86-ABD1A08D0DFB}" destId="{BFA5B54B-E3C9-488F-9D12-20464E250A83}" srcOrd="1" destOrd="0" parTransId="{CF8094FD-C536-4FDB-8C9D-03D7F3E2A3B4}" sibTransId="{54F6258E-FA7E-4A4D-9FAE-23B34ED95312}"/>
-    <dgm:cxn modelId="{0C0374BE-01D8-408B-9250-368FEADC9E02}" type="presOf" srcId="{EA889E3C-27F9-4860-A3C1-0C4474CFB1EF}" destId="{157FB8B2-163E-43AA-9EC8-EEB7D217E086}" srcOrd="0" destOrd="0" presId="urn:microsoft.com/office/officeart/2005/8/layout/funnel1"/>
-    <dgm:cxn modelId="{C8AFFC5B-C73F-4F62-82B3-5059D45DDFAF}" srcId="{30EBB7A9-639C-433D-AD86-ABD1A08D0DFB}" destId="{3C8D4E16-0D1E-4562-B484-A5F8CA170C49}" srcOrd="8" destOrd="0" parTransId="{C3205081-2957-4A53-887E-C02222A87D6A}" sibTransId="{C3A0E5FE-B4F9-43D7-BBBC-C1CF24CE7782}"/>
-    <dgm:cxn modelId="{177C382B-B2E4-47A1-AA7B-1981BAC87565}" srcId="{30EBB7A9-639C-433D-AD86-ABD1A08D0DFB}" destId="{EA889E3C-27F9-4860-A3C1-0C4474CFB1EF}" srcOrd="3" destOrd="0" parTransId="{FC498E5E-56D7-4FA9-BD9D-8A71EC48422D}" sibTransId="{001655EE-7820-428B-8BA0-58686DB31CEE}"/>
-    <dgm:cxn modelId="{B0848E58-1C12-4D8C-8AA6-C2C0B62FE952}" srcId="{30EBB7A9-639C-433D-AD86-ABD1A08D0DFB}" destId="{EFA8F9EC-0026-41A2-9BC9-0DC913983FD3}" srcOrd="2" destOrd="0" parTransId="{76519805-CA40-4FAE-A0EA-756C25DA61F6}" sibTransId="{CC699950-0BB8-4688-BBF3-2CAF0CD473B6}"/>
-    <dgm:cxn modelId="{DF39F156-49D8-4A61-95F6-13E4797AE526}" srcId="{30EBB7A9-639C-433D-AD86-ABD1A08D0DFB}" destId="{4351CD10-AD7E-4A4F-96C1-8D6BA62696EF}" srcOrd="5" destOrd="0" parTransId="{8D702E36-BB2F-4BDB-AF41-825856FCC5F1}" sibTransId="{FCA90A99-4935-445B-9015-F671A9DE6FAE}"/>
-    <dgm:cxn modelId="{07362480-7872-4B83-8C6A-BA707C2F4EBD}" srcId="{30EBB7A9-639C-433D-AD86-ABD1A08D0DFB}" destId="{2AB6660C-CA1C-442D-B8DC-EA526E686EAC}" srcOrd="0" destOrd="0" parTransId="{93AD3E00-EFDE-4C4D-BDC1-1D1EC4DDDA9B}" sibTransId="{BC10C2BA-FF6E-43C1-A789-3A26792C959E}"/>
-    <dgm:cxn modelId="{895D8410-1024-4346-8150-F818B42B8D3C}" srcId="{30EBB7A9-639C-433D-AD86-ABD1A08D0DFB}" destId="{AC1D0FFB-A0BA-45E0-9DC2-D61290E2BE68}" srcOrd="7" destOrd="0" parTransId="{A3F1B3F4-ABC9-4BA1-95AC-064F42CB9BDC}" sibTransId="{F8EA7188-1EC8-441B-91B8-8AAA06374A16}"/>
-    <dgm:cxn modelId="{812969DD-EF6E-4020-8EE7-F7AA79149894}" srcId="{30EBB7A9-639C-433D-AD86-ABD1A08D0DFB}" destId="{4843BD31-1265-401A-AF03-8D35E04468BE}" srcOrd="4" destOrd="0" parTransId="{FF9BF031-B268-4AE0-A9F9-E3E6F8951D66}" sibTransId="{9347537C-65E9-4B4A-A3B4-7B451CC9E2E2}"/>
     <dgm:cxn modelId="{90C014CC-0733-4935-ADF3-BE36F8EF5632}" type="presParOf" srcId="{D3A58B72-0D9D-4FB0-ACF6-76ABA25CC1EF}" destId="{02A94B04-561F-4A3F-8A13-B44A66714783}" srcOrd="0" destOrd="0" presId="urn:microsoft.com/office/officeart/2005/8/layout/funnel1"/>
     <dgm:cxn modelId="{B2C9A602-04B5-410B-8AC7-F2F5D07B7580}" type="presParOf" srcId="{D3A58B72-0D9D-4FB0-ACF6-76ABA25CC1EF}" destId="{C1014973-C0C6-4B89-8792-C5B357FF1720}" srcOrd="1" destOrd="0" presId="urn:microsoft.com/office/officeart/2005/8/layout/funnel1"/>
     <dgm:cxn modelId="{56E203FE-116B-4879-A10F-D318389A1AD3}" type="presParOf" srcId="{D3A58B72-0D9D-4FB0-ACF6-76ABA25CC1EF}" destId="{157FB8B2-163E-43AA-9EC8-EEB7D217E086}" srcOrd="2" destOrd="0" presId="urn:microsoft.com/office/officeart/2005/8/layout/funnel1"/>
@@ -4723,10 +4685,9 @@
         <a:lstStyle/>
         <a:p>
           <a:r>
-            <a:rPr lang="en-US" sz="2800" dirty="0" smtClean="0"/>
+            <a:rPr lang="en-US" sz="2800" dirty="0"/>
             <a:t>Forward Propagation of Uncertainty</a:t>
           </a:r>
-          <a:endParaRPr lang="en-US" sz="2800" dirty="0"/>
         </a:p>
       </dgm:t>
     </dgm:pt>
@@ -4760,10 +4721,9 @@
         <a:lstStyle/>
         <a:p>
           <a:r>
-            <a:rPr lang="en-US" sz="2800" dirty="0" smtClean="0"/>
+            <a:rPr lang="en-US" sz="2800" dirty="0"/>
             <a:t>Investigates the impacts of random input values of model parameters on model outputs</a:t>
           </a:r>
-          <a:endParaRPr lang="en-US" sz="2800" dirty="0"/>
         </a:p>
       </dgm:t>
     </dgm:pt>
@@ -4797,10 +4757,9 @@
         <a:lstStyle/>
         <a:p>
           <a:r>
-            <a:rPr lang="en-US" sz="2800" dirty="0" smtClean="0"/>
+            <a:rPr lang="en-US" sz="2800" dirty="0"/>
             <a:t>Inverse Uncertainty Quantification</a:t>
           </a:r>
-          <a:endParaRPr lang="en-US" sz="2800" dirty="0"/>
         </a:p>
       </dgm:t>
     </dgm:pt>
@@ -4834,10 +4793,9 @@
         <a:lstStyle/>
         <a:p>
           <a:r>
-            <a:rPr lang="en-US" sz="2800" dirty="0" smtClean="0"/>
+            <a:rPr lang="en-US" sz="2800" dirty="0"/>
             <a:t>using experimental data to learn about the sources of modeling uncertainty</a:t>
           </a:r>
-          <a:endParaRPr lang="en-US" sz="2800" dirty="0"/>
         </a:p>
       </dgm:t>
     </dgm:pt>
@@ -4872,13 +4830,6 @@
         </dgm:presLayoutVars>
       </dgm:prSet>
       <dgm:spPr/>
-      <dgm:t>
-        <a:bodyPr/>
-        <a:lstStyle/>
-        <a:p>
-          <a:endParaRPr lang="en-US"/>
-        </a:p>
-      </dgm:t>
     </dgm:pt>
     <dgm:pt modelId="{5C9A9BF0-147B-4478-A0E6-6DFE025FBCAC}" type="pres">
       <dgm:prSet presAssocID="{6BD30B86-6E63-484E-9CF9-D5C6180BE587}" presName="linNode" presStyleCnt="0"/>
@@ -4891,13 +4842,6 @@
         </dgm:presLayoutVars>
       </dgm:prSet>
       <dgm:spPr/>
-      <dgm:t>
-        <a:bodyPr/>
-        <a:lstStyle/>
-        <a:p>
-          <a:endParaRPr lang="en-US"/>
-        </a:p>
-      </dgm:t>
     </dgm:pt>
     <dgm:pt modelId="{234E15B5-1992-433F-AE7A-2BD232D5F9C1}" type="pres">
       <dgm:prSet presAssocID="{6BD30B86-6E63-484E-9CF9-D5C6180BE587}" presName="childShp" presStyleLbl="bgAccFollowNode1" presStyleIdx="0" presStyleCnt="2" custLinFactNeighborX="-358" custLinFactNeighborY="-26">
@@ -4906,13 +4850,6 @@
         </dgm:presLayoutVars>
       </dgm:prSet>
       <dgm:spPr/>
-      <dgm:t>
-        <a:bodyPr/>
-        <a:lstStyle/>
-        <a:p>
-          <a:endParaRPr lang="en-US"/>
-        </a:p>
-      </dgm:t>
     </dgm:pt>
     <dgm:pt modelId="{147B896B-C0B3-4FD6-BB5D-C71145D3502F}" type="pres">
       <dgm:prSet presAssocID="{C3B58F22-DF41-4CBC-A43D-5B82C008BEF1}" presName="spacing" presStyleCnt="0"/>
@@ -4929,13 +4866,6 @@
         </dgm:presLayoutVars>
       </dgm:prSet>
       <dgm:spPr/>
-      <dgm:t>
-        <a:bodyPr/>
-        <a:lstStyle/>
-        <a:p>
-          <a:endParaRPr lang="en-US"/>
-        </a:p>
-      </dgm:t>
     </dgm:pt>
     <dgm:pt modelId="{AF97286F-DE4D-4D21-923A-0C8E3289DDB2}" type="pres">
       <dgm:prSet presAssocID="{8813CC15-E3AF-4EE9-8CC3-08E0DF124B2B}" presName="childShp" presStyleLbl="bgAccFollowNode1" presStyleIdx="1" presStyleCnt="2">
@@ -4944,25 +4874,18 @@
         </dgm:presLayoutVars>
       </dgm:prSet>
       <dgm:spPr/>
-      <dgm:t>
-        <a:bodyPr/>
-        <a:lstStyle/>
-        <a:p>
-          <a:endParaRPr lang="en-US"/>
-        </a:p>
-      </dgm:t>
     </dgm:pt>
   </dgm:ptLst>
   <dgm:cxnLst>
-    <dgm:cxn modelId="{3517BC94-0B70-4749-8E13-46F75F6A0C6C}" srcId="{8813CC15-E3AF-4EE9-8CC3-08E0DF124B2B}" destId="{53A706F1-7BE7-4B65-8C79-64D92BB217B0}" srcOrd="0" destOrd="0" parTransId="{84C15831-477D-44C5-8EF7-3058C1722A7A}" sibTransId="{F24A94F5-7CF3-43C4-BDCF-42C4BCCE841B}"/>
-    <dgm:cxn modelId="{4C1FD9F4-5CD8-42FF-ACF4-CE191FA36AEB}" srcId="{1E7982B6-261F-4E0D-85CF-AFB8898FA926}" destId="{6BD30B86-6E63-484E-9CF9-D5C6180BE587}" srcOrd="0" destOrd="0" parTransId="{E550FB3D-3EE7-453C-9528-C2A578C98294}" sibTransId="{C3B58F22-DF41-4CBC-A43D-5B82C008BEF1}"/>
+    <dgm:cxn modelId="{51D2EB02-6BD6-422D-9314-1F385B053707}" type="presOf" srcId="{6BD30B86-6E63-484E-9CF9-D5C6180BE587}" destId="{40BCD131-2073-4EDE-9795-02928553C85F}" srcOrd="0" destOrd="0" presId="urn:microsoft.com/office/officeart/2005/8/layout/vList6"/>
     <dgm:cxn modelId="{DA6BDA08-0FC6-4E53-AB47-241F6623AEF4}" type="presOf" srcId="{1E7982B6-261F-4E0D-85CF-AFB8898FA926}" destId="{F6BC2A56-8E24-4633-9F0F-74F252669F27}" srcOrd="0" destOrd="0" presId="urn:microsoft.com/office/officeart/2005/8/layout/vList6"/>
-    <dgm:cxn modelId="{A0405EAE-990B-4F20-B289-67131FB4278D}" type="presOf" srcId="{8813CC15-E3AF-4EE9-8CC3-08E0DF124B2B}" destId="{116AF5B1-E45C-4738-8EBC-F071EB4E45FD}" srcOrd="0" destOrd="0" presId="urn:microsoft.com/office/officeart/2005/8/layout/vList6"/>
-    <dgm:cxn modelId="{51D2EB02-6BD6-422D-9314-1F385B053707}" type="presOf" srcId="{6BD30B86-6E63-484E-9CF9-D5C6180BE587}" destId="{40BCD131-2073-4EDE-9795-02928553C85F}" srcOrd="0" destOrd="0" presId="urn:microsoft.com/office/officeart/2005/8/layout/vList6"/>
-    <dgm:cxn modelId="{A1F09CA7-7683-4B05-9E24-EA96970D0CE2}" type="presOf" srcId="{53A706F1-7BE7-4B65-8C79-64D92BB217B0}" destId="{AF97286F-DE4D-4D21-923A-0C8E3289DDB2}" srcOrd="0" destOrd="0" presId="urn:microsoft.com/office/officeart/2005/8/layout/vList6"/>
-    <dgm:cxn modelId="{412359B2-18DB-4350-846A-9E645FB4A7EF}" srcId="{6BD30B86-6E63-484E-9CF9-D5C6180BE587}" destId="{6B2FAED9-D35B-40EF-8571-857622692A77}" srcOrd="0" destOrd="0" parTransId="{36446724-EDA3-4799-BE41-305A8FE567CC}" sibTransId="{9C197227-3985-4A0F-8C70-6DA014A00B96}"/>
     <dgm:cxn modelId="{A4404D18-9CBF-4384-8998-477683FAA36D}" type="presOf" srcId="{6B2FAED9-D35B-40EF-8571-857622692A77}" destId="{234E15B5-1992-433F-AE7A-2BD232D5F9C1}" srcOrd="0" destOrd="0" presId="urn:microsoft.com/office/officeart/2005/8/layout/vList6"/>
     <dgm:cxn modelId="{EA2C217A-5BBF-4435-9F5B-0883B361B148}" srcId="{1E7982B6-261F-4E0D-85CF-AFB8898FA926}" destId="{8813CC15-E3AF-4EE9-8CC3-08E0DF124B2B}" srcOrd="1" destOrd="0" parTransId="{CE7CB66D-843B-4D82-ACAE-307F659C6710}" sibTransId="{1ED23F48-7363-4CE9-8B2C-FED4F4DB44AD}"/>
+    <dgm:cxn modelId="{3517BC94-0B70-4749-8E13-46F75F6A0C6C}" srcId="{8813CC15-E3AF-4EE9-8CC3-08E0DF124B2B}" destId="{53A706F1-7BE7-4B65-8C79-64D92BB217B0}" srcOrd="0" destOrd="0" parTransId="{84C15831-477D-44C5-8EF7-3058C1722A7A}" sibTransId="{F24A94F5-7CF3-43C4-BDCF-42C4BCCE841B}"/>
+    <dgm:cxn modelId="{A1F09CA7-7683-4B05-9E24-EA96970D0CE2}" type="presOf" srcId="{53A706F1-7BE7-4B65-8C79-64D92BB217B0}" destId="{AF97286F-DE4D-4D21-923A-0C8E3289DDB2}" srcOrd="0" destOrd="0" presId="urn:microsoft.com/office/officeart/2005/8/layout/vList6"/>
+    <dgm:cxn modelId="{A0405EAE-990B-4F20-B289-67131FB4278D}" type="presOf" srcId="{8813CC15-E3AF-4EE9-8CC3-08E0DF124B2B}" destId="{116AF5B1-E45C-4738-8EBC-F071EB4E45FD}" srcOrd="0" destOrd="0" presId="urn:microsoft.com/office/officeart/2005/8/layout/vList6"/>
+    <dgm:cxn modelId="{412359B2-18DB-4350-846A-9E645FB4A7EF}" srcId="{6BD30B86-6E63-484E-9CF9-D5C6180BE587}" destId="{6B2FAED9-D35B-40EF-8571-857622692A77}" srcOrd="0" destOrd="0" parTransId="{36446724-EDA3-4799-BE41-305A8FE567CC}" sibTransId="{9C197227-3985-4A0F-8C70-6DA014A00B96}"/>
+    <dgm:cxn modelId="{4C1FD9F4-5CD8-42FF-ACF4-CE191FA36AEB}" srcId="{1E7982B6-261F-4E0D-85CF-AFB8898FA926}" destId="{6BD30B86-6E63-484E-9CF9-D5C6180BE587}" srcOrd="0" destOrd="0" parTransId="{E550FB3D-3EE7-453C-9528-C2A578C98294}" sibTransId="{C3B58F22-DF41-4CBC-A43D-5B82C008BEF1}"/>
     <dgm:cxn modelId="{36754631-76C3-48D8-9A08-076AD0002927}" type="presParOf" srcId="{F6BC2A56-8E24-4633-9F0F-74F252669F27}" destId="{5C9A9BF0-147B-4478-A0E6-6DFE025FBCAC}" srcOrd="0" destOrd="0" presId="urn:microsoft.com/office/officeart/2005/8/layout/vList6"/>
     <dgm:cxn modelId="{B62D4D64-F963-4188-9EBB-A1FCD2D788A1}" type="presParOf" srcId="{5C9A9BF0-147B-4478-A0E6-6DFE025FBCAC}" destId="{40BCD131-2073-4EDE-9795-02928553C85F}" srcOrd="0" destOrd="0" presId="urn:microsoft.com/office/officeart/2005/8/layout/vList6"/>
     <dgm:cxn modelId="{D79D9F45-60D5-4931-8000-F4313BB970EC}" type="presParOf" srcId="{5C9A9BF0-147B-4478-A0E6-6DFE025FBCAC}" destId="{234E15B5-1992-433F-AE7A-2BD232D5F9C1}" srcOrd="1" destOrd="0" presId="urn:microsoft.com/office/officeart/2005/8/layout/vList6"/>
@@ -4996,10 +4919,9 @@
         <a:lstStyle/>
         <a:p>
           <a:r>
-            <a:rPr lang="en-US" sz="1600" dirty="0" smtClean="0"/>
+            <a:rPr lang="en-US" sz="1600" dirty="0"/>
             <a:t>Objective 1: Understand the key drivers of impact of malaria interventions in Ghana</a:t>
           </a:r>
-          <a:endParaRPr lang="en-US" sz="1600" dirty="0"/>
         </a:p>
       </dgm:t>
     </dgm:pt>
@@ -5040,10 +4962,9 @@
         <a:lstStyle/>
         <a:p>
           <a:r>
-            <a:rPr lang="en-US" sz="1600" dirty="0" smtClean="0"/>
+            <a:rPr lang="en-US" sz="1600" dirty="0"/>
             <a:t>Objective 3: Simulate the impact of malaria interventions in Ghana in order to support decisions for strategic planning </a:t>
           </a:r>
-          <a:endParaRPr lang="en-US" sz="1600" dirty="0"/>
         </a:p>
       </dgm:t>
     </dgm:pt>
@@ -5084,10 +5005,9 @@
         <a:lstStyle/>
         <a:p>
           <a:r>
-            <a:rPr lang="en-US" sz="1600" dirty="0" smtClean="0"/>
+            <a:rPr lang="en-US" sz="1600" dirty="0"/>
             <a:t>Objective 2: Develop a novel inference framework for calibrating the OpenMalaria model at a higher spatial resolution</a:t>
           </a:r>
-          <a:endParaRPr lang="en-US" sz="1600" dirty="0"/>
         </a:p>
       </dgm:t>
     </dgm:pt>
@@ -5132,13 +5052,6 @@
         </dgm:presLayoutVars>
       </dgm:prSet>
       <dgm:spPr/>
-      <dgm:t>
-        <a:bodyPr/>
-        <a:lstStyle/>
-        <a:p>
-          <a:endParaRPr lang="en-US"/>
-        </a:p>
-      </dgm:t>
     </dgm:pt>
     <dgm:pt modelId="{CA7E8DC5-999A-4073-B045-406B3B9DE05B}" type="pres">
       <dgm:prSet presAssocID="{1EEF7536-549D-4C4C-8608-47F7B5BFA429}" presName="parTxOnlySpace" presStyleCnt="0"/>
@@ -5153,13 +5066,6 @@
         </dgm:presLayoutVars>
       </dgm:prSet>
       <dgm:spPr/>
-      <dgm:t>
-        <a:bodyPr/>
-        <a:lstStyle/>
-        <a:p>
-          <a:endParaRPr lang="en-US"/>
-        </a:p>
-      </dgm:t>
     </dgm:pt>
     <dgm:pt modelId="{2C4266BF-A7A6-472E-AA57-4A8FF254C584}" type="pres">
       <dgm:prSet presAssocID="{2E5475A2-F899-4FAB-AB3A-0505D18E2C8F}" presName="parTxOnlySpace" presStyleCnt="0"/>
@@ -5174,23 +5080,16 @@
         </dgm:presLayoutVars>
       </dgm:prSet>
       <dgm:spPr/>
-      <dgm:t>
-        <a:bodyPr/>
-        <a:lstStyle/>
-        <a:p>
-          <a:endParaRPr lang="en-US"/>
-        </a:p>
-      </dgm:t>
     </dgm:pt>
   </dgm:ptLst>
   <dgm:cxnLst>
+    <dgm:cxn modelId="{F22C7F00-EA54-4BAA-BAA8-3902A209A289}" srcId="{34DA2E1C-0015-4D0A-9271-50F46B3BC8A9}" destId="{B7A7EA82-523F-4CF9-A5EE-B7644BD728C8}" srcOrd="0" destOrd="0" parTransId="{74C039AF-64ED-4098-99B1-96742542C3A1}" sibTransId="{1EEF7536-549D-4C4C-8608-47F7B5BFA429}"/>
+    <dgm:cxn modelId="{2B570D05-5E16-42D3-A705-6150C885FD22}" srcId="{34DA2E1C-0015-4D0A-9271-50F46B3BC8A9}" destId="{39C5026A-70DB-44B0-99E9-240E7EE12322}" srcOrd="1" destOrd="0" parTransId="{3B4B5825-9D1B-4EF7-BEB4-501FFF1212B7}" sibTransId="{2E5475A2-F899-4FAB-AB3A-0505D18E2C8F}"/>
+    <dgm:cxn modelId="{0D3DD417-99A7-4A01-9843-B35F2D94E5D7}" type="presOf" srcId="{B7A7EA82-523F-4CF9-A5EE-B7644BD728C8}" destId="{5E73E2A8-82C3-489B-9C27-4D9F4835CBBB}" srcOrd="0" destOrd="0" presId="urn:microsoft.com/office/officeart/2005/8/layout/chevron1"/>
+    <dgm:cxn modelId="{AF9BBD6B-0C50-431F-B4DF-CBEB99E89DF6}" type="presOf" srcId="{92D4D07F-124D-4D0D-B352-090442024928}" destId="{DA19C7B6-2CC0-4AB1-8ECC-BCAA75C85DFF}" srcOrd="0" destOrd="0" presId="urn:microsoft.com/office/officeart/2005/8/layout/chevron1"/>
+    <dgm:cxn modelId="{A5DCE7AF-5239-4BE8-8E4E-F610BF93D11F}" type="presOf" srcId="{34DA2E1C-0015-4D0A-9271-50F46B3BC8A9}" destId="{6B655AFE-4055-452C-91A1-35373C7D485F}" srcOrd="0" destOrd="0" presId="urn:microsoft.com/office/officeart/2005/8/layout/chevron1"/>
+    <dgm:cxn modelId="{186D20B6-C3C1-47F1-BFB2-4C19BB50322B}" srcId="{34DA2E1C-0015-4D0A-9271-50F46B3BC8A9}" destId="{92D4D07F-124D-4D0D-B352-090442024928}" srcOrd="2" destOrd="0" parTransId="{D6A6D522-00F2-4BFA-A8DA-61CE9CAE95DB}" sibTransId="{D4C18A54-B46C-49E1-B3F7-901CB4BA2332}"/>
     <dgm:cxn modelId="{2CCFB7E1-532E-4E32-9FC4-1D51D8325541}" type="presOf" srcId="{39C5026A-70DB-44B0-99E9-240E7EE12322}" destId="{5796A450-ACCF-47F3-AB14-58D05BC160FC}" srcOrd="0" destOrd="0" presId="urn:microsoft.com/office/officeart/2005/8/layout/chevron1"/>
-    <dgm:cxn modelId="{186D20B6-C3C1-47F1-BFB2-4C19BB50322B}" srcId="{34DA2E1C-0015-4D0A-9271-50F46B3BC8A9}" destId="{92D4D07F-124D-4D0D-B352-090442024928}" srcOrd="2" destOrd="0" parTransId="{D6A6D522-00F2-4BFA-A8DA-61CE9CAE95DB}" sibTransId="{D4C18A54-B46C-49E1-B3F7-901CB4BA2332}"/>
-    <dgm:cxn modelId="{AF9BBD6B-0C50-431F-B4DF-CBEB99E89DF6}" type="presOf" srcId="{92D4D07F-124D-4D0D-B352-090442024928}" destId="{DA19C7B6-2CC0-4AB1-8ECC-BCAA75C85DFF}" srcOrd="0" destOrd="0" presId="urn:microsoft.com/office/officeart/2005/8/layout/chevron1"/>
-    <dgm:cxn modelId="{2B570D05-5E16-42D3-A705-6150C885FD22}" srcId="{34DA2E1C-0015-4D0A-9271-50F46B3BC8A9}" destId="{39C5026A-70DB-44B0-99E9-240E7EE12322}" srcOrd="1" destOrd="0" parTransId="{3B4B5825-9D1B-4EF7-BEB4-501FFF1212B7}" sibTransId="{2E5475A2-F899-4FAB-AB3A-0505D18E2C8F}"/>
-    <dgm:cxn modelId="{A5DCE7AF-5239-4BE8-8E4E-F610BF93D11F}" type="presOf" srcId="{34DA2E1C-0015-4D0A-9271-50F46B3BC8A9}" destId="{6B655AFE-4055-452C-91A1-35373C7D485F}" srcOrd="0" destOrd="0" presId="urn:microsoft.com/office/officeart/2005/8/layout/chevron1"/>
-    <dgm:cxn modelId="{0D3DD417-99A7-4A01-9843-B35F2D94E5D7}" type="presOf" srcId="{B7A7EA82-523F-4CF9-A5EE-B7644BD728C8}" destId="{5E73E2A8-82C3-489B-9C27-4D9F4835CBBB}" srcOrd="0" destOrd="0" presId="urn:microsoft.com/office/officeart/2005/8/layout/chevron1"/>
-    <dgm:cxn modelId="{F22C7F00-EA54-4BAA-BAA8-3902A209A289}" srcId="{34DA2E1C-0015-4D0A-9271-50F46B3BC8A9}" destId="{B7A7EA82-523F-4CF9-A5EE-B7644BD728C8}" srcOrd="0" destOrd="0" parTransId="{74C039AF-64ED-4098-99B1-96742542C3A1}" sibTransId="{1EEF7536-549D-4C4C-8608-47F7B5BFA429}"/>
     <dgm:cxn modelId="{52FDE9E0-8777-4A5D-8BA5-D6A80A64C975}" type="presParOf" srcId="{6B655AFE-4055-452C-91A1-35373C7D485F}" destId="{5E73E2A8-82C3-489B-9C27-4D9F4835CBBB}" srcOrd="0" destOrd="0" presId="urn:microsoft.com/office/officeart/2005/8/layout/chevron1"/>
     <dgm:cxn modelId="{8A6A6802-0C41-44EC-AB63-F86F8565A855}" type="presParOf" srcId="{6B655AFE-4055-452C-91A1-35373C7D485F}" destId="{CA7E8DC5-999A-4073-B045-406B3B9DE05B}" srcOrd="1" destOrd="0" presId="urn:microsoft.com/office/officeart/2005/8/layout/chevron1"/>
     <dgm:cxn modelId="{12FB8558-DE68-4797-8777-51F278BD65E9}" type="presParOf" srcId="{6B655AFE-4055-452C-91A1-35373C7D485F}" destId="{5796A450-ACCF-47F3-AB14-58D05BC160FC}" srcOrd="2" destOrd="0" presId="urn:microsoft.com/office/officeart/2005/8/layout/chevron1"/>
@@ -5229,10 +5128,9 @@
         <a:lstStyle/>
         <a:p>
           <a:r>
-            <a:rPr lang="en-US" sz="1600" dirty="0" smtClean="0"/>
+            <a:rPr lang="en-US" sz="1600" dirty="0"/>
             <a:t>Objective 1: Understand the key drivers of impact of interventions in Ghana</a:t>
           </a:r>
-          <a:endParaRPr lang="en-US" sz="1600" dirty="0"/>
         </a:p>
       </dgm:t>
     </dgm:pt>
@@ -5273,10 +5171,9 @@
         <a:lstStyle/>
         <a:p>
           <a:r>
-            <a:rPr lang="en-US" sz="1600" dirty="0" smtClean="0"/>
+            <a:rPr lang="en-US" sz="1600" dirty="0"/>
             <a:t>Objective 3: Simulate the impact of malaria interventions in Ghana in order to support decisions for strategic planning </a:t>
           </a:r>
-          <a:endParaRPr lang="en-US" sz="1600" dirty="0"/>
         </a:p>
       </dgm:t>
     </dgm:pt>
@@ -5316,10 +5213,9 @@
         <a:lstStyle/>
         <a:p>
           <a:r>
-            <a:rPr lang="en-US" sz="1600" dirty="0" smtClean="0"/>
+            <a:rPr lang="en-US" sz="1600" dirty="0"/>
             <a:t>Objective 2: Develop an efficient inference framework for calibrating the OpenMalaria model at a higher spatial resolution</a:t>
           </a:r>
-          <a:endParaRPr lang="en-US" sz="1600" dirty="0"/>
         </a:p>
       </dgm:t>
     </dgm:pt>
@@ -5364,13 +5260,6 @@
         </dgm:presLayoutVars>
       </dgm:prSet>
       <dgm:spPr/>
-      <dgm:t>
-        <a:bodyPr/>
-        <a:lstStyle/>
-        <a:p>
-          <a:endParaRPr lang="en-US"/>
-        </a:p>
-      </dgm:t>
     </dgm:pt>
     <dgm:pt modelId="{CA7E8DC5-999A-4073-B045-406B3B9DE05B}" type="pres">
       <dgm:prSet presAssocID="{1EEF7536-549D-4C4C-8608-47F7B5BFA429}" presName="parTxOnlySpace" presStyleCnt="0"/>
@@ -5385,13 +5274,6 @@
         </dgm:presLayoutVars>
       </dgm:prSet>
       <dgm:spPr/>
-      <dgm:t>
-        <a:bodyPr/>
-        <a:lstStyle/>
-        <a:p>
-          <a:endParaRPr lang="en-US"/>
-        </a:p>
-      </dgm:t>
     </dgm:pt>
     <dgm:pt modelId="{2C4266BF-A7A6-472E-AA57-4A8FF254C584}" type="pres">
       <dgm:prSet presAssocID="{2E5475A2-F899-4FAB-AB3A-0505D18E2C8F}" presName="parTxOnlySpace" presStyleCnt="0"/>
@@ -5406,23 +5288,16 @@
         </dgm:presLayoutVars>
       </dgm:prSet>
       <dgm:spPr/>
-      <dgm:t>
-        <a:bodyPr/>
-        <a:lstStyle/>
-        <a:p>
-          <a:endParaRPr lang="en-US"/>
-        </a:p>
-      </dgm:t>
     </dgm:pt>
   </dgm:ptLst>
   <dgm:cxnLst>
+    <dgm:cxn modelId="{F22C7F00-EA54-4BAA-BAA8-3902A209A289}" srcId="{34DA2E1C-0015-4D0A-9271-50F46B3BC8A9}" destId="{B7A7EA82-523F-4CF9-A5EE-B7644BD728C8}" srcOrd="0" destOrd="0" parTransId="{74C039AF-64ED-4098-99B1-96742542C3A1}" sibTransId="{1EEF7536-549D-4C4C-8608-47F7B5BFA429}"/>
+    <dgm:cxn modelId="{2B570D05-5E16-42D3-A705-6150C885FD22}" srcId="{34DA2E1C-0015-4D0A-9271-50F46B3BC8A9}" destId="{39C5026A-70DB-44B0-99E9-240E7EE12322}" srcOrd="1" destOrd="0" parTransId="{3B4B5825-9D1B-4EF7-BEB4-501FFF1212B7}" sibTransId="{2E5475A2-F899-4FAB-AB3A-0505D18E2C8F}"/>
+    <dgm:cxn modelId="{0D3DD417-99A7-4A01-9843-B35F2D94E5D7}" type="presOf" srcId="{B7A7EA82-523F-4CF9-A5EE-B7644BD728C8}" destId="{5E73E2A8-82C3-489B-9C27-4D9F4835CBBB}" srcOrd="0" destOrd="0" presId="urn:microsoft.com/office/officeart/2005/8/layout/chevron1"/>
+    <dgm:cxn modelId="{AF9BBD6B-0C50-431F-B4DF-CBEB99E89DF6}" type="presOf" srcId="{92D4D07F-124D-4D0D-B352-090442024928}" destId="{DA19C7B6-2CC0-4AB1-8ECC-BCAA75C85DFF}" srcOrd="0" destOrd="0" presId="urn:microsoft.com/office/officeart/2005/8/layout/chevron1"/>
+    <dgm:cxn modelId="{A5DCE7AF-5239-4BE8-8E4E-F610BF93D11F}" type="presOf" srcId="{34DA2E1C-0015-4D0A-9271-50F46B3BC8A9}" destId="{6B655AFE-4055-452C-91A1-35373C7D485F}" srcOrd="0" destOrd="0" presId="urn:microsoft.com/office/officeart/2005/8/layout/chevron1"/>
+    <dgm:cxn modelId="{186D20B6-C3C1-47F1-BFB2-4C19BB50322B}" srcId="{34DA2E1C-0015-4D0A-9271-50F46B3BC8A9}" destId="{92D4D07F-124D-4D0D-B352-090442024928}" srcOrd="2" destOrd="0" parTransId="{D6A6D522-00F2-4BFA-A8DA-61CE9CAE95DB}" sibTransId="{D4C18A54-B46C-49E1-B3F7-901CB4BA2332}"/>
     <dgm:cxn modelId="{2CCFB7E1-532E-4E32-9FC4-1D51D8325541}" type="presOf" srcId="{39C5026A-70DB-44B0-99E9-240E7EE12322}" destId="{5796A450-ACCF-47F3-AB14-58D05BC160FC}" srcOrd="0" destOrd="0" presId="urn:microsoft.com/office/officeart/2005/8/layout/chevron1"/>
-    <dgm:cxn modelId="{186D20B6-C3C1-47F1-BFB2-4C19BB50322B}" srcId="{34DA2E1C-0015-4D0A-9271-50F46B3BC8A9}" destId="{92D4D07F-124D-4D0D-B352-090442024928}" srcOrd="2" destOrd="0" parTransId="{D6A6D522-00F2-4BFA-A8DA-61CE9CAE95DB}" sibTransId="{D4C18A54-B46C-49E1-B3F7-901CB4BA2332}"/>
-    <dgm:cxn modelId="{AF9BBD6B-0C50-431F-B4DF-CBEB99E89DF6}" type="presOf" srcId="{92D4D07F-124D-4D0D-B352-090442024928}" destId="{DA19C7B6-2CC0-4AB1-8ECC-BCAA75C85DFF}" srcOrd="0" destOrd="0" presId="urn:microsoft.com/office/officeart/2005/8/layout/chevron1"/>
-    <dgm:cxn modelId="{2B570D05-5E16-42D3-A705-6150C885FD22}" srcId="{34DA2E1C-0015-4D0A-9271-50F46B3BC8A9}" destId="{39C5026A-70DB-44B0-99E9-240E7EE12322}" srcOrd="1" destOrd="0" parTransId="{3B4B5825-9D1B-4EF7-BEB4-501FFF1212B7}" sibTransId="{2E5475A2-F899-4FAB-AB3A-0505D18E2C8F}"/>
-    <dgm:cxn modelId="{A5DCE7AF-5239-4BE8-8E4E-F610BF93D11F}" type="presOf" srcId="{34DA2E1C-0015-4D0A-9271-50F46B3BC8A9}" destId="{6B655AFE-4055-452C-91A1-35373C7D485F}" srcOrd="0" destOrd="0" presId="urn:microsoft.com/office/officeart/2005/8/layout/chevron1"/>
-    <dgm:cxn modelId="{0D3DD417-99A7-4A01-9843-B35F2D94E5D7}" type="presOf" srcId="{B7A7EA82-523F-4CF9-A5EE-B7644BD728C8}" destId="{5E73E2A8-82C3-489B-9C27-4D9F4835CBBB}" srcOrd="0" destOrd="0" presId="urn:microsoft.com/office/officeart/2005/8/layout/chevron1"/>
-    <dgm:cxn modelId="{F22C7F00-EA54-4BAA-BAA8-3902A209A289}" srcId="{34DA2E1C-0015-4D0A-9271-50F46B3BC8A9}" destId="{B7A7EA82-523F-4CF9-A5EE-B7644BD728C8}" srcOrd="0" destOrd="0" parTransId="{74C039AF-64ED-4098-99B1-96742542C3A1}" sibTransId="{1EEF7536-549D-4C4C-8608-47F7B5BFA429}"/>
     <dgm:cxn modelId="{52FDE9E0-8777-4A5D-8BA5-D6A80A64C975}" type="presParOf" srcId="{6B655AFE-4055-452C-91A1-35373C7D485F}" destId="{5E73E2A8-82C3-489B-9C27-4D9F4835CBBB}" srcOrd="0" destOrd="0" presId="urn:microsoft.com/office/officeart/2005/8/layout/chevron1"/>
     <dgm:cxn modelId="{8A6A6802-0C41-44EC-AB63-F86F8565A855}" type="presParOf" srcId="{6B655AFE-4055-452C-91A1-35373C7D485F}" destId="{CA7E8DC5-999A-4073-B045-406B3B9DE05B}" srcOrd="1" destOrd="0" presId="urn:microsoft.com/office/officeart/2005/8/layout/chevron1"/>
     <dgm:cxn modelId="{12FB8558-DE68-4797-8777-51F278BD65E9}" type="presParOf" srcId="{6B655AFE-4055-452C-91A1-35373C7D485F}" destId="{5796A450-ACCF-47F3-AB14-58D05BC160FC}" srcOrd="2" destOrd="0" presId="urn:microsoft.com/office/officeart/2005/8/layout/chevron1"/>
@@ -5461,10 +5336,9 @@
         <a:lstStyle/>
         <a:p>
           <a:r>
-            <a:rPr lang="en-US" sz="1600" dirty="0" smtClean="0"/>
+            <a:rPr lang="en-US" sz="1600" dirty="0"/>
             <a:t>Objective 1: Understand the key drivers of impact of interventions in Ghana</a:t>
           </a:r>
-          <a:endParaRPr lang="en-US" sz="1600" dirty="0"/>
         </a:p>
       </dgm:t>
     </dgm:pt>
@@ -5504,10 +5378,9 @@
         <a:lstStyle/>
         <a:p>
           <a:r>
-            <a:rPr lang="en-US" sz="1600" dirty="0" smtClean="0"/>
+            <a:rPr lang="en-US" sz="1600" dirty="0"/>
             <a:t>Objective 3: Simulate the impact of malaria interventions in Ghana in order to support decisions for strategic planning </a:t>
           </a:r>
-          <a:endParaRPr lang="en-US" sz="1600" dirty="0"/>
         </a:p>
       </dgm:t>
     </dgm:pt>
@@ -5548,10 +5421,9 @@
         <a:lstStyle/>
         <a:p>
           <a:r>
-            <a:rPr lang="en-US" sz="1600" dirty="0" smtClean="0"/>
+            <a:rPr lang="en-US" sz="1600" dirty="0"/>
             <a:t>Objective 2: Develop a novel inference framework for calibrating the OpenMalaria model at a higher spatial resolution</a:t>
           </a:r>
-          <a:endParaRPr lang="en-US" sz="1600" dirty="0"/>
         </a:p>
       </dgm:t>
     </dgm:pt>
@@ -5596,13 +5468,6 @@
         </dgm:presLayoutVars>
       </dgm:prSet>
       <dgm:spPr/>
-      <dgm:t>
-        <a:bodyPr/>
-        <a:lstStyle/>
-        <a:p>
-          <a:endParaRPr lang="en-US"/>
-        </a:p>
-      </dgm:t>
     </dgm:pt>
     <dgm:pt modelId="{CA7E8DC5-999A-4073-B045-406B3B9DE05B}" type="pres">
       <dgm:prSet presAssocID="{1EEF7536-549D-4C4C-8608-47F7B5BFA429}" presName="parTxOnlySpace" presStyleCnt="0"/>
@@ -5617,13 +5482,6 @@
         </dgm:presLayoutVars>
       </dgm:prSet>
       <dgm:spPr/>
-      <dgm:t>
-        <a:bodyPr/>
-        <a:lstStyle/>
-        <a:p>
-          <a:endParaRPr lang="en-US"/>
-        </a:p>
-      </dgm:t>
     </dgm:pt>
     <dgm:pt modelId="{2C4266BF-A7A6-472E-AA57-4A8FF254C584}" type="pres">
       <dgm:prSet presAssocID="{2E5475A2-F899-4FAB-AB3A-0505D18E2C8F}" presName="parTxOnlySpace" presStyleCnt="0"/>
@@ -5638,23 +5496,16 @@
         </dgm:presLayoutVars>
       </dgm:prSet>
       <dgm:spPr/>
-      <dgm:t>
-        <a:bodyPr/>
-        <a:lstStyle/>
-        <a:p>
-          <a:endParaRPr lang="en-US"/>
-        </a:p>
-      </dgm:t>
     </dgm:pt>
   </dgm:ptLst>
   <dgm:cxnLst>
+    <dgm:cxn modelId="{F22C7F00-EA54-4BAA-BAA8-3902A209A289}" srcId="{34DA2E1C-0015-4D0A-9271-50F46B3BC8A9}" destId="{B7A7EA82-523F-4CF9-A5EE-B7644BD728C8}" srcOrd="0" destOrd="0" parTransId="{74C039AF-64ED-4098-99B1-96742542C3A1}" sibTransId="{1EEF7536-549D-4C4C-8608-47F7B5BFA429}"/>
+    <dgm:cxn modelId="{2B570D05-5E16-42D3-A705-6150C885FD22}" srcId="{34DA2E1C-0015-4D0A-9271-50F46B3BC8A9}" destId="{39C5026A-70DB-44B0-99E9-240E7EE12322}" srcOrd="1" destOrd="0" parTransId="{3B4B5825-9D1B-4EF7-BEB4-501FFF1212B7}" sibTransId="{2E5475A2-F899-4FAB-AB3A-0505D18E2C8F}"/>
+    <dgm:cxn modelId="{0D3DD417-99A7-4A01-9843-B35F2D94E5D7}" type="presOf" srcId="{B7A7EA82-523F-4CF9-A5EE-B7644BD728C8}" destId="{5E73E2A8-82C3-489B-9C27-4D9F4835CBBB}" srcOrd="0" destOrd="0" presId="urn:microsoft.com/office/officeart/2005/8/layout/chevron1"/>
+    <dgm:cxn modelId="{AF9BBD6B-0C50-431F-B4DF-CBEB99E89DF6}" type="presOf" srcId="{92D4D07F-124D-4D0D-B352-090442024928}" destId="{DA19C7B6-2CC0-4AB1-8ECC-BCAA75C85DFF}" srcOrd="0" destOrd="0" presId="urn:microsoft.com/office/officeart/2005/8/layout/chevron1"/>
+    <dgm:cxn modelId="{A5DCE7AF-5239-4BE8-8E4E-F610BF93D11F}" type="presOf" srcId="{34DA2E1C-0015-4D0A-9271-50F46B3BC8A9}" destId="{6B655AFE-4055-452C-91A1-35373C7D485F}" srcOrd="0" destOrd="0" presId="urn:microsoft.com/office/officeart/2005/8/layout/chevron1"/>
+    <dgm:cxn modelId="{186D20B6-C3C1-47F1-BFB2-4C19BB50322B}" srcId="{34DA2E1C-0015-4D0A-9271-50F46B3BC8A9}" destId="{92D4D07F-124D-4D0D-B352-090442024928}" srcOrd="2" destOrd="0" parTransId="{D6A6D522-00F2-4BFA-A8DA-61CE9CAE95DB}" sibTransId="{D4C18A54-B46C-49E1-B3F7-901CB4BA2332}"/>
     <dgm:cxn modelId="{2CCFB7E1-532E-4E32-9FC4-1D51D8325541}" type="presOf" srcId="{39C5026A-70DB-44B0-99E9-240E7EE12322}" destId="{5796A450-ACCF-47F3-AB14-58D05BC160FC}" srcOrd="0" destOrd="0" presId="urn:microsoft.com/office/officeart/2005/8/layout/chevron1"/>
-    <dgm:cxn modelId="{186D20B6-C3C1-47F1-BFB2-4C19BB50322B}" srcId="{34DA2E1C-0015-4D0A-9271-50F46B3BC8A9}" destId="{92D4D07F-124D-4D0D-B352-090442024928}" srcOrd="2" destOrd="0" parTransId="{D6A6D522-00F2-4BFA-A8DA-61CE9CAE95DB}" sibTransId="{D4C18A54-B46C-49E1-B3F7-901CB4BA2332}"/>
-    <dgm:cxn modelId="{AF9BBD6B-0C50-431F-B4DF-CBEB99E89DF6}" type="presOf" srcId="{92D4D07F-124D-4D0D-B352-090442024928}" destId="{DA19C7B6-2CC0-4AB1-8ECC-BCAA75C85DFF}" srcOrd="0" destOrd="0" presId="urn:microsoft.com/office/officeart/2005/8/layout/chevron1"/>
-    <dgm:cxn modelId="{2B570D05-5E16-42D3-A705-6150C885FD22}" srcId="{34DA2E1C-0015-4D0A-9271-50F46B3BC8A9}" destId="{39C5026A-70DB-44B0-99E9-240E7EE12322}" srcOrd="1" destOrd="0" parTransId="{3B4B5825-9D1B-4EF7-BEB4-501FFF1212B7}" sibTransId="{2E5475A2-F899-4FAB-AB3A-0505D18E2C8F}"/>
-    <dgm:cxn modelId="{A5DCE7AF-5239-4BE8-8E4E-F610BF93D11F}" type="presOf" srcId="{34DA2E1C-0015-4D0A-9271-50F46B3BC8A9}" destId="{6B655AFE-4055-452C-91A1-35373C7D485F}" srcOrd="0" destOrd="0" presId="urn:microsoft.com/office/officeart/2005/8/layout/chevron1"/>
-    <dgm:cxn modelId="{0D3DD417-99A7-4A01-9843-B35F2D94E5D7}" type="presOf" srcId="{B7A7EA82-523F-4CF9-A5EE-B7644BD728C8}" destId="{5E73E2A8-82C3-489B-9C27-4D9F4835CBBB}" srcOrd="0" destOrd="0" presId="urn:microsoft.com/office/officeart/2005/8/layout/chevron1"/>
-    <dgm:cxn modelId="{F22C7F00-EA54-4BAA-BAA8-3902A209A289}" srcId="{34DA2E1C-0015-4D0A-9271-50F46B3BC8A9}" destId="{B7A7EA82-523F-4CF9-A5EE-B7644BD728C8}" srcOrd="0" destOrd="0" parTransId="{74C039AF-64ED-4098-99B1-96742542C3A1}" sibTransId="{1EEF7536-549D-4C4C-8608-47F7B5BFA429}"/>
     <dgm:cxn modelId="{52FDE9E0-8777-4A5D-8BA5-D6A80A64C975}" type="presParOf" srcId="{6B655AFE-4055-452C-91A1-35373C7D485F}" destId="{5E73E2A8-82C3-489B-9C27-4D9F4835CBBB}" srcOrd="0" destOrd="0" presId="urn:microsoft.com/office/officeart/2005/8/layout/chevron1"/>
     <dgm:cxn modelId="{8A6A6802-0C41-44EC-AB63-F86F8565A855}" type="presParOf" srcId="{6B655AFE-4055-452C-91A1-35373C7D485F}" destId="{CA7E8DC5-999A-4073-B045-406B3B9DE05B}" srcOrd="1" destOrd="0" presId="urn:microsoft.com/office/officeart/2005/8/layout/chevron1"/>
     <dgm:cxn modelId="{12FB8558-DE68-4797-8777-51F278BD65E9}" type="presParOf" srcId="{6B655AFE-4055-452C-91A1-35373C7D485F}" destId="{5796A450-ACCF-47F3-AB14-58D05BC160FC}" srcOrd="2" destOrd="0" presId="urn:microsoft.com/office/officeart/2005/8/layout/chevron1"/>
@@ -5846,7 +5697,7 @@
         </a:bodyPr>
         <a:lstStyle/>
         <a:p>
-          <a:pPr lvl="0" algn="ctr" defTabSz="1466850">
+          <a:pPr marL="0" lvl="0" indent="0" algn="ctr" defTabSz="1466850">
             <a:lnSpc>
               <a:spcPct val="90000"/>
             </a:lnSpc>
@@ -5856,12 +5707,12 @@
             <a:spcAft>
               <a:spcPct val="35000"/>
             </a:spcAft>
+            <a:buNone/>
           </a:pPr>
           <a:r>
-            <a:rPr lang="en-US" sz="3300" b="1" kern="1200" dirty="0" smtClean="0"/>
+            <a:rPr lang="en-US" sz="3300" b="1" kern="1200" dirty="0"/>
             <a:t>Model output</a:t>
           </a:r>
-          <a:endParaRPr lang="en-US" sz="3300" b="1" kern="1200" dirty="0"/>
         </a:p>
       </dsp:txBody>
       <dsp:txXfrm>
@@ -5922,7 +5773,7 @@
         </a:bodyPr>
         <a:lstStyle/>
         <a:p>
-          <a:pPr lvl="0" algn="ctr" defTabSz="800100">
+          <a:pPr marL="0" lvl="0" indent="0" algn="ctr" defTabSz="800100">
             <a:lnSpc>
               <a:spcPct val="90000"/>
             </a:lnSpc>
@@ -5932,12 +5783,12 @@
             <a:spcAft>
               <a:spcPct val="35000"/>
             </a:spcAft>
+            <a:buNone/>
           </a:pPr>
           <a:r>
-            <a:rPr lang="en-US" sz="1800" kern="1200" dirty="0" smtClean="0"/>
+            <a:rPr lang="en-US" sz="1800" kern="1200" dirty="0"/>
             <a:t>Observation uncertainty</a:t>
           </a:r>
-          <a:endParaRPr lang="en-US" sz="1800" kern="1200" dirty="0"/>
         </a:p>
       </dsp:txBody>
       <dsp:txXfrm>
@@ -5993,7 +5844,7 @@
         </a:bodyPr>
         <a:lstStyle/>
         <a:p>
-          <a:pPr lvl="0" algn="ctr" defTabSz="800100">
+          <a:pPr marL="0" lvl="0" indent="0" algn="ctr" defTabSz="800100">
             <a:lnSpc>
               <a:spcPct val="90000"/>
             </a:lnSpc>
@@ -6003,9 +5854,10 @@
             <a:spcAft>
               <a:spcPct val="35000"/>
             </a:spcAft>
+            <a:buNone/>
           </a:pPr>
           <a:r>
-            <a:rPr lang="de-CH" sz="1800" kern="1200" dirty="0" smtClean="0"/>
+            <a:rPr lang="de-CH" sz="1800" kern="1200" dirty="0"/>
             <a:t>Parameter uncertainty</a:t>
           </a:r>
           <a:endParaRPr lang="en-US" sz="1800" kern="1200" dirty="0"/>
@@ -6069,7 +5921,7 @@
         </a:bodyPr>
         <a:lstStyle/>
         <a:p>
-          <a:pPr lvl="0" algn="ctr" defTabSz="800100">
+          <a:pPr marL="0" lvl="0" indent="0" algn="ctr" defTabSz="800100">
             <a:lnSpc>
               <a:spcPct val="90000"/>
             </a:lnSpc>
@@ -6079,12 +5931,12 @@
             <a:spcAft>
               <a:spcPct val="35000"/>
             </a:spcAft>
+            <a:buNone/>
           </a:pPr>
           <a:r>
-            <a:rPr lang="en-US" sz="1800" kern="1200" dirty="0" smtClean="0"/>
+            <a:rPr lang="en-US" sz="1800" kern="1200" dirty="0"/>
             <a:t>Stochastic uncertainty</a:t>
           </a:r>
-          <a:endParaRPr lang="en-US" sz="1800" kern="1200" dirty="0"/>
         </a:p>
       </dsp:txBody>
       <dsp:txXfrm>
@@ -6231,13 +6083,12 @@
             <a:spcAft>
               <a:spcPct val="15000"/>
             </a:spcAft>
-            <a:buChar char="••"/>
+            <a:buChar char="•"/>
           </a:pPr>
           <a:r>
-            <a:rPr lang="en-US" sz="2800" kern="1200" dirty="0" smtClean="0"/>
+            <a:rPr lang="en-US" sz="2800" kern="1200" dirty="0"/>
             <a:t>Investigates the impacts of random input values of model parameters on model outputs</a:t>
           </a:r>
-          <a:endParaRPr lang="en-US" sz="2800" kern="1200" dirty="0"/>
         </a:p>
       </dsp:txBody>
       <dsp:txXfrm>
@@ -6328,7 +6179,7 @@
         </a:bodyPr>
         <a:lstStyle/>
         <a:p>
-          <a:pPr lvl="0" algn="ctr" defTabSz="1244600">
+          <a:pPr marL="0" lvl="0" indent="0" algn="ctr" defTabSz="1244600">
             <a:lnSpc>
               <a:spcPct val="90000"/>
             </a:lnSpc>
@@ -6338,12 +6189,12 @@
             <a:spcAft>
               <a:spcPct val="35000"/>
             </a:spcAft>
+            <a:buNone/>
           </a:pPr>
           <a:r>
-            <a:rPr lang="en-US" sz="2800" kern="1200" dirty="0" smtClean="0"/>
+            <a:rPr lang="en-US" sz="2800" kern="1200" dirty="0"/>
             <a:t>Forward Propagation of Uncertainty</a:t>
           </a:r>
-          <a:endParaRPr lang="en-US" sz="2800" kern="1200" dirty="0"/>
         </a:p>
       </dsp:txBody>
       <dsp:txXfrm>
@@ -6421,13 +6272,12 @@
             <a:spcAft>
               <a:spcPct val="15000"/>
             </a:spcAft>
-            <a:buChar char="••"/>
+            <a:buChar char="•"/>
           </a:pPr>
           <a:r>
-            <a:rPr lang="en-US" sz="2800" kern="1200" dirty="0" smtClean="0"/>
+            <a:rPr lang="en-US" sz="2800" kern="1200" dirty="0"/>
             <a:t>using experimental data to learn about the sources of modeling uncertainty</a:t>
           </a:r>
-          <a:endParaRPr lang="en-US" sz="2800" kern="1200" dirty="0"/>
         </a:p>
       </dsp:txBody>
       <dsp:txXfrm>
@@ -6518,7 +6368,7 @@
         </a:bodyPr>
         <a:lstStyle/>
         <a:p>
-          <a:pPr lvl="0" algn="ctr" defTabSz="1244600">
+          <a:pPr marL="0" lvl="0" indent="0" algn="ctr" defTabSz="1244600">
             <a:lnSpc>
               <a:spcPct val="90000"/>
             </a:lnSpc>
@@ -6528,12 +6378,12 @@
             <a:spcAft>
               <a:spcPct val="35000"/>
             </a:spcAft>
+            <a:buNone/>
           </a:pPr>
           <a:r>
-            <a:rPr lang="en-US" sz="2800" kern="1200" dirty="0" smtClean="0"/>
+            <a:rPr lang="en-US" sz="2800" kern="1200" dirty="0"/>
             <a:t>Inverse Uncertainty Quantification</a:t>
           </a:r>
-          <a:endParaRPr lang="en-US" sz="2800" kern="1200" dirty="0"/>
         </a:p>
       </dsp:txBody>
       <dsp:txXfrm>
@@ -6609,7 +6459,7 @@
         </a:bodyPr>
         <a:lstStyle/>
         <a:p>
-          <a:pPr lvl="0" algn="ctr" defTabSz="711200">
+          <a:pPr marL="0" lvl="0" indent="0" algn="ctr" defTabSz="711200">
             <a:lnSpc>
               <a:spcPct val="90000"/>
             </a:lnSpc>
@@ -6619,12 +6469,12 @@
             <a:spcAft>
               <a:spcPct val="35000"/>
             </a:spcAft>
+            <a:buNone/>
           </a:pPr>
           <a:r>
-            <a:rPr lang="en-US" sz="1600" kern="1200" dirty="0" smtClean="0"/>
+            <a:rPr lang="en-US" sz="1600" kern="1200" dirty="0"/>
             <a:t>Objective 1: Understand the key drivers of impact of malaria interventions in Ghana</a:t>
           </a:r>
-          <a:endParaRPr lang="en-US" sz="1600" kern="1200" dirty="0"/>
         </a:p>
       </dsp:txBody>
       <dsp:txXfrm>
@@ -6685,7 +6535,7 @@
         </a:bodyPr>
         <a:lstStyle/>
         <a:p>
-          <a:pPr lvl="0" algn="ctr" defTabSz="711200">
+          <a:pPr marL="0" lvl="0" indent="0" algn="ctr" defTabSz="711200">
             <a:lnSpc>
               <a:spcPct val="90000"/>
             </a:lnSpc>
@@ -6695,12 +6545,12 @@
             <a:spcAft>
               <a:spcPct val="35000"/>
             </a:spcAft>
+            <a:buNone/>
           </a:pPr>
           <a:r>
-            <a:rPr lang="en-US" sz="1600" kern="1200" dirty="0" smtClean="0"/>
+            <a:rPr lang="en-US" sz="1600" kern="1200" dirty="0"/>
             <a:t>Objective 2: Develop a novel inference framework for calibrating the OpenMalaria model at a higher spatial resolution</a:t>
           </a:r>
-          <a:endParaRPr lang="en-US" sz="1600" kern="1200" dirty="0"/>
         </a:p>
       </dsp:txBody>
       <dsp:txXfrm>
@@ -6761,7 +6611,7 @@
         </a:bodyPr>
         <a:lstStyle/>
         <a:p>
-          <a:pPr lvl="0" algn="ctr" defTabSz="711200">
+          <a:pPr marL="0" lvl="0" indent="0" algn="ctr" defTabSz="711200">
             <a:lnSpc>
               <a:spcPct val="90000"/>
             </a:lnSpc>
@@ -6771,12 +6621,12 @@
             <a:spcAft>
               <a:spcPct val="35000"/>
             </a:spcAft>
+            <a:buNone/>
           </a:pPr>
           <a:r>
-            <a:rPr lang="en-US" sz="1600" kern="1200" dirty="0" smtClean="0"/>
+            <a:rPr lang="en-US" sz="1600" kern="1200" dirty="0"/>
             <a:t>Objective 3: Simulate the impact of malaria interventions in Ghana in order to support decisions for strategic planning </a:t>
           </a:r>
-          <a:endParaRPr lang="en-US" sz="1600" kern="1200" dirty="0"/>
         </a:p>
       </dsp:txBody>
       <dsp:txXfrm>
@@ -6849,7 +6699,7 @@
         </a:bodyPr>
         <a:lstStyle/>
         <a:p>
-          <a:pPr lvl="0" algn="ctr" defTabSz="711200">
+          <a:pPr marL="0" lvl="0" indent="0" algn="ctr" defTabSz="711200">
             <a:lnSpc>
               <a:spcPct val="90000"/>
             </a:lnSpc>
@@ -6859,12 +6709,12 @@
             <a:spcAft>
               <a:spcPct val="35000"/>
             </a:spcAft>
+            <a:buNone/>
           </a:pPr>
           <a:r>
-            <a:rPr lang="en-US" sz="1600" kern="1200" dirty="0" smtClean="0"/>
+            <a:rPr lang="en-US" sz="1600" kern="1200" dirty="0"/>
             <a:t>Objective 1: Understand the key drivers of impact of interventions in Ghana</a:t>
           </a:r>
-          <a:endParaRPr lang="en-US" sz="1600" kern="1200" dirty="0"/>
         </a:p>
       </dsp:txBody>
       <dsp:txXfrm>
@@ -6924,7 +6774,7 @@
         </a:bodyPr>
         <a:lstStyle/>
         <a:p>
-          <a:pPr lvl="0" algn="ctr" defTabSz="711200">
+          <a:pPr marL="0" lvl="0" indent="0" algn="ctr" defTabSz="711200">
             <a:lnSpc>
               <a:spcPct val="90000"/>
             </a:lnSpc>
@@ -6934,12 +6784,12 @@
             <a:spcAft>
               <a:spcPct val="35000"/>
             </a:spcAft>
+            <a:buNone/>
           </a:pPr>
           <a:r>
-            <a:rPr lang="en-US" sz="1600" kern="1200" dirty="0" smtClean="0"/>
+            <a:rPr lang="en-US" sz="1600" kern="1200" dirty="0"/>
             <a:t>Objective 2: Develop an efficient inference framework for calibrating the OpenMalaria model at a higher spatial resolution</a:t>
           </a:r>
-          <a:endParaRPr lang="en-US" sz="1600" kern="1200" dirty="0"/>
         </a:p>
       </dsp:txBody>
       <dsp:txXfrm>
@@ -7000,7 +6850,7 @@
         </a:bodyPr>
         <a:lstStyle/>
         <a:p>
-          <a:pPr lvl="0" algn="ctr" defTabSz="711200">
+          <a:pPr marL="0" lvl="0" indent="0" algn="ctr" defTabSz="711200">
             <a:lnSpc>
               <a:spcPct val="90000"/>
             </a:lnSpc>
@@ -7010,12 +6860,12 @@
             <a:spcAft>
               <a:spcPct val="35000"/>
             </a:spcAft>
+            <a:buNone/>
           </a:pPr>
           <a:r>
-            <a:rPr lang="en-US" sz="1600" kern="1200" dirty="0" smtClean="0"/>
+            <a:rPr lang="en-US" sz="1600" kern="1200" dirty="0"/>
             <a:t>Objective 3: Simulate the impact of malaria interventions in Ghana in order to support decisions for strategic planning </a:t>
           </a:r>
-          <a:endParaRPr lang="en-US" sz="1600" kern="1200" dirty="0"/>
         </a:p>
       </dsp:txBody>
       <dsp:txXfrm>
@@ -7088,7 +6938,7 @@
         </a:bodyPr>
         <a:lstStyle/>
         <a:p>
-          <a:pPr lvl="0" algn="ctr" defTabSz="711200">
+          <a:pPr marL="0" lvl="0" indent="0" algn="ctr" defTabSz="711200">
             <a:lnSpc>
               <a:spcPct val="90000"/>
             </a:lnSpc>
@@ -7098,12 +6948,12 @@
             <a:spcAft>
               <a:spcPct val="35000"/>
             </a:spcAft>
+            <a:buNone/>
           </a:pPr>
           <a:r>
-            <a:rPr lang="en-US" sz="1600" kern="1200" dirty="0" smtClean="0"/>
+            <a:rPr lang="en-US" sz="1600" kern="1200" dirty="0"/>
             <a:t>Objective 1: Understand the key drivers of impact of interventions in Ghana</a:t>
           </a:r>
-          <a:endParaRPr lang="en-US" sz="1600" kern="1200" dirty="0"/>
         </a:p>
       </dsp:txBody>
       <dsp:txXfrm>
@@ -7164,7 +7014,7 @@
         </a:bodyPr>
         <a:lstStyle/>
         <a:p>
-          <a:pPr lvl="0" algn="ctr" defTabSz="711200">
+          <a:pPr marL="0" lvl="0" indent="0" algn="ctr" defTabSz="711200">
             <a:lnSpc>
               <a:spcPct val="90000"/>
             </a:lnSpc>
@@ -7174,12 +7024,12 @@
             <a:spcAft>
               <a:spcPct val="35000"/>
             </a:spcAft>
+            <a:buNone/>
           </a:pPr>
           <a:r>
-            <a:rPr lang="en-US" sz="1600" kern="1200" dirty="0" smtClean="0"/>
+            <a:rPr lang="en-US" sz="1600" kern="1200" dirty="0"/>
             <a:t>Objective 2: Develop a novel inference framework for calibrating the OpenMalaria model at a higher spatial resolution</a:t>
           </a:r>
-          <a:endParaRPr lang="en-US" sz="1600" kern="1200" dirty="0"/>
         </a:p>
       </dsp:txBody>
       <dsp:txXfrm>
@@ -7239,7 +7089,7 @@
         </a:bodyPr>
         <a:lstStyle/>
         <a:p>
-          <a:pPr lvl="0" algn="ctr" defTabSz="711200">
+          <a:pPr marL="0" lvl="0" indent="0" algn="ctr" defTabSz="711200">
             <a:lnSpc>
               <a:spcPct val="90000"/>
             </a:lnSpc>
@@ -7249,12 +7099,12 @@
             <a:spcAft>
               <a:spcPct val="35000"/>
             </a:spcAft>
+            <a:buNone/>
           </a:pPr>
           <a:r>
-            <a:rPr lang="en-US" sz="1600" kern="1200" dirty="0" smtClean="0"/>
+            <a:rPr lang="en-US" sz="1600" kern="1200" dirty="0"/>
             <a:t>Objective 3: Simulate the impact of malaria interventions in Ghana in order to support decisions for strategic planning </a:t>
           </a:r>
-          <a:endParaRPr lang="en-US" sz="1600" kern="1200" dirty="0"/>
         </a:p>
       </dsp:txBody>
       <dsp:txXfrm>
@@ -13994,7 +13844,7 @@
           <a:p>
             <a:fld id="{9EC4CD10-4918-4E51-B6DD-022074F71AA5}" type="datetimeFigureOut">
               <a:rPr lang="de-CH" smtClean="0"/>
-              <a:t>06.05.2025</a:t>
+              <a:t>01.06.2026</a:t>
             </a:fld>
             <a:endParaRPr lang="de-CH"/>
           </a:p>
@@ -14058,35 +13908,35 @@
           <a:p>
             <a:pPr lvl="0"/>
             <a:r>
-              <a:rPr lang="en-US" smtClean="0"/>
+              <a:rPr lang="en-US"/>
               <a:t>Edit Master text styles</a:t>
             </a:r>
           </a:p>
           <a:p>
             <a:pPr lvl="1"/>
             <a:r>
-              <a:rPr lang="en-US" smtClean="0"/>
+              <a:rPr lang="en-US"/>
               <a:t>Second level</a:t>
             </a:r>
           </a:p>
           <a:p>
             <a:pPr lvl="2"/>
             <a:r>
-              <a:rPr lang="en-US" smtClean="0"/>
+              <a:rPr lang="en-US"/>
               <a:t>Third level</a:t>
             </a:r>
           </a:p>
           <a:p>
             <a:pPr lvl="3"/>
             <a:r>
-              <a:rPr lang="en-US" smtClean="0"/>
+              <a:rPr lang="en-US"/>
               <a:t>Fourth level</a:t>
             </a:r>
           </a:p>
           <a:p>
             <a:pPr lvl="4"/>
             <a:r>
-              <a:rPr lang="en-US" smtClean="0"/>
+              <a:rPr lang="en-US"/>
               <a:t>Fifth level</a:t>
             </a:r>
             <a:endParaRPr lang="de-CH"/>
@@ -14432,11 +14282,11 @@
               <a:buChar char="•"/>
             </a:pPr>
             <a:r>
-              <a:rPr lang="en-US" dirty="0" smtClean="0"/>
+              <a:rPr lang="en-US" dirty="0"/>
               <a:t>To address uncertainties, we identify and quantify the various sources of uncertainty</a:t>
             </a:r>
             <a:r>
-              <a:rPr lang="en-US" baseline="0" dirty="0" smtClean="0"/>
+              <a:rPr lang="en-US" baseline="0" dirty="0"/>
               <a:t> in intervention modeling</a:t>
             </a:r>
             <a:endParaRPr dirty="0"/>
@@ -14562,11 +14412,11 @@
               <a:buChar char="•"/>
             </a:pPr>
             <a:r>
-              <a:rPr lang="en-US" dirty="0" smtClean="0"/>
+              <a:rPr lang="en-US" dirty="0"/>
               <a:t>To address uncertainties, we identify and quantify the various sources of uncertainty</a:t>
             </a:r>
             <a:r>
-              <a:rPr lang="en-US" baseline="0" dirty="0" smtClean="0"/>
+              <a:rPr lang="en-US" baseline="0" dirty="0"/>
               <a:t> in intervention modeling</a:t>
             </a:r>
             <a:endParaRPr dirty="0"/>
@@ -14692,71 +14542,71 @@
               <a:buChar char="•"/>
             </a:pPr>
             <a:r>
-              <a:rPr lang="de-CH" dirty="0" smtClean="0"/>
+              <a:rPr lang="de-CH" dirty="0"/>
               <a:t>LLINs</a:t>
             </a:r>
             <a:r>
-              <a:rPr lang="de-CH" baseline="0" dirty="0" smtClean="0"/>
+              <a:rPr lang="de-CH" baseline="0" dirty="0"/>
               <a:t> </a:t>
             </a:r>
             <a:r>
-              <a:rPr lang="de-CH" baseline="0" dirty="0" err="1" smtClean="0"/>
+              <a:rPr lang="de-CH" baseline="0" dirty="0" err="1"/>
               <a:t>is</a:t>
             </a:r>
             <a:r>
-              <a:rPr lang="de-CH" baseline="0" dirty="0" smtClean="0"/>
+              <a:rPr lang="de-CH" baseline="0" dirty="0"/>
               <a:t> </a:t>
             </a:r>
             <a:r>
-              <a:rPr lang="de-CH" baseline="0" dirty="0" err="1" smtClean="0"/>
+              <a:rPr lang="de-CH" baseline="0" dirty="0" err="1"/>
               <a:t>the</a:t>
             </a:r>
             <a:r>
-              <a:rPr lang="de-CH" baseline="0" dirty="0" smtClean="0"/>
+              <a:rPr lang="de-CH" baseline="0" dirty="0"/>
               <a:t> </a:t>
             </a:r>
             <a:r>
-              <a:rPr lang="de-CH" baseline="0" dirty="0" err="1" smtClean="0"/>
+              <a:rPr lang="de-CH" baseline="0" dirty="0" err="1"/>
               <a:t>most</a:t>
             </a:r>
             <a:r>
-              <a:rPr lang="de-CH" baseline="0" dirty="0" smtClean="0"/>
+              <a:rPr lang="de-CH" baseline="0" dirty="0"/>
               <a:t> </a:t>
             </a:r>
             <a:r>
-              <a:rPr lang="de-CH" baseline="0" dirty="0" err="1" smtClean="0"/>
+              <a:rPr lang="de-CH" baseline="0" dirty="0" err="1"/>
               <a:t>influential</a:t>
             </a:r>
             <a:r>
-              <a:rPr lang="de-CH" baseline="0" dirty="0" smtClean="0"/>
+              <a:rPr lang="de-CH" baseline="0" dirty="0"/>
               <a:t> in </a:t>
             </a:r>
             <a:r>
-              <a:rPr lang="de-CH" baseline="0" dirty="0" err="1" smtClean="0"/>
+              <a:rPr lang="de-CH" baseline="0" dirty="0" err="1"/>
               <a:t>determining</a:t>
             </a:r>
             <a:r>
-              <a:rPr lang="de-CH" baseline="0" dirty="0" smtClean="0"/>
+              <a:rPr lang="de-CH" baseline="0" dirty="0"/>
               <a:t> </a:t>
             </a:r>
             <a:r>
-              <a:rPr lang="de-CH" baseline="0" dirty="0" err="1" smtClean="0"/>
+              <a:rPr lang="de-CH" baseline="0" dirty="0" err="1"/>
               <a:t>the</a:t>
             </a:r>
             <a:r>
-              <a:rPr lang="de-CH" baseline="0" dirty="0" smtClean="0"/>
+              <a:rPr lang="de-CH" baseline="0" dirty="0"/>
               <a:t> </a:t>
             </a:r>
             <a:r>
-              <a:rPr lang="de-CH" baseline="0" dirty="0" err="1" smtClean="0"/>
+              <a:rPr lang="de-CH" baseline="0" dirty="0" err="1"/>
               <a:t>output</a:t>
             </a:r>
             <a:r>
-              <a:rPr lang="de-CH" baseline="0" dirty="0" smtClean="0"/>
+              <a:rPr lang="de-CH" baseline="0" dirty="0"/>
               <a:t> </a:t>
             </a:r>
             <a:r>
-              <a:rPr lang="de-CH" baseline="0" dirty="0" err="1" smtClean="0"/>
+              <a:rPr lang="de-CH" baseline="0" dirty="0" err="1"/>
               <a:t>variance</a:t>
             </a:r>
             <a:endParaRPr dirty="0"/>
@@ -14882,71 +14732,71 @@
               <a:buChar char="•"/>
             </a:pPr>
             <a:r>
-              <a:rPr lang="de-CH" dirty="0" smtClean="0"/>
+              <a:rPr lang="de-CH" dirty="0"/>
               <a:t>LLINs</a:t>
             </a:r>
             <a:r>
-              <a:rPr lang="de-CH" baseline="0" dirty="0" smtClean="0"/>
+              <a:rPr lang="de-CH" baseline="0" dirty="0"/>
               <a:t> </a:t>
             </a:r>
             <a:r>
-              <a:rPr lang="de-CH" baseline="0" dirty="0" err="1" smtClean="0"/>
+              <a:rPr lang="de-CH" baseline="0" dirty="0" err="1"/>
               <a:t>is</a:t>
             </a:r>
             <a:r>
-              <a:rPr lang="de-CH" baseline="0" dirty="0" smtClean="0"/>
+              <a:rPr lang="de-CH" baseline="0" dirty="0"/>
               <a:t> </a:t>
             </a:r>
             <a:r>
-              <a:rPr lang="de-CH" baseline="0" dirty="0" err="1" smtClean="0"/>
+              <a:rPr lang="de-CH" baseline="0" dirty="0" err="1"/>
               <a:t>the</a:t>
             </a:r>
             <a:r>
-              <a:rPr lang="de-CH" baseline="0" dirty="0" smtClean="0"/>
+              <a:rPr lang="de-CH" baseline="0" dirty="0"/>
               <a:t> </a:t>
             </a:r>
             <a:r>
-              <a:rPr lang="de-CH" baseline="0" dirty="0" err="1" smtClean="0"/>
+              <a:rPr lang="de-CH" baseline="0" dirty="0" err="1"/>
               <a:t>most</a:t>
             </a:r>
             <a:r>
-              <a:rPr lang="de-CH" baseline="0" dirty="0" smtClean="0"/>
+              <a:rPr lang="de-CH" baseline="0" dirty="0"/>
               <a:t> </a:t>
             </a:r>
             <a:r>
-              <a:rPr lang="de-CH" baseline="0" dirty="0" err="1" smtClean="0"/>
+              <a:rPr lang="de-CH" baseline="0" dirty="0" err="1"/>
               <a:t>influential</a:t>
             </a:r>
             <a:r>
-              <a:rPr lang="de-CH" baseline="0" dirty="0" smtClean="0"/>
+              <a:rPr lang="de-CH" baseline="0" dirty="0"/>
               <a:t> in </a:t>
             </a:r>
             <a:r>
-              <a:rPr lang="de-CH" baseline="0" dirty="0" err="1" smtClean="0"/>
+              <a:rPr lang="de-CH" baseline="0" dirty="0" err="1"/>
               <a:t>determining</a:t>
             </a:r>
             <a:r>
-              <a:rPr lang="de-CH" baseline="0" dirty="0" smtClean="0"/>
+              <a:rPr lang="de-CH" baseline="0" dirty="0"/>
               <a:t> </a:t>
             </a:r>
             <a:r>
-              <a:rPr lang="de-CH" baseline="0" dirty="0" err="1" smtClean="0"/>
+              <a:rPr lang="de-CH" baseline="0" dirty="0" err="1"/>
               <a:t>the</a:t>
             </a:r>
             <a:r>
-              <a:rPr lang="de-CH" baseline="0" dirty="0" smtClean="0"/>
+              <a:rPr lang="de-CH" baseline="0" dirty="0"/>
               <a:t> </a:t>
             </a:r>
             <a:r>
-              <a:rPr lang="de-CH" baseline="0" dirty="0" err="1" smtClean="0"/>
+              <a:rPr lang="de-CH" baseline="0" dirty="0" err="1"/>
               <a:t>output</a:t>
             </a:r>
             <a:r>
-              <a:rPr lang="de-CH" baseline="0" dirty="0" smtClean="0"/>
+              <a:rPr lang="de-CH" baseline="0" dirty="0"/>
               <a:t> </a:t>
             </a:r>
             <a:r>
-              <a:rPr lang="de-CH" baseline="0" dirty="0" err="1" smtClean="0"/>
+              <a:rPr lang="de-CH" baseline="0" dirty="0" err="1"/>
               <a:t>variance</a:t>
             </a:r>
             <a:endParaRPr dirty="0"/>
@@ -15072,71 +14922,71 @@
               <a:buChar char="•"/>
             </a:pPr>
             <a:r>
-              <a:rPr lang="de-CH" dirty="0" smtClean="0"/>
+              <a:rPr lang="de-CH" dirty="0"/>
               <a:t>LLINs</a:t>
             </a:r>
             <a:r>
-              <a:rPr lang="de-CH" baseline="0" dirty="0" smtClean="0"/>
+              <a:rPr lang="de-CH" baseline="0" dirty="0"/>
               <a:t> </a:t>
             </a:r>
             <a:r>
-              <a:rPr lang="de-CH" baseline="0" dirty="0" err="1" smtClean="0"/>
+              <a:rPr lang="de-CH" baseline="0" dirty="0" err="1"/>
               <a:t>is</a:t>
             </a:r>
             <a:r>
-              <a:rPr lang="de-CH" baseline="0" dirty="0" smtClean="0"/>
+              <a:rPr lang="de-CH" baseline="0" dirty="0"/>
               <a:t> </a:t>
             </a:r>
             <a:r>
-              <a:rPr lang="de-CH" baseline="0" dirty="0" err="1" smtClean="0"/>
+              <a:rPr lang="de-CH" baseline="0" dirty="0" err="1"/>
               <a:t>the</a:t>
             </a:r>
             <a:r>
-              <a:rPr lang="de-CH" baseline="0" dirty="0" smtClean="0"/>
+              <a:rPr lang="de-CH" baseline="0" dirty="0"/>
               <a:t> </a:t>
             </a:r>
             <a:r>
-              <a:rPr lang="de-CH" baseline="0" dirty="0" err="1" smtClean="0"/>
+              <a:rPr lang="de-CH" baseline="0" dirty="0" err="1"/>
               <a:t>most</a:t>
             </a:r>
             <a:r>
-              <a:rPr lang="de-CH" baseline="0" dirty="0" smtClean="0"/>
+              <a:rPr lang="de-CH" baseline="0" dirty="0"/>
               <a:t> </a:t>
             </a:r>
             <a:r>
-              <a:rPr lang="de-CH" baseline="0" dirty="0" err="1" smtClean="0"/>
+              <a:rPr lang="de-CH" baseline="0" dirty="0" err="1"/>
               <a:t>influential</a:t>
             </a:r>
             <a:r>
-              <a:rPr lang="de-CH" baseline="0" dirty="0" smtClean="0"/>
+              <a:rPr lang="de-CH" baseline="0" dirty="0"/>
               <a:t> in </a:t>
             </a:r>
             <a:r>
-              <a:rPr lang="de-CH" baseline="0" dirty="0" err="1" smtClean="0"/>
+              <a:rPr lang="de-CH" baseline="0" dirty="0" err="1"/>
               <a:t>determining</a:t>
             </a:r>
             <a:r>
-              <a:rPr lang="de-CH" baseline="0" dirty="0" smtClean="0"/>
+              <a:rPr lang="de-CH" baseline="0" dirty="0"/>
               <a:t> </a:t>
             </a:r>
             <a:r>
-              <a:rPr lang="de-CH" baseline="0" dirty="0" err="1" smtClean="0"/>
+              <a:rPr lang="de-CH" baseline="0" dirty="0" err="1"/>
               <a:t>the</a:t>
             </a:r>
             <a:r>
-              <a:rPr lang="de-CH" baseline="0" dirty="0" smtClean="0"/>
+              <a:rPr lang="de-CH" baseline="0" dirty="0"/>
               <a:t> </a:t>
             </a:r>
             <a:r>
-              <a:rPr lang="de-CH" baseline="0" dirty="0" err="1" smtClean="0"/>
+              <a:rPr lang="de-CH" baseline="0" dirty="0" err="1"/>
               <a:t>output</a:t>
             </a:r>
             <a:r>
-              <a:rPr lang="de-CH" baseline="0" dirty="0" smtClean="0"/>
+              <a:rPr lang="de-CH" baseline="0" dirty="0"/>
               <a:t> </a:t>
             </a:r>
             <a:r>
-              <a:rPr lang="de-CH" baseline="0" dirty="0" err="1" smtClean="0"/>
+              <a:rPr lang="de-CH" baseline="0" dirty="0" err="1"/>
               <a:t>variance</a:t>
             </a:r>
             <a:endParaRPr dirty="0"/>
@@ -15262,71 +15112,71 @@
               <a:buChar char="•"/>
             </a:pPr>
             <a:r>
-              <a:rPr lang="de-CH" dirty="0" smtClean="0"/>
+              <a:rPr lang="de-CH" dirty="0"/>
               <a:t>LLINs</a:t>
             </a:r>
             <a:r>
-              <a:rPr lang="de-CH" baseline="0" dirty="0" smtClean="0"/>
+              <a:rPr lang="de-CH" baseline="0" dirty="0"/>
               <a:t> </a:t>
             </a:r>
             <a:r>
-              <a:rPr lang="de-CH" baseline="0" dirty="0" err="1" smtClean="0"/>
+              <a:rPr lang="de-CH" baseline="0" dirty="0" err="1"/>
               <a:t>is</a:t>
             </a:r>
             <a:r>
-              <a:rPr lang="de-CH" baseline="0" dirty="0" smtClean="0"/>
+              <a:rPr lang="de-CH" baseline="0" dirty="0"/>
               <a:t> </a:t>
             </a:r>
             <a:r>
-              <a:rPr lang="de-CH" baseline="0" dirty="0" err="1" smtClean="0"/>
+              <a:rPr lang="de-CH" baseline="0" dirty="0" err="1"/>
               <a:t>the</a:t>
             </a:r>
             <a:r>
-              <a:rPr lang="de-CH" baseline="0" dirty="0" smtClean="0"/>
+              <a:rPr lang="de-CH" baseline="0" dirty="0"/>
               <a:t> </a:t>
             </a:r>
             <a:r>
-              <a:rPr lang="de-CH" baseline="0" dirty="0" err="1" smtClean="0"/>
+              <a:rPr lang="de-CH" baseline="0" dirty="0" err="1"/>
               <a:t>most</a:t>
             </a:r>
             <a:r>
-              <a:rPr lang="de-CH" baseline="0" dirty="0" smtClean="0"/>
+              <a:rPr lang="de-CH" baseline="0" dirty="0"/>
               <a:t> </a:t>
             </a:r>
             <a:r>
-              <a:rPr lang="de-CH" baseline="0" dirty="0" err="1" smtClean="0"/>
+              <a:rPr lang="de-CH" baseline="0" dirty="0" err="1"/>
               <a:t>influential</a:t>
             </a:r>
             <a:r>
-              <a:rPr lang="de-CH" baseline="0" dirty="0" smtClean="0"/>
+              <a:rPr lang="de-CH" baseline="0" dirty="0"/>
               <a:t> in </a:t>
             </a:r>
             <a:r>
-              <a:rPr lang="de-CH" baseline="0" dirty="0" err="1" smtClean="0"/>
+              <a:rPr lang="de-CH" baseline="0" dirty="0" err="1"/>
               <a:t>determining</a:t>
             </a:r>
             <a:r>
-              <a:rPr lang="de-CH" baseline="0" dirty="0" smtClean="0"/>
+              <a:rPr lang="de-CH" baseline="0" dirty="0"/>
               <a:t> </a:t>
             </a:r>
             <a:r>
-              <a:rPr lang="de-CH" baseline="0" dirty="0" err="1" smtClean="0"/>
+              <a:rPr lang="de-CH" baseline="0" dirty="0" err="1"/>
               <a:t>the</a:t>
             </a:r>
             <a:r>
-              <a:rPr lang="de-CH" baseline="0" dirty="0" smtClean="0"/>
+              <a:rPr lang="de-CH" baseline="0" dirty="0"/>
               <a:t> </a:t>
             </a:r>
             <a:r>
-              <a:rPr lang="de-CH" baseline="0" dirty="0" err="1" smtClean="0"/>
+              <a:rPr lang="de-CH" baseline="0" dirty="0" err="1"/>
               <a:t>output</a:t>
             </a:r>
             <a:r>
-              <a:rPr lang="de-CH" baseline="0" dirty="0" smtClean="0"/>
+              <a:rPr lang="de-CH" baseline="0" dirty="0"/>
               <a:t> </a:t>
             </a:r>
             <a:r>
-              <a:rPr lang="de-CH" baseline="0" dirty="0" err="1" smtClean="0"/>
+              <a:rPr lang="de-CH" baseline="0" dirty="0" err="1"/>
               <a:t>variance</a:t>
             </a:r>
             <a:endParaRPr dirty="0"/>
@@ -15452,11 +15302,11 @@
               <a:buChar char="•"/>
             </a:pPr>
             <a:r>
-              <a:rPr lang="en-US" dirty="0" smtClean="0"/>
+              <a:rPr lang="en-US" dirty="0"/>
               <a:t>To address uncertainties, we identify and quantify the various sources of uncertainty</a:t>
             </a:r>
             <a:r>
-              <a:rPr lang="en-US" baseline="0" dirty="0" smtClean="0"/>
+              <a:rPr lang="en-US" baseline="0" dirty="0"/>
               <a:t> in intervention modeling</a:t>
             </a:r>
             <a:endParaRPr dirty="0"/>
@@ -15582,11 +15432,11 @@
               <a:buChar char="•"/>
             </a:pPr>
             <a:r>
-              <a:rPr lang="en-US" dirty="0" smtClean="0"/>
+              <a:rPr lang="en-US" dirty="0"/>
               <a:t>To address uncertainties, we identify and quantify the various sources of uncertainty</a:t>
             </a:r>
             <a:r>
-              <a:rPr lang="en-US" baseline="0" dirty="0" smtClean="0"/>
+              <a:rPr lang="en-US" baseline="0" dirty="0"/>
               <a:t> in intervention modeling</a:t>
             </a:r>
             <a:endParaRPr dirty="0"/>
@@ -15954,7 +15804,7 @@
               <a:buChar char="•"/>
             </a:pPr>
             <a:r>
-              <a:rPr lang="en-US" dirty="0" smtClean="0"/>
+              <a:rPr lang="en-US" dirty="0"/>
               <a:t>In the context of ABMs, there are several acknowledged sources from which uncertainty can originate and then propagate through the model.</a:t>
             </a:r>
           </a:p>
@@ -15974,15 +15824,15 @@
               <a:buChar char="•"/>
             </a:pPr>
             <a:r>
-              <a:rPr lang="en-US" dirty="0" smtClean="0"/>
+              <a:rPr lang="en-US" dirty="0"/>
               <a:t> there are </a:t>
             </a:r>
             <a:r>
-              <a:rPr lang="en-US" dirty="0" err="1" smtClean="0"/>
+              <a:rPr lang="en-US" dirty="0" err="1"/>
               <a:t>often</a:t>
             </a:r>
             <a:r>
-              <a:rPr lang="en-US" dirty="0" smtClean="0"/>
+              <a:rPr lang="en-US" dirty="0"/>
               <a:t> uncertainties in the real-world process that an ABM is designed to simulate. This can be because any observations taken are inaccurate or because the system is stochastic and, therefore, multiple observations lead to different results</a:t>
             </a:r>
             <a:endParaRPr dirty="0"/>
@@ -16695,7 +16545,7 @@
           </a:lstStyle>
           <a:p>
             <a:r>
-              <a:rPr lang="en-US" smtClean="0"/>
+              <a:rPr lang="en-US"/>
               <a:t>Click to edit Master title style</a:t>
             </a:r>
             <a:endParaRPr lang="de-CH"/>
@@ -16760,7 +16610,7 @@
           </a:lstStyle>
           <a:p>
             <a:r>
-              <a:rPr lang="en-US" smtClean="0"/>
+              <a:rPr lang="en-US"/>
               <a:t>Click to edit Master subtitle style</a:t>
             </a:r>
             <a:endParaRPr lang="de-CH"/>
@@ -16784,7 +16634,7 @@
           <a:p>
             <a:fld id="{6B28DE63-57E7-4993-9E07-8E358BA50017}" type="datetimeFigureOut">
               <a:rPr lang="de-CH" smtClean="0"/>
-              <a:t>06.05.2025</a:t>
+              <a:t>01.06.2026</a:t>
             </a:fld>
             <a:endParaRPr lang="de-CH"/>
           </a:p>
@@ -16878,7 +16728,7 @@
           <a:lstStyle/>
           <a:p>
             <a:r>
-              <a:rPr lang="en-US" smtClean="0"/>
+              <a:rPr lang="en-US"/>
               <a:t>Click to edit Master title style</a:t>
             </a:r>
             <a:endParaRPr lang="de-CH"/>
@@ -16902,35 +16752,35 @@
           <a:p>
             <a:pPr lvl="0"/>
             <a:r>
-              <a:rPr lang="en-US" smtClean="0"/>
+              <a:rPr lang="en-US"/>
               <a:t>Edit Master text styles</a:t>
             </a:r>
           </a:p>
           <a:p>
             <a:pPr lvl="1"/>
             <a:r>
-              <a:rPr lang="en-US" smtClean="0"/>
+              <a:rPr lang="en-US"/>
               <a:t>Second level</a:t>
             </a:r>
           </a:p>
           <a:p>
             <a:pPr lvl="2"/>
             <a:r>
-              <a:rPr lang="en-US" smtClean="0"/>
+              <a:rPr lang="en-US"/>
               <a:t>Third level</a:t>
             </a:r>
           </a:p>
           <a:p>
             <a:pPr lvl="3"/>
             <a:r>
-              <a:rPr lang="en-US" smtClean="0"/>
+              <a:rPr lang="en-US"/>
               <a:t>Fourth level</a:t>
             </a:r>
           </a:p>
           <a:p>
             <a:pPr lvl="4"/>
             <a:r>
-              <a:rPr lang="en-US" smtClean="0"/>
+              <a:rPr lang="en-US"/>
               <a:t>Fifth level</a:t>
             </a:r>
             <a:endParaRPr lang="de-CH"/>
@@ -16954,7 +16804,7 @@
           <a:p>
             <a:fld id="{6B28DE63-57E7-4993-9E07-8E358BA50017}" type="datetimeFigureOut">
               <a:rPr lang="de-CH" smtClean="0"/>
-              <a:t>06.05.2025</a:t>
+              <a:t>01.06.2026</a:t>
             </a:fld>
             <a:endParaRPr lang="de-CH"/>
           </a:p>
@@ -17053,7 +16903,7 @@
           <a:lstStyle/>
           <a:p>
             <a:r>
-              <a:rPr lang="en-US" smtClean="0"/>
+              <a:rPr lang="en-US"/>
               <a:t>Click to edit Master title style</a:t>
             </a:r>
             <a:endParaRPr lang="de-CH"/>
@@ -17082,35 +16932,35 @@
           <a:p>
             <a:pPr lvl="0"/>
             <a:r>
-              <a:rPr lang="en-US" smtClean="0"/>
+              <a:rPr lang="en-US"/>
               <a:t>Edit Master text styles</a:t>
             </a:r>
           </a:p>
           <a:p>
             <a:pPr lvl="1"/>
             <a:r>
-              <a:rPr lang="en-US" smtClean="0"/>
+              <a:rPr lang="en-US"/>
               <a:t>Second level</a:t>
             </a:r>
           </a:p>
           <a:p>
             <a:pPr lvl="2"/>
             <a:r>
-              <a:rPr lang="en-US" smtClean="0"/>
+              <a:rPr lang="en-US"/>
               <a:t>Third level</a:t>
             </a:r>
           </a:p>
           <a:p>
             <a:pPr lvl="3"/>
             <a:r>
-              <a:rPr lang="en-US" smtClean="0"/>
+              <a:rPr lang="en-US"/>
               <a:t>Fourth level</a:t>
             </a:r>
           </a:p>
           <a:p>
             <a:pPr lvl="4"/>
             <a:r>
-              <a:rPr lang="en-US" smtClean="0"/>
+              <a:rPr lang="en-US"/>
               <a:t>Fifth level</a:t>
             </a:r>
             <a:endParaRPr lang="de-CH"/>
@@ -17134,7 +16984,7 @@
           <a:p>
             <a:fld id="{6B28DE63-57E7-4993-9E07-8E358BA50017}" type="datetimeFigureOut">
               <a:rPr lang="de-CH" smtClean="0"/>
-              <a:t>06.05.2025</a:t>
+              <a:t>01.06.2026</a:t>
             </a:fld>
             <a:endParaRPr lang="de-CH"/>
           </a:p>
@@ -22110,7 +21960,7 @@
           <a:lstStyle/>
           <a:p>
             <a:r>
-              <a:rPr lang="en-US" smtClean="0"/>
+              <a:rPr lang="en-US"/>
               <a:t>Click to edit Master title style</a:t>
             </a:r>
             <a:endParaRPr lang="de-CH"/>
@@ -22134,35 +21984,35 @@
           <a:p>
             <a:pPr lvl="0"/>
             <a:r>
-              <a:rPr lang="en-US" smtClean="0"/>
+              <a:rPr lang="en-US"/>
               <a:t>Edit Master text styles</a:t>
             </a:r>
           </a:p>
           <a:p>
             <a:pPr lvl="1"/>
             <a:r>
-              <a:rPr lang="en-US" smtClean="0"/>
+              <a:rPr lang="en-US"/>
               <a:t>Second level</a:t>
             </a:r>
           </a:p>
           <a:p>
             <a:pPr lvl="2"/>
             <a:r>
-              <a:rPr lang="en-US" smtClean="0"/>
+              <a:rPr lang="en-US"/>
               <a:t>Third level</a:t>
             </a:r>
           </a:p>
           <a:p>
             <a:pPr lvl="3"/>
             <a:r>
-              <a:rPr lang="en-US" smtClean="0"/>
+              <a:rPr lang="en-US"/>
               <a:t>Fourth level</a:t>
             </a:r>
           </a:p>
           <a:p>
             <a:pPr lvl="4"/>
             <a:r>
-              <a:rPr lang="en-US" smtClean="0"/>
+              <a:rPr lang="en-US"/>
               <a:t>Fifth level</a:t>
             </a:r>
             <a:endParaRPr lang="de-CH"/>
@@ -22186,7 +22036,7 @@
           <a:p>
             <a:fld id="{6B28DE63-57E7-4993-9E07-8E358BA50017}" type="datetimeFigureOut">
               <a:rPr lang="de-CH" smtClean="0"/>
-              <a:t>06.05.2025</a:t>
+              <a:t>01.06.2026</a:t>
             </a:fld>
             <a:endParaRPr lang="de-CH"/>
           </a:p>
@@ -30682,7 +30532,7 @@
           </a:lstStyle>
           <a:p>
             <a:r>
-              <a:rPr lang="en-US" smtClean="0"/>
+              <a:rPr lang="en-US"/>
               <a:t>Click to edit Master title style</a:t>
             </a:r>
             <a:endParaRPr lang="de-CH"/>
@@ -30802,7 +30652,7 @@
           <a:p>
             <a:pPr lvl="0"/>
             <a:r>
-              <a:rPr lang="en-US" smtClean="0"/>
+              <a:rPr lang="en-US"/>
               <a:t>Edit Master text styles</a:t>
             </a:r>
           </a:p>
@@ -30825,7 +30675,7 @@
           <a:p>
             <a:fld id="{6B28DE63-57E7-4993-9E07-8E358BA50017}" type="datetimeFigureOut">
               <a:rPr lang="de-CH" smtClean="0"/>
-              <a:t>06.05.2025</a:t>
+              <a:t>01.06.2026</a:t>
             </a:fld>
             <a:endParaRPr lang="de-CH"/>
           </a:p>
@@ -43500,7 +43350,7 @@
           <a:lstStyle/>
           <a:p>
             <a:r>
-              <a:rPr lang="en-US" smtClean="0"/>
+              <a:rPr lang="en-US"/>
               <a:t>Click to edit Master title style</a:t>
             </a:r>
             <a:endParaRPr lang="de-CH"/>
@@ -43529,35 +43379,35 @@
           <a:p>
             <a:pPr lvl="0"/>
             <a:r>
-              <a:rPr lang="en-US" smtClean="0"/>
+              <a:rPr lang="en-US"/>
               <a:t>Edit Master text styles</a:t>
             </a:r>
           </a:p>
           <a:p>
             <a:pPr lvl="1"/>
             <a:r>
-              <a:rPr lang="en-US" smtClean="0"/>
+              <a:rPr lang="en-US"/>
               <a:t>Second level</a:t>
             </a:r>
           </a:p>
           <a:p>
             <a:pPr lvl="2"/>
             <a:r>
-              <a:rPr lang="en-US" smtClean="0"/>
+              <a:rPr lang="en-US"/>
               <a:t>Third level</a:t>
             </a:r>
           </a:p>
           <a:p>
             <a:pPr lvl="3"/>
             <a:r>
-              <a:rPr lang="en-US" smtClean="0"/>
+              <a:rPr lang="en-US"/>
               <a:t>Fourth level</a:t>
             </a:r>
           </a:p>
           <a:p>
             <a:pPr lvl="4"/>
             <a:r>
-              <a:rPr lang="en-US" smtClean="0"/>
+              <a:rPr lang="en-US"/>
               <a:t>Fifth level</a:t>
             </a:r>
             <a:endParaRPr lang="de-CH"/>
@@ -43586,35 +43436,35 @@
           <a:p>
             <a:pPr lvl="0"/>
             <a:r>
-              <a:rPr lang="en-US" smtClean="0"/>
+              <a:rPr lang="en-US"/>
               <a:t>Edit Master text styles</a:t>
             </a:r>
           </a:p>
           <a:p>
             <a:pPr lvl="1"/>
             <a:r>
-              <a:rPr lang="en-US" smtClean="0"/>
+              <a:rPr lang="en-US"/>
               <a:t>Second level</a:t>
             </a:r>
           </a:p>
           <a:p>
             <a:pPr lvl="2"/>
             <a:r>
-              <a:rPr lang="en-US" smtClean="0"/>
+              <a:rPr lang="en-US"/>
               <a:t>Third level</a:t>
             </a:r>
           </a:p>
           <a:p>
             <a:pPr lvl="3"/>
             <a:r>
-              <a:rPr lang="en-US" smtClean="0"/>
+              <a:rPr lang="en-US"/>
               <a:t>Fourth level</a:t>
             </a:r>
           </a:p>
           <a:p>
             <a:pPr lvl="4"/>
             <a:r>
-              <a:rPr lang="en-US" smtClean="0"/>
+              <a:rPr lang="en-US"/>
               <a:t>Fifth level</a:t>
             </a:r>
             <a:endParaRPr lang="de-CH"/>
@@ -43638,7 +43488,7 @@
           <a:p>
             <a:fld id="{6B28DE63-57E7-4993-9E07-8E358BA50017}" type="datetimeFigureOut">
               <a:rPr lang="de-CH" smtClean="0"/>
-              <a:t>06.05.2025</a:t>
+              <a:t>01.06.2026</a:t>
             </a:fld>
             <a:endParaRPr lang="de-CH"/>
           </a:p>
@@ -43737,7 +43587,7 @@
           <a:lstStyle/>
           <a:p>
             <a:r>
-              <a:rPr lang="en-US" smtClean="0"/>
+              <a:rPr lang="en-US"/>
               <a:t>Click to edit Master title style</a:t>
             </a:r>
             <a:endParaRPr lang="de-CH"/>
@@ -43803,7 +43653,7 @@
           <a:p>
             <a:pPr lvl="0"/>
             <a:r>
-              <a:rPr lang="en-US" smtClean="0"/>
+              <a:rPr lang="en-US"/>
               <a:t>Edit Master text styles</a:t>
             </a:r>
           </a:p>
@@ -43831,35 +43681,35 @@
           <a:p>
             <a:pPr lvl="0"/>
             <a:r>
-              <a:rPr lang="en-US" smtClean="0"/>
+              <a:rPr lang="en-US"/>
               <a:t>Edit Master text styles</a:t>
             </a:r>
           </a:p>
           <a:p>
             <a:pPr lvl="1"/>
             <a:r>
-              <a:rPr lang="en-US" smtClean="0"/>
+              <a:rPr lang="en-US"/>
               <a:t>Second level</a:t>
             </a:r>
           </a:p>
           <a:p>
             <a:pPr lvl="2"/>
             <a:r>
-              <a:rPr lang="en-US" smtClean="0"/>
+              <a:rPr lang="en-US"/>
               <a:t>Third level</a:t>
             </a:r>
           </a:p>
           <a:p>
             <a:pPr lvl="3"/>
             <a:r>
-              <a:rPr lang="en-US" smtClean="0"/>
+              <a:rPr lang="en-US"/>
               <a:t>Fourth level</a:t>
             </a:r>
           </a:p>
           <a:p>
             <a:pPr lvl="4"/>
             <a:r>
-              <a:rPr lang="en-US" smtClean="0"/>
+              <a:rPr lang="en-US"/>
               <a:t>Fifth level</a:t>
             </a:r>
             <a:endParaRPr lang="de-CH"/>
@@ -43925,7 +43775,7 @@
           <a:p>
             <a:pPr lvl="0"/>
             <a:r>
-              <a:rPr lang="en-US" smtClean="0"/>
+              <a:rPr lang="en-US"/>
               <a:t>Edit Master text styles</a:t>
             </a:r>
           </a:p>
@@ -43953,35 +43803,35 @@
           <a:p>
             <a:pPr lvl="0"/>
             <a:r>
-              <a:rPr lang="en-US" smtClean="0"/>
+              <a:rPr lang="en-US"/>
               <a:t>Edit Master text styles</a:t>
             </a:r>
           </a:p>
           <a:p>
             <a:pPr lvl="1"/>
             <a:r>
-              <a:rPr lang="en-US" smtClean="0"/>
+              <a:rPr lang="en-US"/>
               <a:t>Second level</a:t>
             </a:r>
           </a:p>
           <a:p>
             <a:pPr lvl="2"/>
             <a:r>
-              <a:rPr lang="en-US" smtClean="0"/>
+              <a:rPr lang="en-US"/>
               <a:t>Third level</a:t>
             </a:r>
           </a:p>
           <a:p>
             <a:pPr lvl="3"/>
             <a:r>
-              <a:rPr lang="en-US" smtClean="0"/>
+              <a:rPr lang="en-US"/>
               <a:t>Fourth level</a:t>
             </a:r>
           </a:p>
           <a:p>
             <a:pPr lvl="4"/>
             <a:r>
-              <a:rPr lang="en-US" smtClean="0"/>
+              <a:rPr lang="en-US"/>
               <a:t>Fifth level</a:t>
             </a:r>
             <a:endParaRPr lang="de-CH"/>
@@ -44005,7 +43855,7 @@
           <a:p>
             <a:fld id="{6B28DE63-57E7-4993-9E07-8E358BA50017}" type="datetimeFigureOut">
               <a:rPr lang="de-CH" smtClean="0"/>
-              <a:t>06.05.2025</a:t>
+              <a:t>01.06.2026</a:t>
             </a:fld>
             <a:endParaRPr lang="de-CH"/>
           </a:p>
@@ -44099,7 +43949,7 @@
           <a:lstStyle/>
           <a:p>
             <a:r>
-              <a:rPr lang="en-US" smtClean="0"/>
+              <a:rPr lang="en-US"/>
               <a:t>Click to edit Master title style</a:t>
             </a:r>
             <a:endParaRPr lang="de-CH"/>
@@ -44123,7 +43973,7 @@
           <a:p>
             <a:fld id="{6B28DE63-57E7-4993-9E07-8E358BA50017}" type="datetimeFigureOut">
               <a:rPr lang="de-CH" smtClean="0"/>
-              <a:t>06.05.2025</a:t>
+              <a:t>01.06.2026</a:t>
             </a:fld>
             <a:endParaRPr lang="de-CH"/>
           </a:p>
@@ -44218,7 +44068,7 @@
           <a:p>
             <a:fld id="{6B28DE63-57E7-4993-9E07-8E358BA50017}" type="datetimeFigureOut">
               <a:rPr lang="de-CH" smtClean="0"/>
-              <a:t>06.05.2025</a:t>
+              <a:t>01.06.2026</a:t>
             </a:fld>
             <a:endParaRPr lang="de-CH"/>
           </a:p>
@@ -44321,7 +44171,7 @@
           </a:lstStyle>
           <a:p>
             <a:r>
-              <a:rPr lang="en-US" smtClean="0"/>
+              <a:rPr lang="en-US"/>
               <a:t>Click to edit Master title style</a:t>
             </a:r>
             <a:endParaRPr lang="de-CH"/>
@@ -44378,35 +44228,35 @@
           <a:p>
             <a:pPr lvl="0"/>
             <a:r>
-              <a:rPr lang="en-US" smtClean="0"/>
+              <a:rPr lang="en-US"/>
               <a:t>Edit Master text styles</a:t>
             </a:r>
           </a:p>
           <a:p>
             <a:pPr lvl="1"/>
             <a:r>
-              <a:rPr lang="en-US" smtClean="0"/>
+              <a:rPr lang="en-US"/>
               <a:t>Second level</a:t>
             </a:r>
           </a:p>
           <a:p>
             <a:pPr lvl="2"/>
             <a:r>
-              <a:rPr lang="en-US" smtClean="0"/>
+              <a:rPr lang="en-US"/>
               <a:t>Third level</a:t>
             </a:r>
           </a:p>
           <a:p>
             <a:pPr lvl="3"/>
             <a:r>
-              <a:rPr lang="en-US" smtClean="0"/>
+              <a:rPr lang="en-US"/>
               <a:t>Fourth level</a:t>
             </a:r>
           </a:p>
           <a:p>
             <a:pPr lvl="4"/>
             <a:r>
-              <a:rPr lang="en-US" smtClean="0"/>
+              <a:rPr lang="en-US"/>
               <a:t>Fifth level</a:t>
             </a:r>
             <a:endParaRPr lang="de-CH"/>
@@ -44472,7 +44322,7 @@
           <a:p>
             <a:pPr lvl="0"/>
             <a:r>
-              <a:rPr lang="en-US" smtClean="0"/>
+              <a:rPr lang="en-US"/>
               <a:t>Edit Master text styles</a:t>
             </a:r>
           </a:p>
@@ -44495,7 +44345,7 @@
           <a:p>
             <a:fld id="{6B28DE63-57E7-4993-9E07-8E358BA50017}" type="datetimeFigureOut">
               <a:rPr lang="de-CH" smtClean="0"/>
-              <a:t>06.05.2025</a:t>
+              <a:t>01.06.2026</a:t>
             </a:fld>
             <a:endParaRPr lang="de-CH"/>
           </a:p>
@@ -44598,7 +44448,7 @@
           </a:lstStyle>
           <a:p>
             <a:r>
-              <a:rPr lang="en-US" smtClean="0"/>
+              <a:rPr lang="en-US"/>
               <a:t>Click to edit Master title style</a:t>
             </a:r>
             <a:endParaRPr lang="de-CH"/>
@@ -44725,7 +44575,7 @@
           <a:p>
             <a:pPr lvl="0"/>
             <a:r>
-              <a:rPr lang="en-US" smtClean="0"/>
+              <a:rPr lang="en-US"/>
               <a:t>Edit Master text styles</a:t>
             </a:r>
           </a:p>
@@ -44748,7 +44598,7 @@
           <a:p>
             <a:fld id="{6B28DE63-57E7-4993-9E07-8E358BA50017}" type="datetimeFigureOut">
               <a:rPr lang="de-CH" smtClean="0"/>
-              <a:t>06.05.2025</a:t>
+              <a:t>01.06.2026</a:t>
             </a:fld>
             <a:endParaRPr lang="de-CH"/>
           </a:p>
@@ -44857,7 +44707,7 @@
           <a:lstStyle/>
           <a:p>
             <a:r>
-              <a:rPr lang="en-US" smtClean="0"/>
+              <a:rPr lang="en-US"/>
               <a:t>Click to edit Master title style</a:t>
             </a:r>
             <a:endParaRPr lang="de-CH"/>
@@ -44891,35 +44741,35 @@
           <a:p>
             <a:pPr lvl="0"/>
             <a:r>
-              <a:rPr lang="en-US" smtClean="0"/>
+              <a:rPr lang="en-US"/>
               <a:t>Edit Master text styles</a:t>
             </a:r>
           </a:p>
           <a:p>
             <a:pPr lvl="1"/>
             <a:r>
-              <a:rPr lang="en-US" smtClean="0"/>
+              <a:rPr lang="en-US"/>
               <a:t>Second level</a:t>
             </a:r>
           </a:p>
           <a:p>
             <a:pPr lvl="2"/>
             <a:r>
-              <a:rPr lang="en-US" smtClean="0"/>
+              <a:rPr lang="en-US"/>
               <a:t>Third level</a:t>
             </a:r>
           </a:p>
           <a:p>
             <a:pPr lvl="3"/>
             <a:r>
-              <a:rPr lang="en-US" smtClean="0"/>
+              <a:rPr lang="en-US"/>
               <a:t>Fourth level</a:t>
             </a:r>
           </a:p>
           <a:p>
             <a:pPr lvl="4"/>
             <a:r>
-              <a:rPr lang="en-US" smtClean="0"/>
+              <a:rPr lang="en-US"/>
               <a:t>Fifth level</a:t>
             </a:r>
             <a:endParaRPr lang="de-CH"/>
@@ -44961,7 +44811,7 @@
           <a:p>
             <a:fld id="{6B28DE63-57E7-4993-9E07-8E358BA50017}" type="datetimeFigureOut">
               <a:rPr lang="de-CH" smtClean="0"/>
-              <a:t>06.05.2025</a:t>
+              <a:t>01.06.2026</a:t>
             </a:fld>
             <a:endParaRPr lang="de-CH"/>
           </a:p>
@@ -47358,7 +47208,7 @@
               </a:spcAft>
             </a:pPr>
             <a:r>
-              <a:rPr lang="en-US" sz="2800" b="1" dirty="0" smtClean="0">
+              <a:rPr lang="en-US" sz="2800" b="1" dirty="0">
                 <a:solidFill>
                   <a:schemeClr val="accent1"/>
                 </a:solidFill>
@@ -47367,13 +47217,6 @@
               </a:rPr>
               <a:t>UNCERTAINTY QUANTIFICATION OF AGENT-BASED MODELS WITH APPLICATION TO MALARIA INTERVENTION MODELING</a:t>
             </a:r>
-            <a:endParaRPr lang="en-US" sz="2800" b="1" dirty="0">
-              <a:solidFill>
-                <a:schemeClr val="accent1"/>
-              </a:solidFill>
-              <a:latin typeface="Arial" panose="020B0604020202020204" pitchFamily="34" charset="0"/>
-              <a:cs typeface="Arial" panose="020B0604020202020204" pitchFamily="34" charset="0"/>
-            </a:endParaRPr>
           </a:p>
         </p:txBody>
       </p:sp>
@@ -47408,7 +47251,7 @@
               <a:buSzPts val="1100"/>
             </a:pPr>
             <a:r>
-              <a:rPr lang="en-US" sz="2000" b="1" dirty="0" smtClean="0">
+              <a:rPr lang="en-US" sz="2000" b="1" dirty="0">
                 <a:solidFill>
                   <a:schemeClr val="dk1"/>
                 </a:solidFill>
@@ -47419,15 +47262,6 @@
               </a:rPr>
               <a:t>Annual Doctoral Committee Meeting 1</a:t>
             </a:r>
-            <a:endParaRPr lang="en-US" sz="2000" b="1" dirty="0" smtClean="0">
-              <a:solidFill>
-                <a:schemeClr val="dk1"/>
-              </a:solidFill>
-              <a:latin typeface="Arial"/>
-              <a:ea typeface="Arial"/>
-              <a:cs typeface="Arial"/>
-              <a:sym typeface="Arial"/>
-            </a:endParaRPr>
           </a:p>
           <a:p>
             <a:pPr lvl="0" algn="ctr">
@@ -47460,7 +47294,7 @@
               <a:buSzPts val="1100"/>
             </a:pPr>
             <a:r>
-              <a:rPr lang="en-US" dirty="0" smtClean="0">
+              <a:rPr lang="en-US" dirty="0">
                 <a:solidFill>
                   <a:schemeClr val="dk1"/>
                 </a:solidFill>
@@ -47472,7 +47306,7 @@
               <a:t>Zenabu Suboi, 26</a:t>
             </a:r>
             <a:r>
-              <a:rPr lang="en-US" baseline="30000" dirty="0" smtClean="0">
+              <a:rPr lang="en-US" baseline="30000" dirty="0">
                 <a:solidFill>
                   <a:schemeClr val="dk1"/>
                 </a:solidFill>
@@ -47484,7 +47318,7 @@
               <a:t>th</a:t>
             </a:r>
             <a:r>
-              <a:rPr lang="en-US" dirty="0" smtClean="0">
+              <a:rPr lang="en-US" dirty="0">
                 <a:solidFill>
                   <a:schemeClr val="dk1"/>
                 </a:solidFill>
@@ -47495,15 +47329,6 @@
               </a:rPr>
               <a:t> May 2025</a:t>
             </a:r>
-            <a:endParaRPr lang="en-US" dirty="0">
-              <a:solidFill>
-                <a:schemeClr val="dk1"/>
-              </a:solidFill>
-              <a:latin typeface="Arial"/>
-              <a:ea typeface="Arial"/>
-              <a:cs typeface="Arial"/>
-              <a:sym typeface="Arial"/>
-            </a:endParaRPr>
           </a:p>
         </p:txBody>
       </p:sp>
@@ -47517,13 +47342,6 @@
   <p:clrMapOvr>
     <a:masterClrMapping/>
   </p:clrMapOvr>
-  <p:timing>
-    <p:tnLst>
-      <p:par>
-        <p:cTn id="1" dur="indefinite" restart="never" nodeType="tmRoot"/>
-      </p:par>
-    </p:tnLst>
-  </p:timing>
 </p:sld>
 </file>
 
@@ -47565,20 +47383,11 @@
           <a:lstStyle/>
           <a:p>
             <a:r>
-              <a:rPr lang="en-US" sz="2800" b="1" dirty="0" smtClean="0">
+              <a:rPr lang="en-US" sz="2800" b="1" dirty="0">
                 <a:latin typeface="+mn-lt"/>
               </a:rPr>
-              <a:t>Progress Update – </a:t>
+              <a:t>Progress Update – ACHIEVEMENTS</a:t>
             </a:r>
-            <a:r>
-              <a:rPr lang="en-US" sz="2800" b="1" dirty="0" smtClean="0">
-                <a:latin typeface="+mn-lt"/>
-              </a:rPr>
-              <a:t>ACHIEVEMENTS</a:t>
-            </a:r>
-            <a:endParaRPr lang="en-US" sz="2800" b="1" dirty="0">
-              <a:latin typeface="+mn-lt"/>
-            </a:endParaRPr>
           </a:p>
         </p:txBody>
       </p:sp>
@@ -47630,7 +47439,7 @@
                     <a:p>
                       <a:pPr algn="ctr"/>
                       <a:r>
-                        <a:rPr lang="de-CH" dirty="0" smtClean="0"/>
+                        <a:rPr lang="de-CH" dirty="0"/>
                         <a:t>ACTIVITY</a:t>
                       </a:r>
                       <a:endParaRPr lang="de-CH" b="1" dirty="0"/>
@@ -47645,7 +47454,7 @@
                     <a:p>
                       <a:pPr algn="ctr"/>
                       <a:r>
-                        <a:rPr lang="de-CH" dirty="0" smtClean="0"/>
+                        <a:rPr lang="de-CH" dirty="0"/>
                         <a:t>DATE</a:t>
                       </a:r>
                       <a:endParaRPr lang="de-CH" b="1" dirty="0"/>
@@ -47667,18 +47476,13 @@
                     <a:p>
                       <a:pPr algn="ctr"/>
                       <a:r>
-                        <a:rPr lang="de-CH" b="1" dirty="0" smtClean="0">
+                        <a:rPr lang="de-CH" b="1" dirty="0">
                           <a:solidFill>
                             <a:srgbClr val="FF0000"/>
                           </a:solidFill>
                         </a:rPr>
                         <a:t>2024</a:t>
                       </a:r>
-                      <a:endParaRPr lang="de-CH" b="1" dirty="0">
-                        <a:solidFill>
-                          <a:srgbClr val="FF0000"/>
-                        </a:solidFill>
-                      </a:endParaRPr>
                     </a:p>
                   </a:txBody>
                   <a:tcPr/>
@@ -47708,10 +47512,9 @@
                     <a:p>
                       <a:pPr algn="ctr"/>
                       <a:r>
-                        <a:rPr lang="de-CH" dirty="0" smtClean="0"/>
+                        <a:rPr lang="de-CH" dirty="0"/>
                         <a:t>COURSES (10 ECTS)</a:t>
                       </a:r>
-                      <a:endParaRPr lang="de-CH" dirty="0"/>
                     </a:p>
                   </a:txBody>
                   <a:tcPr/>
@@ -47723,10 +47526,9 @@
                     <a:p>
                       <a:pPr algn="ctr"/>
                       <a:r>
-                        <a:rPr lang="de-CH" dirty="0" smtClean="0"/>
+                        <a:rPr lang="de-CH" dirty="0"/>
                         <a:t>FEBRUARY – JUNE </a:t>
                       </a:r>
-                      <a:endParaRPr lang="de-CH" dirty="0"/>
                     </a:p>
                   </a:txBody>
                   <a:tcPr/>
@@ -47745,10 +47547,9 @@
                     <a:p>
                       <a:pPr algn="ctr"/>
                       <a:r>
-                        <a:rPr lang="de-CH" dirty="0" smtClean="0"/>
+                        <a:rPr lang="de-CH" dirty="0"/>
                         <a:t>OPENMALARIA TRAINING</a:t>
                       </a:r>
-                      <a:endParaRPr lang="de-CH" dirty="0"/>
                     </a:p>
                   </a:txBody>
                   <a:tcPr/>
@@ -47760,10 +47561,9 @@
                     <a:p>
                       <a:pPr algn="ctr"/>
                       <a:r>
-                        <a:rPr lang="de-CH" dirty="0" smtClean="0"/>
+                        <a:rPr lang="de-CH" dirty="0"/>
                         <a:t>MAY – JULY </a:t>
                       </a:r>
-                      <a:endParaRPr lang="de-CH" dirty="0"/>
                     </a:p>
                   </a:txBody>
                   <a:tcPr/>
@@ -47782,10 +47582,9 @@
                     <a:p>
                       <a:pPr algn="ctr"/>
                       <a:r>
-                        <a:rPr lang="de-CH" dirty="0" smtClean="0"/>
+                        <a:rPr lang="de-CH" dirty="0"/>
                         <a:t>PROPOSAL WRITING, PRESENTATION AND SUBMISSION </a:t>
                       </a:r>
-                      <a:endParaRPr lang="de-CH" dirty="0"/>
                     </a:p>
                   </a:txBody>
                   <a:tcPr/>
@@ -47797,10 +47596,9 @@
                     <a:p>
                       <a:pPr algn="ctr"/>
                       <a:r>
-                        <a:rPr lang="de-CH" dirty="0" smtClean="0"/>
+                        <a:rPr lang="de-CH" dirty="0"/>
                         <a:t>FEBRUARY – AUGUST </a:t>
                       </a:r>
-                      <a:endParaRPr lang="de-CH" dirty="0"/>
                     </a:p>
                   </a:txBody>
                   <a:tcPr/>
@@ -47819,10 +47617,9 @@
                     <a:p>
                       <a:pPr algn="ctr"/>
                       <a:r>
-                        <a:rPr lang="de-CH" dirty="0" smtClean="0"/>
+                        <a:rPr lang="de-CH" dirty="0"/>
                         <a:t>MATHEMATICAL MODELING WORKSHOP (CAPE COAST, GHANA)</a:t>
                       </a:r>
-                      <a:endParaRPr lang="de-CH" dirty="0"/>
                     </a:p>
                   </a:txBody>
                   <a:tcPr/>
@@ -47834,10 +47631,9 @@
                     <a:p>
                       <a:pPr algn="ctr"/>
                       <a:r>
-                        <a:rPr lang="de-CH" dirty="0" smtClean="0"/>
+                        <a:rPr lang="de-CH" dirty="0"/>
                         <a:t>OCTOBER</a:t>
                       </a:r>
-                      <a:endParaRPr lang="de-CH" dirty="0"/>
                     </a:p>
                   </a:txBody>
                   <a:tcPr/>
@@ -47856,7 +47652,7 @@
                     <a:p>
                       <a:pPr algn="ctr"/>
                       <a:r>
-                        <a:rPr lang="de-CH" b="1" baseline="0" dirty="0" smtClean="0">
+                        <a:rPr lang="de-CH" b="1" baseline="0" dirty="0">
                           <a:solidFill>
                             <a:srgbClr val="FF0000"/>
                           </a:solidFill>
@@ -47873,7 +47669,7 @@
                     <a:lstStyle/>
                     <a:p>
                       <a:pPr algn="ctr"/>
-                      <a:endParaRPr lang="de-CH" baseline="0" dirty="0" smtClean="0"/>
+                      <a:endParaRPr lang="de-CH" baseline="0" dirty="0"/>
                     </a:p>
                   </a:txBody>
                   <a:tcPr/>
@@ -47892,18 +47688,9 @@
                     <a:p>
                       <a:pPr algn="ctr"/>
                       <a:r>
-                        <a:rPr lang="de-CH" dirty="0" smtClean="0"/>
-                        <a:t>COURSES </a:t>
+                        <a:rPr lang="de-CH" dirty="0"/>
+                        <a:t>COURSES (4 ECTS)</a:t>
                       </a:r>
-                      <a:r>
-                        <a:rPr lang="de-CH" dirty="0" smtClean="0"/>
-                        <a:t>(4 </a:t>
-                      </a:r>
-                      <a:r>
-                        <a:rPr lang="de-CH" dirty="0" smtClean="0"/>
-                        <a:t>ECTS)</a:t>
-                      </a:r>
-                      <a:endParaRPr lang="de-CH" dirty="0"/>
                     </a:p>
                   </a:txBody>
                   <a:tcPr/>
@@ -47915,10 +47702,9 @@
                     <a:p>
                       <a:pPr algn="ctr"/>
                       <a:r>
-                        <a:rPr lang="de-CH" dirty="0" smtClean="0"/>
+                        <a:rPr lang="de-CH" dirty="0"/>
                         <a:t>FEBRUARY – JUNE </a:t>
                       </a:r>
-                      <a:endParaRPr lang="de-CH" dirty="0"/>
                     </a:p>
                   </a:txBody>
                   <a:tcPr/>
@@ -47937,10 +47723,9 @@
                     <a:p>
                       <a:pPr algn="ctr"/>
                       <a:r>
-                        <a:rPr lang="de-CH" dirty="0" smtClean="0"/>
+                        <a:rPr lang="de-CH" dirty="0"/>
                         <a:t>ASTMH ABSTRACT SUBMISSION</a:t>
                       </a:r>
-                      <a:endParaRPr lang="de-CH" dirty="0"/>
                     </a:p>
                   </a:txBody>
                   <a:tcPr/>
@@ -47952,10 +47737,9 @@
                     <a:p>
                       <a:pPr algn="ctr"/>
                       <a:r>
-                        <a:rPr lang="de-CH" dirty="0" smtClean="0"/>
+                        <a:rPr lang="de-CH" dirty="0"/>
                         <a:t>APRIL</a:t>
                       </a:r>
-                      <a:endParaRPr lang="de-CH" dirty="0"/>
                     </a:p>
                   </a:txBody>
                   <a:tcPr/>
@@ -47974,10 +47758,9 @@
                     <a:p>
                       <a:pPr algn="ctr"/>
                       <a:r>
-                        <a:rPr lang="de-CH" dirty="0" smtClean="0"/>
+                        <a:rPr lang="de-CH" dirty="0"/>
                         <a:t>MANUSCRIPT</a:t>
                       </a:r>
-                      <a:endParaRPr lang="de-CH" dirty="0"/>
                     </a:p>
                   </a:txBody>
                   <a:tcPr/>
@@ -47989,7 +47772,7 @@
                     <a:p>
                       <a:pPr algn="ctr"/>
                       <a:r>
-                        <a:rPr lang="de-CH" baseline="0" dirty="0" smtClean="0"/>
+                        <a:rPr lang="de-CH" baseline="0" dirty="0"/>
                         <a:t>FEBRUARY – ONGOING  </a:t>
                       </a:r>
                     </a:p>
@@ -48010,10 +47793,9 @@
                     <a:p>
                       <a:pPr algn="ctr"/>
                       <a:r>
-                        <a:rPr lang="de-CH" dirty="0" smtClean="0"/>
+                        <a:rPr lang="de-CH" dirty="0"/>
                         <a:t>OBJECTIVE 1</a:t>
                       </a:r>
-                      <a:endParaRPr lang="de-CH" dirty="0"/>
                     </a:p>
                   </a:txBody>
                   <a:tcPr/>
@@ -48025,16 +47807,12 @@
                     <a:p>
                       <a:pPr algn="ctr"/>
                       <a:r>
-                        <a:rPr lang="de-CH" dirty="0" smtClean="0"/>
+                        <a:rPr lang="de-CH" dirty="0"/>
                         <a:t>SEPTEMBER (2024)</a:t>
                       </a:r>
                       <a:r>
-                        <a:rPr lang="de-CH" baseline="0" dirty="0" smtClean="0"/>
-                        <a:t> </a:t>
-                      </a:r>
-                      <a:r>
-                        <a:rPr lang="de-CH" baseline="0" dirty="0" smtClean="0"/>
-                        <a:t>– ONGOING </a:t>
+                        <a:rPr lang="de-CH" baseline="0" dirty="0"/>
+                        <a:t> – ONGOING </a:t>
                       </a:r>
                     </a:p>
                   </a:txBody>
@@ -48060,13 +47838,6 @@
   <p:clrMapOvr>
     <a:masterClrMapping/>
   </p:clrMapOvr>
-  <p:timing>
-    <p:tnLst>
-      <p:par>
-        <p:cTn id="1" dur="indefinite" restart="never" nodeType="tmRoot"/>
-      </p:par>
-    </p:tnLst>
-  </p:timing>
 </p:sld>
 </file>
 
@@ -48108,32 +47879,23 @@
           <a:lstStyle/>
           <a:p>
             <a:r>
-              <a:rPr lang="en-US" sz="2800" b="1" dirty="0" smtClean="0">
+              <a:rPr lang="en-US" sz="2800" b="1" dirty="0">
                 <a:latin typeface="+mn-lt"/>
               </a:rPr>
-              <a:t>Progress Update </a:t>
+              <a:t>Progress Update – </a:t>
             </a:r>
             <a:r>
-              <a:rPr lang="en-US" sz="2800" b="1" dirty="0" smtClean="0">
-                <a:latin typeface="+mn-lt"/>
-              </a:rPr>
-              <a:t>– </a:t>
-            </a:r>
-            <a:r>
-              <a:rPr lang="en-US" sz="2800" b="1" dirty="0" err="1" smtClean="0">
+              <a:rPr lang="en-US" sz="2800" b="1" dirty="0" err="1">
                 <a:latin typeface="+mn-lt"/>
               </a:rPr>
               <a:t>Timeplan</a:t>
             </a:r>
             <a:r>
-              <a:rPr lang="en-US" sz="2800" b="1" dirty="0" smtClean="0">
+              <a:rPr lang="en-US" sz="2800" b="1" dirty="0">
                 <a:latin typeface="+mn-lt"/>
               </a:rPr>
               <a:t> (May 2025)</a:t>
             </a:r>
-            <a:endParaRPr lang="en-US" sz="2800" b="1" dirty="0">
-              <a:latin typeface="+mn-lt"/>
-            </a:endParaRPr>
           </a:p>
         </p:txBody>
       </p:sp>
@@ -48217,13 +47979,6 @@
   <p:clrMapOvr>
     <a:masterClrMapping/>
   </p:clrMapOvr>
-  <p:timing>
-    <p:tnLst>
-      <p:par>
-        <p:cTn id="1" dur="indefinite" restart="never" nodeType="tmRoot"/>
-      </p:par>
-    </p:tnLst>
-  </p:timing>
 </p:sld>
 </file>
 
@@ -48265,25 +48020,25 @@
           <a:lstStyle/>
           <a:p>
             <a:r>
-              <a:rPr lang="de-CH" sz="2800" b="1" dirty="0" err="1" smtClean="0">
+              <a:rPr lang="de-CH" sz="2800" b="1" dirty="0" err="1">
                 <a:latin typeface="+mn-lt"/>
               </a:rPr>
               <a:t>Starting</a:t>
             </a:r>
             <a:r>
-              <a:rPr lang="de-CH" sz="2800" b="1" dirty="0" smtClean="0">
+              <a:rPr lang="de-CH" sz="2800" b="1" dirty="0">
                 <a:latin typeface="+mn-lt"/>
               </a:rPr>
               <a:t> </a:t>
             </a:r>
             <a:r>
-              <a:rPr lang="de-CH" sz="2800" b="1" dirty="0" err="1" smtClean="0">
+              <a:rPr lang="de-CH" sz="2800" b="1" dirty="0" err="1">
                 <a:latin typeface="+mn-lt"/>
               </a:rPr>
               <a:t>point</a:t>
             </a:r>
             <a:r>
-              <a:rPr lang="de-CH" sz="2800" b="1" dirty="0" smtClean="0">
+              <a:rPr lang="de-CH" sz="2800" b="1" dirty="0">
                 <a:latin typeface="+mn-lt"/>
               </a:rPr>
               <a:t> </a:t>
@@ -48317,35 +48072,35 @@
           <a:lstStyle/>
           <a:p>
             <a:r>
-              <a:rPr lang="de-CH" sz="2000" dirty="0" smtClean="0">
+              <a:rPr lang="de-CH" sz="2000" dirty="0">
                 <a:latin typeface="Arial" panose="020B0604020202020204" pitchFamily="34" charset="0"/>
                 <a:cs typeface="Arial" panose="020B0604020202020204" pitchFamily="34" charset="0"/>
               </a:rPr>
               <a:t>Intervention Impact Analysis </a:t>
             </a:r>
             <a:r>
-              <a:rPr lang="de-CH" sz="2000" dirty="0" err="1" smtClean="0">
+              <a:rPr lang="de-CH" sz="2000" dirty="0" err="1">
                 <a:latin typeface="Arial" panose="020B0604020202020204" pitchFamily="34" charset="0"/>
                 <a:cs typeface="Arial" panose="020B0604020202020204" pitchFamily="34" charset="0"/>
               </a:rPr>
               <a:t>for</a:t>
             </a:r>
             <a:r>
-              <a:rPr lang="de-CH" sz="2000" dirty="0" smtClean="0">
+              <a:rPr lang="de-CH" sz="2000" dirty="0">
                 <a:latin typeface="Arial" panose="020B0604020202020204" pitchFamily="34" charset="0"/>
                 <a:cs typeface="Arial" panose="020B0604020202020204" pitchFamily="34" charset="0"/>
               </a:rPr>
               <a:t> </a:t>
             </a:r>
             <a:r>
-              <a:rPr lang="de-CH" sz="2000" dirty="0" err="1" smtClean="0">
+              <a:rPr lang="de-CH" sz="2000" dirty="0" err="1">
                 <a:latin typeface="Arial" panose="020B0604020202020204" pitchFamily="34" charset="0"/>
                 <a:cs typeface="Arial" panose="020B0604020202020204" pitchFamily="34" charset="0"/>
               </a:rPr>
               <a:t>the</a:t>
             </a:r>
             <a:r>
-              <a:rPr lang="de-CH" sz="2000" dirty="0" smtClean="0">
+              <a:rPr lang="de-CH" sz="2000" dirty="0">
                 <a:latin typeface="Arial" panose="020B0604020202020204" pitchFamily="34" charset="0"/>
                 <a:cs typeface="Arial" panose="020B0604020202020204" pitchFamily="34" charset="0"/>
               </a:rPr>
@@ -48353,7 +48108,7 @@
             </a:r>
           </a:p>
           <a:p>
-            <a:endParaRPr lang="de-CH" sz="2000" dirty="0" smtClean="0">
+            <a:endParaRPr lang="de-CH" sz="2000" dirty="0">
               <a:latin typeface="Arial" panose="020B0604020202020204" pitchFamily="34" charset="0"/>
               <a:cs typeface="Arial" panose="020B0604020202020204" pitchFamily="34" charset="0"/>
             </a:endParaRPr>
@@ -48370,10 +48125,6 @@
               </a:rPr>
               <a:t>The updated NSP is comprised of a detailed county-level intervention stratification plan. </a:t>
             </a:r>
-            <a:endParaRPr lang="en-GB" sz="2000" dirty="0" smtClean="0">
-              <a:latin typeface="Arial" panose="020B0604020202020204" pitchFamily="34" charset="0"/>
-              <a:cs typeface="Arial" panose="020B0604020202020204" pitchFamily="34" charset="0"/>
-            </a:endParaRPr>
           </a:p>
           <a:p>
             <a:pPr marL="285750" indent="-285750">
@@ -48391,47 +48142,29 @@
               <a:buChar char="•"/>
             </a:pPr>
             <a:r>
-              <a:rPr lang="en-GB" sz="2000" dirty="0" smtClean="0">
+              <a:rPr lang="en-GB" sz="2000" dirty="0">
                 <a:latin typeface="Arial" panose="020B0604020202020204" pitchFamily="34" charset="0"/>
                 <a:cs typeface="Arial" panose="020B0604020202020204" pitchFamily="34" charset="0"/>
               </a:rPr>
-              <a:t>To </a:t>
+              <a:t>To evaluate the impact of each intervention, </a:t>
+            </a:r>
+            <a:r>
+              <a:rPr lang="en-GB" sz="2000" dirty="0" err="1">
+                <a:latin typeface="Arial" panose="020B0604020202020204" pitchFamily="34" charset="0"/>
+                <a:cs typeface="Arial" panose="020B0604020202020204" pitchFamily="34" charset="0"/>
+              </a:rPr>
+              <a:t>OpenMalaria</a:t>
             </a:r>
             <a:r>
               <a:rPr lang="en-GB" sz="2000" dirty="0">
                 <a:latin typeface="Arial" panose="020B0604020202020204" pitchFamily="34" charset="0"/>
                 <a:cs typeface="Arial" panose="020B0604020202020204" pitchFamily="34" charset="0"/>
               </a:rPr>
-              <a:t>evaluate the impact of each intervention, </a:t>
+              <a:t> was used to model a counterfactual case, where a particular intervention is removed and compared to the full NSP. </a:t>
             </a:r>
-            <a:r>
-              <a:rPr lang="en-GB" sz="2000" dirty="0" err="1" smtClean="0">
-                <a:latin typeface="Arial" panose="020B0604020202020204" pitchFamily="34" charset="0"/>
-                <a:cs typeface="Arial" panose="020B0604020202020204" pitchFamily="34" charset="0"/>
-              </a:rPr>
-              <a:t>OpenMalaria</a:t>
-            </a:r>
-            <a:r>
-              <a:rPr lang="en-GB" sz="2000" dirty="0" smtClean="0">
-                <a:latin typeface="Arial" panose="020B0604020202020204" pitchFamily="34" charset="0"/>
-                <a:cs typeface="Arial" panose="020B0604020202020204" pitchFamily="34" charset="0"/>
-              </a:rPr>
-              <a:t> was used </a:t>
-            </a:r>
-            <a:r>
-              <a:rPr lang="en-GB" sz="2000" dirty="0">
-                <a:latin typeface="Arial" panose="020B0604020202020204" pitchFamily="34" charset="0"/>
-                <a:cs typeface="Arial" panose="020B0604020202020204" pitchFamily="34" charset="0"/>
-              </a:rPr>
-              <a:t>to model a counterfactual case, where a particular intervention is removed and compared to the full NSP. </a:t>
-            </a:r>
-            <a:endParaRPr lang="en-GB" sz="2000" dirty="0" smtClean="0">
-              <a:latin typeface="Arial" panose="020B0604020202020204" pitchFamily="34" charset="0"/>
-              <a:cs typeface="Arial" panose="020B0604020202020204" pitchFamily="34" charset="0"/>
-            </a:endParaRPr>
           </a:p>
           <a:p>
-            <a:endParaRPr lang="en-GB" sz="2000" dirty="0" smtClean="0">
+            <a:endParaRPr lang="en-GB" sz="2000" dirty="0">
               <a:latin typeface="Arial" panose="020B0604020202020204" pitchFamily="34" charset="0"/>
               <a:cs typeface="Arial" panose="020B0604020202020204" pitchFamily="34" charset="0"/>
             </a:endParaRPr>
@@ -48442,20 +48175,12 @@
               <a:buChar char="•"/>
             </a:pPr>
             <a:r>
-              <a:rPr lang="en-GB" altLang="de-DE" sz="2000" dirty="0" smtClean="0">
-                <a:latin typeface="Arial" panose="020B0604020202020204" pitchFamily="34" charset="0"/>
-                <a:ea typeface="Times New Roman" panose="02020603050405020304" pitchFamily="18" charset="0"/>
-                <a:cs typeface="Arial" panose="020B0604020202020204" pitchFamily="34" charset="0"/>
-              </a:rPr>
-              <a:t>The analysis </a:t>
-            </a:r>
-            <a:r>
               <a:rPr lang="en-GB" altLang="de-DE" sz="2000" dirty="0">
                 <a:latin typeface="Arial" panose="020B0604020202020204" pitchFamily="34" charset="0"/>
                 <a:ea typeface="Times New Roman" panose="02020603050405020304" pitchFamily="18" charset="0"/>
                 <a:cs typeface="Arial" panose="020B0604020202020204" pitchFamily="34" charset="0"/>
               </a:rPr>
-              <a:t>suggested that </a:t>
+              <a:t>The analysis suggested that </a:t>
             </a:r>
             <a:r>
               <a:rPr lang="en-GB" altLang="de-DE" sz="2000" b="1" dirty="0">
@@ -48490,33 +48215,9 @@
                 <a:ea typeface="Times New Roman" panose="02020603050405020304" pitchFamily="18" charset="0"/>
                 <a:cs typeface="Arial" panose="020B0604020202020204" pitchFamily="34" charset="0"/>
               </a:rPr>
-              <a:t>especially from </a:t>
+              <a:t>especially from SMC and vaccine, but also from general vector control measure.</a:t>
             </a:r>
-            <a:r>
-              <a:rPr lang="en-GB" altLang="de-DE" sz="2000" dirty="0" smtClean="0">
-                <a:latin typeface="Arial" panose="020B0604020202020204" pitchFamily="34" charset="0"/>
-                <a:ea typeface="Times New Roman" panose="02020603050405020304" pitchFamily="18" charset="0"/>
-                <a:cs typeface="Arial" panose="020B0604020202020204" pitchFamily="34" charset="0"/>
-              </a:rPr>
-              <a:t>SMC and vaccine, </a:t>
-            </a:r>
-            <a:r>
-              <a:rPr lang="en-GB" altLang="de-DE" sz="2000" dirty="0">
-                <a:latin typeface="Arial" panose="020B0604020202020204" pitchFamily="34" charset="0"/>
-                <a:ea typeface="Times New Roman" panose="02020603050405020304" pitchFamily="18" charset="0"/>
-                <a:cs typeface="Arial" panose="020B0604020202020204" pitchFamily="34" charset="0"/>
-              </a:rPr>
-              <a:t>but also from general vector control </a:t>
-            </a:r>
-            <a:r>
-              <a:rPr lang="en-GB" altLang="de-DE" sz="2000" dirty="0" smtClean="0">
-                <a:latin typeface="Arial" panose="020B0604020202020204" pitchFamily="34" charset="0"/>
-                <a:ea typeface="Times New Roman" panose="02020603050405020304" pitchFamily="18" charset="0"/>
-                <a:cs typeface="Arial" panose="020B0604020202020204" pitchFamily="34" charset="0"/>
-              </a:rPr>
-              <a:t>measure.</a:t>
-            </a:r>
-            <a:endParaRPr lang="de-CH" sz="2000" dirty="0" smtClean="0">
+            <a:endParaRPr lang="de-CH" sz="2000" dirty="0">
               <a:latin typeface="Arial" panose="020B0604020202020204" pitchFamily="34" charset="0"/>
               <a:cs typeface="Arial" panose="020B0604020202020204" pitchFamily="34" charset="0"/>
             </a:endParaRPr>
@@ -48553,13 +48254,6 @@
   <p:clrMapOvr>
     <a:masterClrMapping/>
   </p:clrMapOvr>
-  <p:timing>
-    <p:tnLst>
-      <p:par>
-        <p:cTn id="1" dur="indefinite" restart="never" nodeType="tmRoot"/>
-      </p:par>
-    </p:tnLst>
-  </p:timing>
 </p:sld>
 </file>
 
@@ -48601,157 +48295,157 @@
           <a:lstStyle/>
           <a:p>
             <a:r>
-              <a:rPr lang="de-CH" sz="2800" dirty="0" smtClean="0">
+              <a:rPr lang="de-CH" sz="2800" dirty="0">
                 <a:latin typeface="+mn-lt"/>
               </a:rPr>
               <a:t>Global </a:t>
             </a:r>
             <a:r>
-              <a:rPr lang="de-CH" sz="2800" dirty="0" err="1" smtClean="0">
+              <a:rPr lang="de-CH" sz="2800" dirty="0" err="1">
                 <a:latin typeface="+mn-lt"/>
               </a:rPr>
               <a:t>Sensitivity</a:t>
             </a:r>
             <a:r>
-              <a:rPr lang="de-CH" sz="2800" dirty="0" smtClean="0">
+              <a:rPr lang="de-CH" sz="2800" dirty="0">
                 <a:latin typeface="+mn-lt"/>
               </a:rPr>
               <a:t> – </a:t>
             </a:r>
             <a:r>
-              <a:rPr lang="de-CH" sz="2800" dirty="0" err="1" smtClean="0">
+              <a:rPr lang="de-CH" sz="2800" dirty="0" err="1">
                 <a:latin typeface="+mn-lt"/>
               </a:rPr>
               <a:t>varied</a:t>
             </a:r>
             <a:r>
-              <a:rPr lang="de-CH" sz="2800" dirty="0" smtClean="0">
+              <a:rPr lang="de-CH" sz="2800" dirty="0">
                 <a:latin typeface="+mn-lt"/>
               </a:rPr>
               <a:t> intervention </a:t>
             </a:r>
             <a:r>
-              <a:rPr lang="de-CH" sz="2800" dirty="0" err="1" smtClean="0">
+              <a:rPr lang="de-CH" sz="2800" dirty="0" err="1">
                 <a:latin typeface="+mn-lt"/>
               </a:rPr>
               <a:t>coverage</a:t>
             </a:r>
             <a:r>
-              <a:rPr lang="de-CH" sz="2800" dirty="0" smtClean="0">
+              <a:rPr lang="de-CH" sz="2800" dirty="0">
                 <a:latin typeface="+mn-lt"/>
               </a:rPr>
               <a:t> </a:t>
             </a:r>
             <a:r>
-              <a:rPr lang="de-CH" sz="2800" dirty="0" err="1" smtClean="0">
+              <a:rPr lang="de-CH" sz="2800" dirty="0" err="1">
                 <a:latin typeface="+mn-lt"/>
               </a:rPr>
               <a:t>levels</a:t>
             </a:r>
             <a:r>
-              <a:rPr lang="de-CH" sz="2800" dirty="0" smtClean="0">
+              <a:rPr lang="de-CH" sz="2800" dirty="0">
                 <a:latin typeface="+mn-lt"/>
               </a:rPr>
               <a:t> </a:t>
             </a:r>
             <a:r>
-              <a:rPr lang="de-CH" sz="2800" dirty="0" err="1" smtClean="0">
+              <a:rPr lang="de-CH" sz="2800" dirty="0" err="1">
                 <a:latin typeface="+mn-lt"/>
               </a:rPr>
               <a:t>to</a:t>
             </a:r>
             <a:r>
-              <a:rPr lang="de-CH" sz="2800" dirty="0" smtClean="0">
+              <a:rPr lang="de-CH" sz="2800" dirty="0">
                 <a:latin typeface="+mn-lt"/>
               </a:rPr>
               <a:t> </a:t>
             </a:r>
             <a:r>
-              <a:rPr lang="de-CH" sz="2800" dirty="0" err="1" smtClean="0">
+              <a:rPr lang="de-CH" sz="2800" dirty="0" err="1">
                 <a:latin typeface="+mn-lt"/>
               </a:rPr>
               <a:t>identify</a:t>
             </a:r>
             <a:r>
-              <a:rPr lang="de-CH" sz="2800" dirty="0" smtClean="0">
+              <a:rPr lang="de-CH" sz="2800" dirty="0">
                 <a:latin typeface="+mn-lt"/>
               </a:rPr>
               <a:t> </a:t>
             </a:r>
             <a:r>
-              <a:rPr lang="de-CH" sz="2800" dirty="0" err="1" smtClean="0">
+              <a:rPr lang="de-CH" sz="2800" dirty="0" err="1">
                 <a:latin typeface="+mn-lt"/>
               </a:rPr>
               <a:t>drivers</a:t>
             </a:r>
             <a:r>
-              <a:rPr lang="de-CH" sz="2800" dirty="0" smtClean="0">
+              <a:rPr lang="de-CH" sz="2800" dirty="0">
                 <a:latin typeface="+mn-lt"/>
               </a:rPr>
               <a:t> </a:t>
             </a:r>
             <a:r>
-              <a:rPr lang="de-CH" sz="2800" dirty="0" err="1" smtClean="0">
+              <a:rPr lang="de-CH" sz="2800" dirty="0" err="1">
                 <a:latin typeface="+mn-lt"/>
               </a:rPr>
               <a:t>of</a:t>
             </a:r>
             <a:r>
-              <a:rPr lang="de-CH" sz="2800" dirty="0" smtClean="0">
+              <a:rPr lang="de-CH" sz="2800" dirty="0">
                 <a:latin typeface="+mn-lt"/>
               </a:rPr>
               <a:t> </a:t>
             </a:r>
             <a:r>
-              <a:rPr lang="de-CH" sz="2800" dirty="0" err="1" smtClean="0">
+              <a:rPr lang="de-CH" sz="2800" dirty="0" err="1">
                 <a:latin typeface="+mn-lt"/>
               </a:rPr>
               <a:t>impact</a:t>
             </a:r>
             <a:r>
-              <a:rPr lang="de-CH" sz="2800" dirty="0" smtClean="0">
+              <a:rPr lang="de-CH" sz="2800" dirty="0">
                 <a:latin typeface="+mn-lt"/>
               </a:rPr>
               <a:t> </a:t>
             </a:r>
             <a:r>
-              <a:rPr lang="de-CH" sz="2800" dirty="0" err="1" smtClean="0">
+              <a:rPr lang="de-CH" sz="2800" dirty="0" err="1">
                 <a:latin typeface="+mn-lt"/>
               </a:rPr>
               <a:t>within</a:t>
             </a:r>
             <a:r>
-              <a:rPr lang="de-CH" sz="2800" dirty="0" smtClean="0">
+              <a:rPr lang="de-CH" sz="2800" dirty="0">
                 <a:latin typeface="+mn-lt"/>
               </a:rPr>
               <a:t> </a:t>
             </a:r>
             <a:r>
-              <a:rPr lang="de-CH" sz="2800" dirty="0" err="1" smtClean="0">
+              <a:rPr lang="de-CH" sz="2800" dirty="0" err="1">
                 <a:latin typeface="+mn-lt"/>
               </a:rPr>
               <a:t>settings</a:t>
             </a:r>
             <a:r>
-              <a:rPr lang="de-CH" sz="2800" dirty="0" smtClean="0">
+              <a:rPr lang="de-CH" sz="2800" dirty="0">
                 <a:latin typeface="+mn-lt"/>
               </a:rPr>
               <a:t> </a:t>
             </a:r>
             <a:r>
-              <a:rPr lang="de-CH" sz="2800" dirty="0" err="1" smtClean="0">
+              <a:rPr lang="de-CH" sz="2800" dirty="0" err="1">
                 <a:latin typeface="+mn-lt"/>
               </a:rPr>
               <a:t>and</a:t>
             </a:r>
             <a:r>
-              <a:rPr lang="de-CH" sz="2800" dirty="0" smtClean="0">
+              <a:rPr lang="de-CH" sz="2800" dirty="0">
                 <a:latin typeface="+mn-lt"/>
               </a:rPr>
               <a:t> </a:t>
             </a:r>
             <a:r>
-              <a:rPr lang="de-CH" sz="2800" dirty="0" err="1" smtClean="0">
+              <a:rPr lang="de-CH" sz="2800" dirty="0" err="1">
                 <a:latin typeface="+mn-lt"/>
               </a:rPr>
               <a:t>districts</a:t>
@@ -48792,18 +48486,11 @@
               <a:buChar char="•"/>
             </a:pPr>
             <a:r>
-              <a:rPr lang="de-CH" sz="2400" dirty="0" smtClean="0">
-                <a:latin typeface="Arial" panose="020B0604020202020204" pitchFamily="34" charset="0"/>
-                <a:cs typeface="Arial" panose="020B0604020202020204" pitchFamily="34" charset="0"/>
-              </a:rPr>
-              <a:t>Focus </a:t>
-            </a:r>
-            <a:r>
               <a:rPr lang="de-CH" sz="2400" dirty="0">
                 <a:latin typeface="Arial" panose="020B0604020202020204" pitchFamily="34" charset="0"/>
                 <a:cs typeface="Arial" panose="020B0604020202020204" pitchFamily="34" charset="0"/>
               </a:rPr>
-              <a:t>was </a:t>
+              <a:t>Focus was </a:t>
             </a:r>
             <a:r>
               <a:rPr lang="de-CH" sz="2400" dirty="0" err="1">
@@ -48820,14 +48507,14 @@
               <a:t> on </a:t>
             </a:r>
             <a:r>
-              <a:rPr lang="de-CH" sz="2400" dirty="0" err="1" smtClean="0">
+              <a:rPr lang="de-CH" sz="2400" dirty="0" err="1">
                 <a:latin typeface="Arial" panose="020B0604020202020204" pitchFamily="34" charset="0"/>
                 <a:cs typeface="Arial" panose="020B0604020202020204" pitchFamily="34" charset="0"/>
               </a:rPr>
               <a:t>the</a:t>
             </a:r>
             <a:r>
-              <a:rPr lang="de-CH" sz="2400" dirty="0" smtClean="0">
+              <a:rPr lang="de-CH" sz="2400" dirty="0">
                 <a:latin typeface="Arial" panose="020B0604020202020204" pitchFamily="34" charset="0"/>
                 <a:cs typeface="Arial" panose="020B0604020202020204" pitchFamily="34" charset="0"/>
               </a:rPr>
@@ -48876,28 +48563,28 @@
               <a:t> </a:t>
             </a:r>
             <a:r>
-              <a:rPr lang="de-CH" sz="2400" dirty="0" err="1" smtClean="0">
+              <a:rPr lang="de-CH" sz="2400" dirty="0" err="1">
                 <a:latin typeface="Arial" panose="020B0604020202020204" pitchFamily="34" charset="0"/>
                 <a:cs typeface="Arial" panose="020B0604020202020204" pitchFamily="34" charset="0"/>
               </a:rPr>
               <a:t>interventions</a:t>
             </a:r>
             <a:r>
-              <a:rPr lang="de-CH" sz="2400" dirty="0" smtClean="0">
+              <a:rPr lang="de-CH" sz="2400" dirty="0">
                 <a:latin typeface="Arial" panose="020B0604020202020204" pitchFamily="34" charset="0"/>
                 <a:cs typeface="Arial" panose="020B0604020202020204" pitchFamily="34" charset="0"/>
               </a:rPr>
               <a:t> </a:t>
             </a:r>
             <a:r>
-              <a:rPr lang="de-CH" sz="2400" dirty="0" err="1" smtClean="0">
+              <a:rPr lang="de-CH" sz="2400" dirty="0" err="1">
                 <a:latin typeface="Arial" panose="020B0604020202020204" pitchFamily="34" charset="0"/>
                 <a:cs typeface="Arial" panose="020B0604020202020204" pitchFamily="34" charset="0"/>
               </a:rPr>
               <a:t>with</a:t>
             </a:r>
             <a:r>
-              <a:rPr lang="de-CH" sz="2400" dirty="0" smtClean="0">
+              <a:rPr lang="de-CH" sz="2400" dirty="0">
                 <a:latin typeface="Arial" panose="020B0604020202020204" pitchFamily="34" charset="0"/>
                 <a:cs typeface="Arial" panose="020B0604020202020204" pitchFamily="34" charset="0"/>
               </a:rPr>
@@ -48912,62 +48599,62 @@
               <a:t>under-5-year-olds</a:t>
             </a:r>
             <a:r>
-              <a:rPr lang="de-CH" sz="2400" dirty="0" smtClean="0">
+              <a:rPr lang="de-CH" sz="2400" dirty="0">
                 <a:latin typeface="Arial" panose="020B0604020202020204" pitchFamily="34" charset="0"/>
                 <a:cs typeface="Arial" panose="020B0604020202020204" pitchFamily="34" charset="0"/>
               </a:rPr>
               <a:t> </a:t>
             </a:r>
             <a:r>
-              <a:rPr lang="de-CH" sz="2400" dirty="0" err="1" smtClean="0">
+              <a:rPr lang="de-CH" sz="2400" dirty="0" err="1">
                 <a:latin typeface="Arial" panose="020B0604020202020204" pitchFamily="34" charset="0"/>
                 <a:cs typeface="Arial" panose="020B0604020202020204" pitchFamily="34" charset="0"/>
               </a:rPr>
               <a:t>for</a:t>
             </a:r>
             <a:r>
-              <a:rPr lang="de-CH" sz="2400" dirty="0" smtClean="0">
+              <a:rPr lang="de-CH" sz="2400" dirty="0">
                 <a:latin typeface="Arial" panose="020B0604020202020204" pitchFamily="34" charset="0"/>
                 <a:cs typeface="Arial" panose="020B0604020202020204" pitchFamily="34" charset="0"/>
               </a:rPr>
               <a:t> </a:t>
             </a:r>
             <a:r>
-              <a:rPr lang="de-CH" sz="2400" dirty="0" err="1" smtClean="0">
+              <a:rPr lang="de-CH" sz="2400" dirty="0" err="1">
                 <a:latin typeface="Arial" panose="020B0604020202020204" pitchFamily="34" charset="0"/>
                 <a:cs typeface="Arial" panose="020B0604020202020204" pitchFamily="34" charset="0"/>
               </a:rPr>
               <a:t>the</a:t>
             </a:r>
             <a:r>
-              <a:rPr lang="de-CH" sz="2400" dirty="0" smtClean="0">
+              <a:rPr lang="de-CH" sz="2400" dirty="0">
                 <a:latin typeface="Arial" panose="020B0604020202020204" pitchFamily="34" charset="0"/>
                 <a:cs typeface="Arial" panose="020B0604020202020204" pitchFamily="34" charset="0"/>
               </a:rPr>
               <a:t> </a:t>
             </a:r>
             <a:r>
-              <a:rPr lang="de-CH" sz="2400" dirty="0" err="1" smtClean="0">
+              <a:rPr lang="de-CH" sz="2400" dirty="0" err="1">
                 <a:latin typeface="Arial" panose="020B0604020202020204" pitchFamily="34" charset="0"/>
                 <a:cs typeface="Arial" panose="020B0604020202020204" pitchFamily="34" charset="0"/>
               </a:rPr>
               <a:t>sensitivity</a:t>
             </a:r>
             <a:r>
-              <a:rPr lang="de-CH" sz="2400" dirty="0" smtClean="0">
+              <a:rPr lang="de-CH" sz="2400" dirty="0">
                 <a:latin typeface="Arial" panose="020B0604020202020204" pitchFamily="34" charset="0"/>
                 <a:cs typeface="Arial" panose="020B0604020202020204" pitchFamily="34" charset="0"/>
               </a:rPr>
               <a:t> </a:t>
             </a:r>
             <a:r>
-              <a:rPr lang="de-CH" sz="2400" dirty="0" err="1" smtClean="0">
+              <a:rPr lang="de-CH" sz="2400" dirty="0" err="1">
                 <a:latin typeface="Arial" panose="020B0604020202020204" pitchFamily="34" charset="0"/>
                 <a:cs typeface="Arial" panose="020B0604020202020204" pitchFamily="34" charset="0"/>
               </a:rPr>
               <a:t>analysis</a:t>
             </a:r>
-            <a:endParaRPr lang="de-CH" sz="2400" dirty="0" smtClean="0">
+            <a:endParaRPr lang="de-CH" sz="2400" dirty="0">
               <a:latin typeface="Arial" panose="020B0604020202020204" pitchFamily="34" charset="0"/>
               <a:cs typeface="Arial" panose="020B0604020202020204" pitchFamily="34" charset="0"/>
             </a:endParaRPr>
@@ -48981,125 +48668,125 @@
               <a:buChar char="•"/>
             </a:pPr>
             <a:r>
-              <a:rPr lang="de-CH" sz="2400" dirty="0" err="1" smtClean="0">
+              <a:rPr lang="de-CH" sz="2400" dirty="0" err="1">
                 <a:latin typeface="Arial" panose="020B0604020202020204" pitchFamily="34" charset="0"/>
                 <a:cs typeface="Arial" panose="020B0604020202020204" pitchFamily="34" charset="0"/>
               </a:rPr>
               <a:t>Adapted</a:t>
             </a:r>
             <a:r>
-              <a:rPr lang="de-CH" sz="2400" dirty="0" smtClean="0">
+              <a:rPr lang="de-CH" sz="2400" dirty="0">
                 <a:latin typeface="Arial" panose="020B0604020202020204" pitchFamily="34" charset="0"/>
                 <a:cs typeface="Arial" panose="020B0604020202020204" pitchFamily="34" charset="0"/>
               </a:rPr>
               <a:t> </a:t>
             </a:r>
             <a:r>
-              <a:rPr lang="de-CH" sz="2400" dirty="0" err="1" smtClean="0">
+              <a:rPr lang="de-CH" sz="2400" dirty="0" err="1">
                 <a:latin typeface="Arial" panose="020B0604020202020204" pitchFamily="34" charset="0"/>
                 <a:cs typeface="Arial" panose="020B0604020202020204" pitchFamily="34" charset="0"/>
               </a:rPr>
               <a:t>the</a:t>
             </a:r>
             <a:r>
-              <a:rPr lang="de-CH" sz="2400" dirty="0" smtClean="0">
+              <a:rPr lang="de-CH" sz="2400" dirty="0">
                 <a:latin typeface="Arial" panose="020B0604020202020204" pitchFamily="34" charset="0"/>
                 <a:cs typeface="Arial" panose="020B0604020202020204" pitchFamily="34" charset="0"/>
               </a:rPr>
               <a:t> </a:t>
             </a:r>
             <a:r>
-              <a:rPr lang="de-CH" sz="2400" dirty="0" err="1" smtClean="0">
+              <a:rPr lang="de-CH" sz="2400" dirty="0" err="1">
                 <a:latin typeface="Arial" panose="020B0604020202020204" pitchFamily="34" charset="0"/>
                 <a:cs typeface="Arial" panose="020B0604020202020204" pitchFamily="34" charset="0"/>
               </a:rPr>
               <a:t>OpenMalaria</a:t>
             </a:r>
             <a:r>
-              <a:rPr lang="de-CH" sz="2400" dirty="0" smtClean="0">
+              <a:rPr lang="de-CH" sz="2400" dirty="0">
                 <a:latin typeface="Arial" panose="020B0604020202020204" pitchFamily="34" charset="0"/>
                 <a:cs typeface="Arial" panose="020B0604020202020204" pitchFamily="34" charset="0"/>
               </a:rPr>
               <a:t>  </a:t>
             </a:r>
             <a:r>
-              <a:rPr lang="de-CH" sz="2400" dirty="0" err="1" smtClean="0">
+              <a:rPr lang="de-CH" sz="2400" dirty="0" err="1">
                 <a:latin typeface="Arial" panose="020B0604020202020204" pitchFamily="34" charset="0"/>
                 <a:cs typeface="Arial" panose="020B0604020202020204" pitchFamily="34" charset="0"/>
               </a:rPr>
               <a:t>workflow</a:t>
             </a:r>
             <a:r>
-              <a:rPr lang="de-CH" sz="2400" dirty="0" smtClean="0">
+              <a:rPr lang="de-CH" sz="2400" dirty="0">
                 <a:latin typeface="Arial" panose="020B0604020202020204" pitchFamily="34" charset="0"/>
                 <a:cs typeface="Arial" panose="020B0604020202020204" pitchFamily="34" charset="0"/>
               </a:rPr>
               <a:t> </a:t>
             </a:r>
             <a:r>
-              <a:rPr lang="de-CH" sz="2400" dirty="0" err="1" smtClean="0">
+              <a:rPr lang="de-CH" sz="2400" dirty="0" err="1">
                 <a:latin typeface="Arial" panose="020B0604020202020204" pitchFamily="34" charset="0"/>
                 <a:cs typeface="Arial" panose="020B0604020202020204" pitchFamily="34" charset="0"/>
               </a:rPr>
               <a:t>to</a:t>
             </a:r>
             <a:r>
-              <a:rPr lang="de-CH" sz="2400" dirty="0" smtClean="0">
+              <a:rPr lang="de-CH" sz="2400" dirty="0">
                 <a:latin typeface="Arial" panose="020B0604020202020204" pitchFamily="34" charset="0"/>
                 <a:cs typeface="Arial" panose="020B0604020202020204" pitchFamily="34" charset="0"/>
               </a:rPr>
               <a:t> </a:t>
             </a:r>
             <a:r>
-              <a:rPr lang="de-CH" sz="2400" dirty="0" err="1" smtClean="0">
+              <a:rPr lang="de-CH" sz="2400" dirty="0" err="1">
                 <a:latin typeface="Arial" panose="020B0604020202020204" pitchFamily="34" charset="0"/>
                 <a:cs typeface="Arial" panose="020B0604020202020204" pitchFamily="34" charset="0"/>
               </a:rPr>
               <a:t>accommodate</a:t>
             </a:r>
             <a:r>
-              <a:rPr lang="de-CH" sz="2400" dirty="0" smtClean="0">
+              <a:rPr lang="de-CH" sz="2400" dirty="0">
                 <a:latin typeface="Arial" panose="020B0604020202020204" pitchFamily="34" charset="0"/>
                 <a:cs typeface="Arial" panose="020B0604020202020204" pitchFamily="34" charset="0"/>
               </a:rPr>
               <a:t> </a:t>
             </a:r>
             <a:r>
-              <a:rPr lang="de-CH" sz="2400" dirty="0" err="1" smtClean="0">
+              <a:rPr lang="de-CH" sz="2400" dirty="0" err="1">
                 <a:latin typeface="Arial" panose="020B0604020202020204" pitchFamily="34" charset="0"/>
                 <a:cs typeface="Arial" panose="020B0604020202020204" pitchFamily="34" charset="0"/>
               </a:rPr>
               <a:t>the</a:t>
             </a:r>
             <a:r>
-              <a:rPr lang="de-CH" sz="2400" dirty="0" smtClean="0">
+              <a:rPr lang="de-CH" sz="2400" dirty="0">
                 <a:latin typeface="Arial" panose="020B0604020202020204" pitchFamily="34" charset="0"/>
                 <a:cs typeface="Arial" panose="020B0604020202020204" pitchFamily="34" charset="0"/>
               </a:rPr>
               <a:t> </a:t>
             </a:r>
             <a:r>
-              <a:rPr lang="de-CH" sz="2400" dirty="0" err="1" smtClean="0">
+              <a:rPr lang="de-CH" sz="2400" dirty="0" err="1">
                 <a:latin typeface="Arial" panose="020B0604020202020204" pitchFamily="34" charset="0"/>
                 <a:cs typeface="Arial" panose="020B0604020202020204" pitchFamily="34" charset="0"/>
               </a:rPr>
               <a:t>varied</a:t>
             </a:r>
             <a:r>
-              <a:rPr lang="de-CH" sz="2400" dirty="0" smtClean="0">
+              <a:rPr lang="de-CH" sz="2400" dirty="0">
                 <a:latin typeface="Arial" panose="020B0604020202020204" pitchFamily="34" charset="0"/>
                 <a:cs typeface="Arial" panose="020B0604020202020204" pitchFamily="34" charset="0"/>
               </a:rPr>
               <a:t> intervention </a:t>
             </a:r>
             <a:r>
-              <a:rPr lang="de-CH" sz="2400" dirty="0" err="1" smtClean="0">
+              <a:rPr lang="de-CH" sz="2400" dirty="0" err="1">
                 <a:latin typeface="Arial" panose="020B0604020202020204" pitchFamily="34" charset="0"/>
                 <a:cs typeface="Arial" panose="020B0604020202020204" pitchFamily="34" charset="0"/>
               </a:rPr>
               <a:t>coverages</a:t>
             </a:r>
-            <a:endParaRPr lang="de-CH" sz="2400" dirty="0" smtClean="0">
+            <a:endParaRPr lang="de-CH" sz="2400" dirty="0">
               <a:latin typeface="Arial" panose="020B0604020202020204" pitchFamily="34" charset="0"/>
               <a:cs typeface="Arial" panose="020B0604020202020204" pitchFamily="34" charset="0"/>
             </a:endParaRPr>
@@ -49113,195 +48800,195 @@
               <a:buChar char="•"/>
             </a:pPr>
             <a:r>
-              <a:rPr lang="de-CH" sz="2400" dirty="0" err="1" smtClean="0">
+              <a:rPr lang="de-CH" sz="2400" dirty="0" err="1">
                 <a:latin typeface="Arial" panose="020B0604020202020204" pitchFamily="34" charset="0"/>
                 <a:cs typeface="Arial" panose="020B0604020202020204" pitchFamily="34" charset="0"/>
               </a:rPr>
               <a:t>Used</a:t>
             </a:r>
             <a:r>
-              <a:rPr lang="de-CH" sz="2400" dirty="0" smtClean="0">
+              <a:rPr lang="de-CH" sz="2400" dirty="0">
                 <a:latin typeface="Arial" panose="020B0604020202020204" pitchFamily="34" charset="0"/>
                 <a:cs typeface="Arial" panose="020B0604020202020204" pitchFamily="34" charset="0"/>
               </a:rPr>
               <a:t> Sobol’ </a:t>
             </a:r>
             <a:r>
-              <a:rPr lang="de-CH" sz="2400" dirty="0" err="1" smtClean="0">
+              <a:rPr lang="de-CH" sz="2400" dirty="0" err="1">
                 <a:latin typeface="Arial" panose="020B0604020202020204" pitchFamily="34" charset="0"/>
                 <a:cs typeface="Arial" panose="020B0604020202020204" pitchFamily="34" charset="0"/>
               </a:rPr>
               <a:t>sensitivity</a:t>
             </a:r>
             <a:r>
-              <a:rPr lang="de-CH" sz="2400" dirty="0" smtClean="0">
+              <a:rPr lang="de-CH" sz="2400" dirty="0">
                 <a:latin typeface="Arial" panose="020B0604020202020204" pitchFamily="34" charset="0"/>
                 <a:cs typeface="Arial" panose="020B0604020202020204" pitchFamily="34" charset="0"/>
               </a:rPr>
               <a:t> </a:t>
             </a:r>
             <a:r>
-              <a:rPr lang="de-CH" sz="2400" dirty="0" err="1" smtClean="0">
+              <a:rPr lang="de-CH" sz="2400" dirty="0" err="1">
                 <a:latin typeface="Arial" panose="020B0604020202020204" pitchFamily="34" charset="0"/>
                 <a:cs typeface="Arial" panose="020B0604020202020204" pitchFamily="34" charset="0"/>
               </a:rPr>
               <a:t>method</a:t>
             </a:r>
             <a:r>
-              <a:rPr lang="de-CH" sz="2400" dirty="0" smtClean="0">
+              <a:rPr lang="de-CH" sz="2400" dirty="0">
                 <a:latin typeface="Arial" panose="020B0604020202020204" pitchFamily="34" charset="0"/>
                 <a:cs typeface="Arial" panose="020B0604020202020204" pitchFamily="34" charset="0"/>
               </a:rPr>
               <a:t> </a:t>
             </a:r>
             <a:r>
-              <a:rPr lang="de-CH" sz="2400" dirty="0" err="1" smtClean="0">
+              <a:rPr lang="de-CH" sz="2400" dirty="0" err="1">
                 <a:latin typeface="Arial" panose="020B0604020202020204" pitchFamily="34" charset="0"/>
                 <a:cs typeface="Arial" panose="020B0604020202020204" pitchFamily="34" charset="0"/>
               </a:rPr>
               <a:t>to</a:t>
             </a:r>
             <a:r>
-              <a:rPr lang="de-CH" sz="2400" dirty="0" smtClean="0">
+              <a:rPr lang="de-CH" sz="2400" dirty="0">
                 <a:latin typeface="Arial" panose="020B0604020202020204" pitchFamily="34" charset="0"/>
                 <a:cs typeface="Arial" panose="020B0604020202020204" pitchFamily="34" charset="0"/>
               </a:rPr>
               <a:t> </a:t>
             </a:r>
             <a:r>
-              <a:rPr lang="de-CH" sz="2400" dirty="0" err="1" smtClean="0">
+              <a:rPr lang="de-CH" sz="2400" dirty="0" err="1">
                 <a:latin typeface="Arial" panose="020B0604020202020204" pitchFamily="34" charset="0"/>
                 <a:cs typeface="Arial" panose="020B0604020202020204" pitchFamily="34" charset="0"/>
               </a:rPr>
               <a:t>obtain</a:t>
             </a:r>
             <a:r>
-              <a:rPr lang="de-CH" sz="2400" dirty="0" smtClean="0">
+              <a:rPr lang="de-CH" sz="2400" dirty="0">
                 <a:latin typeface="Arial" panose="020B0604020202020204" pitchFamily="34" charset="0"/>
                 <a:cs typeface="Arial" panose="020B0604020202020204" pitchFamily="34" charset="0"/>
               </a:rPr>
               <a:t> </a:t>
             </a:r>
             <a:r>
-              <a:rPr lang="de-CH" sz="2400" dirty="0" err="1" smtClean="0">
+              <a:rPr lang="de-CH" sz="2400" dirty="0" err="1">
                 <a:latin typeface="Arial" panose="020B0604020202020204" pitchFamily="34" charset="0"/>
                 <a:cs typeface="Arial" panose="020B0604020202020204" pitchFamily="34" charset="0"/>
               </a:rPr>
               <a:t>first</a:t>
             </a:r>
             <a:r>
-              <a:rPr lang="de-CH" sz="2400" dirty="0" smtClean="0">
+              <a:rPr lang="de-CH" sz="2400" dirty="0">
                 <a:latin typeface="Arial" panose="020B0604020202020204" pitchFamily="34" charset="0"/>
                 <a:cs typeface="Arial" panose="020B0604020202020204" pitchFamily="34" charset="0"/>
               </a:rPr>
               <a:t> </a:t>
             </a:r>
             <a:r>
-              <a:rPr lang="de-CH" sz="2400" dirty="0" err="1" smtClean="0">
+              <a:rPr lang="de-CH" sz="2400" dirty="0" err="1">
                 <a:latin typeface="Arial" panose="020B0604020202020204" pitchFamily="34" charset="0"/>
                 <a:cs typeface="Arial" panose="020B0604020202020204" pitchFamily="34" charset="0"/>
               </a:rPr>
               <a:t>order</a:t>
             </a:r>
             <a:r>
-              <a:rPr lang="de-CH" sz="2400" dirty="0" smtClean="0">
+              <a:rPr lang="de-CH" sz="2400" dirty="0">
                 <a:latin typeface="Arial" panose="020B0604020202020204" pitchFamily="34" charset="0"/>
                 <a:cs typeface="Arial" panose="020B0604020202020204" pitchFamily="34" charset="0"/>
               </a:rPr>
               <a:t> </a:t>
             </a:r>
             <a:r>
-              <a:rPr lang="de-CH" sz="2400" dirty="0" err="1" smtClean="0">
+              <a:rPr lang="de-CH" sz="2400" dirty="0" err="1">
                 <a:latin typeface="Arial" panose="020B0604020202020204" pitchFamily="34" charset="0"/>
                 <a:cs typeface="Arial" panose="020B0604020202020204" pitchFamily="34" charset="0"/>
               </a:rPr>
               <a:t>indices</a:t>
             </a:r>
             <a:r>
-              <a:rPr lang="de-CH" sz="2400" dirty="0" smtClean="0">
+              <a:rPr lang="de-CH" sz="2400" dirty="0">
                 <a:latin typeface="Arial" panose="020B0604020202020204" pitchFamily="34" charset="0"/>
                 <a:cs typeface="Arial" panose="020B0604020202020204" pitchFamily="34" charset="0"/>
               </a:rPr>
               <a:t> </a:t>
             </a:r>
             <a:r>
-              <a:rPr lang="de-CH" sz="2400" dirty="0" err="1" smtClean="0">
+              <a:rPr lang="de-CH" sz="2400" dirty="0" err="1">
                 <a:latin typeface="Arial" panose="020B0604020202020204" pitchFamily="34" charset="0"/>
                 <a:cs typeface="Arial" panose="020B0604020202020204" pitchFamily="34" charset="0"/>
               </a:rPr>
               <a:t>as</a:t>
             </a:r>
             <a:r>
-              <a:rPr lang="de-CH" sz="2400" dirty="0" smtClean="0">
+              <a:rPr lang="de-CH" sz="2400" dirty="0">
                 <a:latin typeface="Arial" panose="020B0604020202020204" pitchFamily="34" charset="0"/>
                 <a:cs typeface="Arial" panose="020B0604020202020204" pitchFamily="34" charset="0"/>
               </a:rPr>
               <a:t> </a:t>
             </a:r>
             <a:r>
-              <a:rPr lang="de-CH" sz="2400" dirty="0" err="1" smtClean="0">
+              <a:rPr lang="de-CH" sz="2400" dirty="0" err="1">
                 <a:latin typeface="Arial" panose="020B0604020202020204" pitchFamily="34" charset="0"/>
                 <a:cs typeface="Arial" panose="020B0604020202020204" pitchFamily="34" charset="0"/>
               </a:rPr>
               <a:t>well</a:t>
             </a:r>
             <a:r>
-              <a:rPr lang="de-CH" sz="2400" dirty="0" smtClean="0">
+              <a:rPr lang="de-CH" sz="2400" dirty="0">
                 <a:latin typeface="Arial" panose="020B0604020202020204" pitchFamily="34" charset="0"/>
                 <a:cs typeface="Arial" panose="020B0604020202020204" pitchFamily="34" charset="0"/>
               </a:rPr>
               <a:t> </a:t>
             </a:r>
             <a:r>
-              <a:rPr lang="de-CH" sz="2400" dirty="0" err="1" smtClean="0">
+              <a:rPr lang="de-CH" sz="2400" dirty="0" err="1">
                 <a:latin typeface="Arial" panose="020B0604020202020204" pitchFamily="34" charset="0"/>
                 <a:cs typeface="Arial" panose="020B0604020202020204" pitchFamily="34" charset="0"/>
               </a:rPr>
               <a:t>as</a:t>
             </a:r>
             <a:r>
-              <a:rPr lang="de-CH" sz="2400" dirty="0" smtClean="0">
+              <a:rPr lang="de-CH" sz="2400" dirty="0">
                 <a:latin typeface="Arial" panose="020B0604020202020204" pitchFamily="34" charset="0"/>
                 <a:cs typeface="Arial" panose="020B0604020202020204" pitchFamily="34" charset="0"/>
               </a:rPr>
               <a:t> </a:t>
             </a:r>
             <a:r>
-              <a:rPr lang="de-CH" sz="2400" dirty="0" err="1" smtClean="0">
+              <a:rPr lang="de-CH" sz="2400" dirty="0" err="1">
                 <a:latin typeface="Arial" panose="020B0604020202020204" pitchFamily="34" charset="0"/>
                 <a:cs typeface="Arial" panose="020B0604020202020204" pitchFamily="34" charset="0"/>
               </a:rPr>
               <a:t>interactions</a:t>
             </a:r>
             <a:r>
-              <a:rPr lang="de-CH" sz="2400" dirty="0" smtClean="0">
+              <a:rPr lang="de-CH" sz="2400" dirty="0">
                 <a:latin typeface="Arial" panose="020B0604020202020204" pitchFamily="34" charset="0"/>
                 <a:cs typeface="Arial" panose="020B0604020202020204" pitchFamily="34" charset="0"/>
               </a:rPr>
               <a:t> </a:t>
             </a:r>
             <a:r>
-              <a:rPr lang="de-CH" sz="2400" dirty="0" err="1" smtClean="0">
+              <a:rPr lang="de-CH" sz="2400" dirty="0" err="1">
                 <a:latin typeface="Arial" panose="020B0604020202020204" pitchFamily="34" charset="0"/>
                 <a:cs typeface="Arial" panose="020B0604020202020204" pitchFamily="34" charset="0"/>
               </a:rPr>
               <a:t>between</a:t>
             </a:r>
             <a:r>
-              <a:rPr lang="de-CH" sz="2400" dirty="0" smtClean="0">
+              <a:rPr lang="de-CH" sz="2400" dirty="0">
                 <a:latin typeface="Arial" panose="020B0604020202020204" pitchFamily="34" charset="0"/>
                 <a:cs typeface="Arial" panose="020B0604020202020204" pitchFamily="34" charset="0"/>
               </a:rPr>
               <a:t> </a:t>
             </a:r>
             <a:r>
-              <a:rPr lang="de-CH" sz="2400" dirty="0" err="1" smtClean="0">
+              <a:rPr lang="de-CH" sz="2400" dirty="0" err="1">
                 <a:latin typeface="Arial" panose="020B0604020202020204" pitchFamily="34" charset="0"/>
                 <a:cs typeface="Arial" panose="020B0604020202020204" pitchFamily="34" charset="0"/>
               </a:rPr>
               <a:t>interventions</a:t>
             </a:r>
-            <a:endParaRPr lang="de-CH" sz="2400" dirty="0" smtClean="0">
+            <a:endParaRPr lang="de-CH" sz="2400" dirty="0">
               <a:latin typeface="Arial" panose="020B0604020202020204" pitchFamily="34" charset="0"/>
               <a:cs typeface="Arial" panose="020B0604020202020204" pitchFamily="34" charset="0"/>
             </a:endParaRPr>
@@ -49315,139 +49002,139 @@
               <a:buChar char="•"/>
             </a:pPr>
             <a:r>
-              <a:rPr lang="de-CH" sz="2400" dirty="0" err="1" smtClean="0">
+              <a:rPr lang="de-CH" sz="2400" dirty="0" err="1">
                 <a:latin typeface="Arial" panose="020B0604020202020204" pitchFamily="34" charset="0"/>
                 <a:cs typeface="Arial" panose="020B0604020202020204" pitchFamily="34" charset="0"/>
               </a:rPr>
               <a:t>Realistic</a:t>
             </a:r>
             <a:r>
-              <a:rPr lang="de-CH" sz="2400" dirty="0" smtClean="0">
+              <a:rPr lang="de-CH" sz="2400" dirty="0">
                 <a:latin typeface="Arial" panose="020B0604020202020204" pitchFamily="34" charset="0"/>
                 <a:cs typeface="Arial" panose="020B0604020202020204" pitchFamily="34" charset="0"/>
               </a:rPr>
               <a:t> </a:t>
             </a:r>
             <a:r>
-              <a:rPr lang="de-CH" sz="2400" dirty="0" err="1" smtClean="0">
+              <a:rPr lang="de-CH" sz="2400" dirty="0" err="1">
                 <a:latin typeface="Arial" panose="020B0604020202020204" pitchFamily="34" charset="0"/>
                 <a:cs typeface="Arial" panose="020B0604020202020204" pitchFamily="34" charset="0"/>
               </a:rPr>
               <a:t>coverage</a:t>
             </a:r>
             <a:r>
-              <a:rPr lang="de-CH" sz="2400" dirty="0" smtClean="0">
+              <a:rPr lang="de-CH" sz="2400" dirty="0">
                 <a:latin typeface="Arial" panose="020B0604020202020204" pitchFamily="34" charset="0"/>
                 <a:cs typeface="Arial" panose="020B0604020202020204" pitchFamily="34" charset="0"/>
               </a:rPr>
               <a:t> </a:t>
             </a:r>
             <a:r>
-              <a:rPr lang="de-CH" sz="2400" dirty="0" err="1" smtClean="0">
+              <a:rPr lang="de-CH" sz="2400" dirty="0" err="1">
                 <a:latin typeface="Arial" panose="020B0604020202020204" pitchFamily="34" charset="0"/>
                 <a:cs typeface="Arial" panose="020B0604020202020204" pitchFamily="34" charset="0"/>
               </a:rPr>
               <a:t>ranges</a:t>
             </a:r>
             <a:r>
-              <a:rPr lang="de-CH" sz="2400" dirty="0" smtClean="0">
+              <a:rPr lang="de-CH" sz="2400" dirty="0">
                 <a:latin typeface="Arial" panose="020B0604020202020204" pitchFamily="34" charset="0"/>
                 <a:cs typeface="Arial" panose="020B0604020202020204" pitchFamily="34" charset="0"/>
               </a:rPr>
               <a:t> </a:t>
             </a:r>
             <a:r>
-              <a:rPr lang="de-CH" sz="2400" dirty="0" err="1" smtClean="0">
+              <a:rPr lang="de-CH" sz="2400" dirty="0" err="1">
                 <a:latin typeface="Arial" panose="020B0604020202020204" pitchFamily="34" charset="0"/>
                 <a:cs typeface="Arial" panose="020B0604020202020204" pitchFamily="34" charset="0"/>
               </a:rPr>
               <a:t>were</a:t>
             </a:r>
             <a:r>
-              <a:rPr lang="de-CH" sz="2400" dirty="0" smtClean="0">
+              <a:rPr lang="de-CH" sz="2400" dirty="0">
                 <a:latin typeface="Arial" panose="020B0604020202020204" pitchFamily="34" charset="0"/>
                 <a:cs typeface="Arial" panose="020B0604020202020204" pitchFamily="34" charset="0"/>
               </a:rPr>
               <a:t> </a:t>
             </a:r>
             <a:r>
-              <a:rPr lang="de-CH" sz="2400" dirty="0" err="1" smtClean="0">
+              <a:rPr lang="de-CH" sz="2400" dirty="0" err="1">
                 <a:latin typeface="Arial" panose="020B0604020202020204" pitchFamily="34" charset="0"/>
                 <a:cs typeface="Arial" panose="020B0604020202020204" pitchFamily="34" charset="0"/>
               </a:rPr>
               <a:t>chosen</a:t>
             </a:r>
             <a:r>
-              <a:rPr lang="de-CH" sz="2400" dirty="0" smtClean="0">
+              <a:rPr lang="de-CH" sz="2400" dirty="0">
                 <a:latin typeface="Arial" panose="020B0604020202020204" pitchFamily="34" charset="0"/>
                 <a:cs typeface="Arial" panose="020B0604020202020204" pitchFamily="34" charset="0"/>
               </a:rPr>
               <a:t> </a:t>
             </a:r>
             <a:r>
-              <a:rPr lang="de-CH" sz="2400" dirty="0" err="1" smtClean="0">
+              <a:rPr lang="de-CH" sz="2400" dirty="0" err="1">
                 <a:latin typeface="Arial" panose="020B0604020202020204" pitchFamily="34" charset="0"/>
                 <a:cs typeface="Arial" panose="020B0604020202020204" pitchFamily="34" charset="0"/>
               </a:rPr>
               <a:t>around</a:t>
             </a:r>
             <a:r>
-              <a:rPr lang="de-CH" sz="2400" dirty="0" smtClean="0">
+              <a:rPr lang="de-CH" sz="2400" dirty="0">
                 <a:latin typeface="Arial" panose="020B0604020202020204" pitchFamily="34" charset="0"/>
                 <a:cs typeface="Arial" panose="020B0604020202020204" pitchFamily="34" charset="0"/>
               </a:rPr>
               <a:t> </a:t>
             </a:r>
             <a:r>
-              <a:rPr lang="de-CH" sz="2400" dirty="0" err="1" smtClean="0">
+              <a:rPr lang="de-CH" sz="2400" dirty="0" err="1">
                 <a:latin typeface="Arial" panose="020B0604020202020204" pitchFamily="34" charset="0"/>
                 <a:cs typeface="Arial" panose="020B0604020202020204" pitchFamily="34" charset="0"/>
               </a:rPr>
               <a:t>the</a:t>
             </a:r>
             <a:r>
-              <a:rPr lang="de-CH" sz="2400" dirty="0" smtClean="0">
+              <a:rPr lang="de-CH" sz="2400" dirty="0">
                 <a:latin typeface="Arial" panose="020B0604020202020204" pitchFamily="34" charset="0"/>
                 <a:cs typeface="Arial" panose="020B0604020202020204" pitchFamily="34" charset="0"/>
               </a:rPr>
               <a:t> </a:t>
             </a:r>
             <a:r>
-              <a:rPr lang="de-CH" sz="2400" dirty="0" err="1" smtClean="0">
+              <a:rPr lang="de-CH" sz="2400" dirty="0" err="1">
                 <a:latin typeface="Arial" panose="020B0604020202020204" pitchFamily="34" charset="0"/>
                 <a:cs typeface="Arial" panose="020B0604020202020204" pitchFamily="34" charset="0"/>
               </a:rPr>
               <a:t>actual</a:t>
             </a:r>
             <a:r>
-              <a:rPr lang="de-CH" sz="2400" dirty="0" smtClean="0">
+              <a:rPr lang="de-CH" sz="2400" dirty="0">
                 <a:latin typeface="Arial" panose="020B0604020202020204" pitchFamily="34" charset="0"/>
                 <a:cs typeface="Arial" panose="020B0604020202020204" pitchFamily="34" charset="0"/>
               </a:rPr>
               <a:t> </a:t>
             </a:r>
             <a:r>
-              <a:rPr lang="de-CH" sz="2400" dirty="0" err="1" smtClean="0">
+              <a:rPr lang="de-CH" sz="2400" dirty="0" err="1">
                 <a:latin typeface="Arial" panose="020B0604020202020204" pitchFamily="34" charset="0"/>
                 <a:cs typeface="Arial" panose="020B0604020202020204" pitchFamily="34" charset="0"/>
               </a:rPr>
               <a:t>coverage</a:t>
             </a:r>
             <a:r>
-              <a:rPr lang="de-CH" sz="2400" dirty="0" smtClean="0">
+              <a:rPr lang="de-CH" sz="2400" dirty="0">
                 <a:latin typeface="Arial" panose="020B0604020202020204" pitchFamily="34" charset="0"/>
                 <a:cs typeface="Arial" panose="020B0604020202020204" pitchFamily="34" charset="0"/>
               </a:rPr>
               <a:t> </a:t>
             </a:r>
             <a:r>
-              <a:rPr lang="de-CH" sz="2400" dirty="0" err="1" smtClean="0">
+              <a:rPr lang="de-CH" sz="2400" dirty="0" err="1">
                 <a:latin typeface="Arial" panose="020B0604020202020204" pitchFamily="34" charset="0"/>
                 <a:cs typeface="Arial" panose="020B0604020202020204" pitchFamily="34" charset="0"/>
               </a:rPr>
               <a:t>levels</a:t>
             </a:r>
-            <a:endParaRPr lang="de-CH" sz="2400" dirty="0" smtClean="0">
+            <a:endParaRPr lang="de-CH" sz="2400" dirty="0">
               <a:latin typeface="Arial" panose="020B0604020202020204" pitchFamily="34" charset="0"/>
               <a:cs typeface="Arial" panose="020B0604020202020204" pitchFamily="34" charset="0"/>
             </a:endParaRPr>
@@ -49470,7 +49157,7 @@
         </p:nvGraphicFramePr>
         <p:xfrm>
           <a:off x="3709526" y="5214022"/>
-          <a:ext cx="5511477" cy="1304544"/>
+          <a:ext cx="5511477" cy="1280859"/>
         </p:xfrm>
         <a:graphic>
           <a:graphicData uri="http://schemas.openxmlformats.org/drawingml/2006/table">
@@ -49514,7 +49201,7 @@
                         </a:tabLst>
                       </a:pPr>
                       <a:r>
-                        <a:rPr lang="de-CH" sz="2000" u="none" strike="noStrike" dirty="0" smtClean="0">
+                        <a:rPr lang="de-CH" sz="2000" u="none" strike="noStrike" dirty="0">
                           <a:effectLst/>
                           <a:latin typeface="Arial" panose="020B0604020202020204" pitchFamily="34" charset="0"/>
                           <a:cs typeface="Arial" panose="020B0604020202020204" pitchFamily="34" charset="0"/>
@@ -49522,7 +49209,7 @@
                         <a:t>LLIN </a:t>
                       </a:r>
                       <a:r>
-                        <a:rPr lang="de-CH" sz="2000" u="none" strike="noStrike" dirty="0" err="1" smtClean="0">
+                        <a:rPr lang="de-CH" sz="2000" u="none" strike="noStrike" dirty="0" err="1">
                           <a:effectLst/>
                           <a:latin typeface="Arial" panose="020B0604020202020204" pitchFamily="34" charset="0"/>
                           <a:cs typeface="Arial" panose="020B0604020202020204" pitchFamily="34" charset="0"/>
@@ -49530,7 +49217,7 @@
                         <a:t>coverage</a:t>
                       </a:r>
                       <a:r>
-                        <a:rPr lang="de-CH" sz="2000" u="none" strike="noStrike" dirty="0" smtClean="0">
+                        <a:rPr lang="de-CH" sz="2000" u="none" strike="noStrike" dirty="0">
                           <a:effectLst/>
                           <a:latin typeface="Arial" panose="020B0604020202020204" pitchFamily="34" charset="0"/>
                           <a:cs typeface="Arial" panose="020B0604020202020204" pitchFamily="34" charset="0"/>
@@ -49538,7 +49225,7 @@
                         <a:t> </a:t>
                       </a:r>
                       <a:r>
-                        <a:rPr lang="de-CH" sz="2000" u="none" strike="noStrike" dirty="0" err="1" smtClean="0">
+                        <a:rPr lang="de-CH" sz="2000" u="none" strike="noStrike" dirty="0" err="1">
                           <a:effectLst/>
                           <a:latin typeface="Arial" panose="020B0604020202020204" pitchFamily="34" charset="0"/>
                           <a:cs typeface="Arial" panose="020B0604020202020204" pitchFamily="34" charset="0"/>
@@ -49566,7 +49253,7 @@
                         </a:tabLst>
                       </a:pPr>
                       <a:r>
-                        <a:rPr lang="de-CH" sz="2000" u="none" strike="noStrike" dirty="0" smtClean="0">
+                        <a:rPr lang="de-CH" sz="2000" u="none" strike="noStrike" dirty="0">
                           <a:effectLst/>
                           <a:latin typeface="Arial" panose="020B0604020202020204" pitchFamily="34" charset="0"/>
                           <a:cs typeface="Arial" panose="020B0604020202020204" pitchFamily="34" charset="0"/>
@@ -49574,7 +49261,7 @@
                         <a:t>IRS </a:t>
                       </a:r>
                       <a:r>
-                        <a:rPr lang="de-CH" sz="2000" u="none" strike="noStrike" dirty="0" err="1" smtClean="0">
+                        <a:rPr lang="de-CH" sz="2000" u="none" strike="noStrike" dirty="0" err="1">
                           <a:effectLst/>
                           <a:latin typeface="Arial" panose="020B0604020202020204" pitchFamily="34" charset="0"/>
                           <a:cs typeface="Arial" panose="020B0604020202020204" pitchFamily="34" charset="0"/>
@@ -49582,7 +49269,7 @@
                         <a:t>coverage</a:t>
                       </a:r>
                       <a:r>
-                        <a:rPr lang="de-CH" sz="2000" u="none" strike="noStrike" dirty="0" smtClean="0">
+                        <a:rPr lang="de-CH" sz="2000" u="none" strike="noStrike" dirty="0">
                           <a:effectLst/>
                           <a:latin typeface="Arial" panose="020B0604020202020204" pitchFamily="34" charset="0"/>
                           <a:cs typeface="Arial" panose="020B0604020202020204" pitchFamily="34" charset="0"/>
@@ -49590,7 +49277,7 @@
                         <a:t> </a:t>
                       </a:r>
                       <a:r>
-                        <a:rPr lang="de-CH" sz="2000" u="none" strike="noStrike" dirty="0" err="1" smtClean="0">
+                        <a:rPr lang="de-CH" sz="2000" u="none" strike="noStrike" dirty="0" err="1">
                           <a:effectLst/>
                           <a:latin typeface="Arial" panose="020B0604020202020204" pitchFamily="34" charset="0"/>
                           <a:cs typeface="Arial" panose="020B0604020202020204" pitchFamily="34" charset="0"/>
@@ -49618,7 +49305,7 @@
                         </a:tabLst>
                       </a:pPr>
                       <a:r>
-                        <a:rPr lang="de-CH" sz="2000" u="none" strike="noStrike" dirty="0" smtClean="0">
+                        <a:rPr lang="de-CH" sz="2000" u="none" strike="noStrike" dirty="0">
                           <a:effectLst/>
                           <a:latin typeface="Arial" panose="020B0604020202020204" pitchFamily="34" charset="0"/>
                           <a:cs typeface="Arial" panose="020B0604020202020204" pitchFamily="34" charset="0"/>
@@ -49626,7 +49313,7 @@
                         <a:t>SMC </a:t>
                       </a:r>
                       <a:r>
-                        <a:rPr lang="de-CH" sz="2000" u="none" strike="noStrike" dirty="0" err="1" smtClean="0">
+                        <a:rPr lang="de-CH" sz="2000" u="none" strike="noStrike" dirty="0" err="1">
                           <a:effectLst/>
                           <a:latin typeface="Arial" panose="020B0604020202020204" pitchFamily="34" charset="0"/>
                           <a:cs typeface="Arial" panose="020B0604020202020204" pitchFamily="34" charset="0"/>
@@ -49634,7 +49321,7 @@
                         <a:t>coverage</a:t>
                       </a:r>
                       <a:r>
-                        <a:rPr lang="de-CH" sz="2000" u="none" strike="noStrike" dirty="0" smtClean="0">
+                        <a:rPr lang="de-CH" sz="2000" u="none" strike="noStrike" dirty="0">
                           <a:effectLst/>
                           <a:latin typeface="Arial" panose="020B0604020202020204" pitchFamily="34" charset="0"/>
                           <a:cs typeface="Arial" panose="020B0604020202020204" pitchFamily="34" charset="0"/>
@@ -49642,7 +49329,7 @@
                         <a:t> </a:t>
                       </a:r>
                       <a:r>
-                        <a:rPr lang="de-CH" sz="2000" u="none" strike="noStrike" dirty="0" err="1" smtClean="0">
+                        <a:rPr lang="de-CH" sz="2000" u="none" strike="noStrike" dirty="0" err="1">
                           <a:effectLst/>
                           <a:latin typeface="Arial" panose="020B0604020202020204" pitchFamily="34" charset="0"/>
                           <a:cs typeface="Arial" panose="020B0604020202020204" pitchFamily="34" charset="0"/>
@@ -49670,7 +49357,7 @@
                         </a:tabLst>
                       </a:pPr>
                       <a:r>
-                        <a:rPr lang="de-CH" sz="2000" u="none" strike="noStrike" dirty="0" err="1" smtClean="0">
+                        <a:rPr lang="de-CH" sz="2000" u="none" strike="noStrike" dirty="0" err="1">
                           <a:effectLst/>
                           <a:latin typeface="Arial" panose="020B0604020202020204" pitchFamily="34" charset="0"/>
                           <a:cs typeface="Arial" panose="020B0604020202020204" pitchFamily="34" charset="0"/>
@@ -49678,7 +49365,7 @@
                         <a:t>Vaccine</a:t>
                       </a:r>
                       <a:r>
-                        <a:rPr lang="de-CH" sz="2000" u="none" strike="noStrike" dirty="0" smtClean="0">
+                        <a:rPr lang="de-CH" sz="2000" u="none" strike="noStrike" dirty="0">
                           <a:effectLst/>
                           <a:latin typeface="Arial" panose="020B0604020202020204" pitchFamily="34" charset="0"/>
                           <a:cs typeface="Arial" panose="020B0604020202020204" pitchFamily="34" charset="0"/>
@@ -49686,7 +49373,7 @@
                         <a:t> </a:t>
                       </a:r>
                       <a:r>
-                        <a:rPr lang="de-CH" sz="2000" u="none" strike="noStrike" dirty="0" err="1" smtClean="0">
+                        <a:rPr lang="de-CH" sz="2000" u="none" strike="noStrike" dirty="0" err="1">
                           <a:effectLst/>
                           <a:latin typeface="Arial" panose="020B0604020202020204" pitchFamily="34" charset="0"/>
                           <a:cs typeface="Arial" panose="020B0604020202020204" pitchFamily="34" charset="0"/>
@@ -49694,7 +49381,7 @@
                         <a:t>coverage</a:t>
                       </a:r>
                       <a:r>
-                        <a:rPr lang="de-CH" sz="2000" u="none" strike="noStrike" dirty="0" smtClean="0">
+                        <a:rPr lang="de-CH" sz="2000" u="none" strike="noStrike" dirty="0">
                           <a:effectLst/>
                           <a:latin typeface="Arial" panose="020B0604020202020204" pitchFamily="34" charset="0"/>
                           <a:cs typeface="Arial" panose="020B0604020202020204" pitchFamily="34" charset="0"/>
@@ -49702,14 +49389,14 @@
                         <a:t> </a:t>
                       </a:r>
                       <a:r>
-                        <a:rPr lang="de-CH" sz="2000" u="none" strike="noStrike" dirty="0" err="1" smtClean="0">
+                        <a:rPr lang="de-CH" sz="2000" u="none" strike="noStrike" dirty="0" err="1">
                           <a:effectLst/>
                           <a:latin typeface="Arial" panose="020B0604020202020204" pitchFamily="34" charset="0"/>
                           <a:cs typeface="Arial" panose="020B0604020202020204" pitchFamily="34" charset="0"/>
                         </a:rPr>
                         <a:t>range</a:t>
                       </a:r>
-                      <a:endParaRPr lang="de-CH" sz="2000" u="none" strike="noStrike" dirty="0" smtClean="0">
+                      <a:endParaRPr lang="de-CH" sz="2000" u="none" strike="noStrike" dirty="0">
                         <a:effectLst/>
                         <a:latin typeface="Arial" panose="020B0604020202020204" pitchFamily="34" charset="0"/>
                         <a:cs typeface="Arial" panose="020B0604020202020204" pitchFamily="34" charset="0"/>
@@ -49850,13 +49537,6 @@
   <p:clrMapOvr>
     <a:masterClrMapping/>
   </p:clrMapOvr>
-  <p:timing>
-    <p:tnLst>
-      <p:par>
-        <p:cTn id="1" dur="indefinite" restart="never" nodeType="tmRoot"/>
-      </p:par>
-    </p:tnLst>
-  </p:timing>
 </p:sld>
 </file>
 
@@ -49898,61 +49578,61 @@
           <a:lstStyle/>
           <a:p>
             <a:r>
-              <a:rPr lang="de-CH" sz="2800" dirty="0" smtClean="0">
+              <a:rPr lang="de-CH" sz="2800" dirty="0">
                 <a:latin typeface="+mn-lt"/>
               </a:rPr>
               <a:t>Sobol </a:t>
             </a:r>
             <a:r>
-              <a:rPr lang="de-CH" sz="2800" dirty="0" err="1" smtClean="0">
+              <a:rPr lang="de-CH" sz="2800" dirty="0" err="1">
                 <a:latin typeface="+mn-lt"/>
               </a:rPr>
               <a:t>indices</a:t>
             </a:r>
             <a:r>
-              <a:rPr lang="de-CH" sz="2800" dirty="0" smtClean="0">
+              <a:rPr lang="de-CH" sz="2800" dirty="0">
                 <a:latin typeface="+mn-lt"/>
               </a:rPr>
               <a:t> </a:t>
             </a:r>
             <a:r>
-              <a:rPr lang="de-CH" sz="2800" dirty="0" err="1" smtClean="0">
+              <a:rPr lang="de-CH" sz="2800" dirty="0" err="1">
                 <a:latin typeface="+mn-lt"/>
               </a:rPr>
               <a:t>for</a:t>
             </a:r>
             <a:r>
-              <a:rPr lang="de-CH" sz="2800" dirty="0" smtClean="0">
+              <a:rPr lang="de-CH" sz="2800" dirty="0">
                 <a:latin typeface="+mn-lt"/>
               </a:rPr>
               <a:t> </a:t>
             </a:r>
             <a:r>
-              <a:rPr lang="de-CH" sz="2800" dirty="0" err="1" smtClean="0">
+              <a:rPr lang="de-CH" sz="2800" dirty="0" err="1">
                 <a:latin typeface="+mn-lt"/>
               </a:rPr>
               <a:t>some</a:t>
             </a:r>
             <a:r>
-              <a:rPr lang="de-CH" sz="2800" dirty="0" smtClean="0">
+              <a:rPr lang="de-CH" sz="2800" dirty="0">
                 <a:latin typeface="+mn-lt"/>
               </a:rPr>
               <a:t> </a:t>
             </a:r>
             <a:r>
-              <a:rPr lang="de-CH" sz="2800" dirty="0" err="1" smtClean="0">
+              <a:rPr lang="de-CH" sz="2800" dirty="0" err="1">
                 <a:latin typeface="+mn-lt"/>
               </a:rPr>
               <a:t>selected</a:t>
             </a:r>
             <a:r>
-              <a:rPr lang="de-CH" sz="2800" dirty="0" smtClean="0">
+              <a:rPr lang="de-CH" sz="2800" dirty="0">
                 <a:latin typeface="+mn-lt"/>
               </a:rPr>
               <a:t> </a:t>
             </a:r>
             <a:r>
-              <a:rPr lang="de-CH" sz="2800" dirty="0" err="1" smtClean="0">
+              <a:rPr lang="de-CH" sz="2800" dirty="0" err="1">
                 <a:latin typeface="+mn-lt"/>
               </a:rPr>
               <a:t>settings</a:t>
@@ -49997,13 +49677,6 @@
   <p:clrMapOvr>
     <a:masterClrMapping/>
   </p:clrMapOvr>
-  <p:timing>
-    <p:tnLst>
-      <p:par>
-        <p:cTn id="1" dur="indefinite" restart="never" nodeType="tmRoot"/>
-      </p:par>
-    </p:tnLst>
-  </p:timing>
 </p:sld>
 </file>
 
@@ -50045,73 +49718,73 @@
           <a:lstStyle/>
           <a:p>
             <a:r>
-              <a:rPr lang="de-CH" sz="2800" b="1" dirty="0" smtClean="0">
+              <a:rPr lang="de-CH" sz="2800" b="1" dirty="0">
                 <a:latin typeface="+mn-lt"/>
               </a:rPr>
               <a:t>Relative </a:t>
             </a:r>
             <a:r>
-              <a:rPr lang="de-CH" sz="2800" b="1" dirty="0" err="1" smtClean="0">
+              <a:rPr lang="de-CH" sz="2800" b="1" dirty="0" err="1">
                 <a:latin typeface="+mn-lt"/>
               </a:rPr>
               <a:t>cumulative</a:t>
             </a:r>
             <a:r>
-              <a:rPr lang="de-CH" sz="2800" b="1" dirty="0" smtClean="0">
+              <a:rPr lang="de-CH" sz="2800" b="1" dirty="0">
                 <a:latin typeface="+mn-lt"/>
               </a:rPr>
               <a:t> </a:t>
             </a:r>
             <a:r>
-              <a:rPr lang="de-CH" sz="2800" b="1" dirty="0" err="1" smtClean="0">
+              <a:rPr lang="de-CH" sz="2800" b="1" dirty="0" err="1">
                 <a:latin typeface="+mn-lt"/>
               </a:rPr>
               <a:t>cases</a:t>
             </a:r>
             <a:r>
-              <a:rPr lang="de-CH" sz="2800" b="1" dirty="0" smtClean="0">
+              <a:rPr lang="de-CH" sz="2800" b="1" dirty="0">
                 <a:latin typeface="+mn-lt"/>
               </a:rPr>
               <a:t> </a:t>
             </a:r>
             <a:r>
-              <a:rPr lang="de-CH" sz="2800" b="1" dirty="0" err="1" smtClean="0">
+              <a:rPr lang="de-CH" sz="2800" b="1" dirty="0" err="1">
                 <a:latin typeface="+mn-lt"/>
               </a:rPr>
               <a:t>averted</a:t>
             </a:r>
             <a:r>
-              <a:rPr lang="de-CH" sz="2800" b="1" dirty="0" smtClean="0">
+              <a:rPr lang="de-CH" sz="2800" b="1" dirty="0">
                 <a:latin typeface="+mn-lt"/>
               </a:rPr>
               <a:t> </a:t>
             </a:r>
             <a:r>
-              <a:rPr lang="de-CH" sz="2800" b="1" dirty="0" err="1" smtClean="0">
+              <a:rPr lang="de-CH" sz="2800" b="1" dirty="0" err="1">
                 <a:latin typeface="+mn-lt"/>
               </a:rPr>
               <a:t>vs</a:t>
             </a:r>
             <a:r>
-              <a:rPr lang="de-CH" sz="2800" b="1" dirty="0" smtClean="0">
+              <a:rPr lang="de-CH" sz="2800" b="1" dirty="0">
                 <a:latin typeface="+mn-lt"/>
               </a:rPr>
               <a:t> relative </a:t>
             </a:r>
             <a:r>
-              <a:rPr lang="de-CH" sz="2800" b="1" dirty="0" err="1" smtClean="0">
+              <a:rPr lang="de-CH" sz="2800" b="1" dirty="0" err="1">
                 <a:latin typeface="+mn-lt"/>
               </a:rPr>
               <a:t>importance</a:t>
             </a:r>
             <a:r>
-              <a:rPr lang="de-CH" sz="2800" b="1" dirty="0" smtClean="0">
+              <a:rPr lang="de-CH" sz="2800" b="1" dirty="0">
                 <a:latin typeface="+mn-lt"/>
               </a:rPr>
               <a:t> per </a:t>
             </a:r>
             <a:r>
-              <a:rPr lang="de-CH" sz="2800" b="1" dirty="0" err="1" smtClean="0">
+              <a:rPr lang="de-CH" sz="2800" b="1" dirty="0" err="1">
                 <a:latin typeface="+mn-lt"/>
               </a:rPr>
               <a:t>setting</a:t>
@@ -50156,13 +49829,6 @@
   <p:clrMapOvr>
     <a:masterClrMapping/>
   </p:clrMapOvr>
-  <p:timing>
-    <p:tnLst>
-      <p:par>
-        <p:cTn id="1" dur="indefinite" restart="never" nodeType="tmRoot"/>
-      </p:par>
-    </p:tnLst>
-  </p:timing>
 </p:sld>
 </file>
 
@@ -50204,14 +49870,11 @@
           <a:lstStyle/>
           <a:p>
             <a:r>
-              <a:rPr lang="en-US" sz="2800" b="1" dirty="0" smtClean="0">
+              <a:rPr lang="en-US" sz="2800" b="1" dirty="0">
                 <a:latin typeface="+mn-lt"/>
               </a:rPr>
               <a:t>Moving forward</a:t>
             </a:r>
-            <a:endParaRPr lang="en-US" sz="2800" b="1" dirty="0">
-              <a:latin typeface="+mn-lt"/>
-            </a:endParaRPr>
           </a:p>
         </p:txBody>
       </p:sp>
@@ -50263,7 +49926,7 @@
                     <a:p>
                       <a:pPr algn="ctr"/>
                       <a:r>
-                        <a:rPr lang="de-CH" dirty="0" smtClean="0"/>
+                        <a:rPr lang="de-CH" dirty="0"/>
                         <a:t>ACTIVITY</a:t>
                       </a:r>
                       <a:endParaRPr lang="de-CH" b="1" dirty="0"/>
@@ -50278,7 +49941,7 @@
                     <a:p>
                       <a:pPr algn="ctr"/>
                       <a:r>
-                        <a:rPr lang="de-CH" dirty="0" smtClean="0"/>
+                        <a:rPr lang="de-CH" dirty="0"/>
                         <a:t>DATE</a:t>
                       </a:r>
                       <a:endParaRPr lang="de-CH" b="1" dirty="0"/>
@@ -50300,7 +49963,7 @@
                     <a:p>
                       <a:pPr algn="ctr"/>
                       <a:r>
-                        <a:rPr lang="de-CH" b="1" baseline="0" dirty="0" smtClean="0">
+                        <a:rPr lang="de-CH" b="1" baseline="0" dirty="0">
                           <a:solidFill>
                             <a:srgbClr val="FF0000"/>
                           </a:solidFill>
@@ -50317,7 +49980,7 @@
                     <a:lstStyle/>
                     <a:p>
                       <a:pPr algn="ctr"/>
-                      <a:endParaRPr lang="de-CH" baseline="0" dirty="0" smtClean="0"/>
+                      <a:endParaRPr lang="de-CH" baseline="0" dirty="0"/>
                     </a:p>
                   </a:txBody>
                   <a:tcPr/>
@@ -50336,7 +49999,7 @@
                     <a:p>
                       <a:pPr algn="ctr"/>
                       <a:r>
-                        <a:rPr lang="de-CH" sz="1800" dirty="0" smtClean="0"/>
+                        <a:rPr lang="de-CH" sz="1800" dirty="0"/>
                         <a:t>MATHEMATICAL MODELING WITH AI COURSE / POSTER PRESENTATION</a:t>
                       </a:r>
                       <a:endParaRPr lang="de-CH" dirty="0"/>
@@ -50351,10 +50014,9 @@
                     <a:p>
                       <a:pPr algn="ctr"/>
                       <a:r>
-                        <a:rPr lang="de-CH" dirty="0" smtClean="0"/>
+                        <a:rPr lang="de-CH" dirty="0"/>
                         <a:t>JUNE </a:t>
                       </a:r>
-                      <a:endParaRPr lang="de-CH" dirty="0"/>
                     </a:p>
                   </a:txBody>
                   <a:tcPr/>
@@ -50373,7 +50035,7 @@
                     <a:p>
                       <a:pPr algn="ctr"/>
                       <a:r>
-                        <a:rPr lang="de-CH" sz="1800" dirty="0" smtClean="0"/>
+                        <a:rPr lang="de-CH" sz="1800" dirty="0"/>
                         <a:t>COMPLETE MANUSCRIPT FOR OBJECTIVE 1</a:t>
                       </a:r>
                       <a:endParaRPr lang="de-CH" dirty="0"/>
@@ -50388,7 +50050,7 @@
                     <a:p>
                       <a:pPr algn="ctr"/>
                       <a:r>
-                        <a:rPr lang="de-CH" sz="1800" dirty="0" smtClean="0"/>
+                        <a:rPr lang="de-CH" sz="1800" dirty="0"/>
                         <a:t>JULY</a:t>
                       </a:r>
                       <a:endParaRPr lang="de-CH" dirty="0"/>
@@ -50410,7 +50072,7 @@
                     <a:p>
                       <a:pPr algn="ctr"/>
                       <a:r>
-                        <a:rPr lang="de-CH" sz="1800" dirty="0" smtClean="0"/>
+                        <a:rPr lang="de-CH" sz="1800" dirty="0"/>
                         <a:t>TEACH AT MATHEMATICAL MODELING TRAINING IN KENYA </a:t>
                       </a:r>
                       <a:endParaRPr lang="de-CH" dirty="0"/>
@@ -50425,10 +50087,10 @@
                     <a:p>
                       <a:pPr algn="ctr"/>
                       <a:r>
-                        <a:rPr lang="de-CH" sz="1800" dirty="0" smtClean="0"/>
+                        <a:rPr lang="de-CH" sz="1800" dirty="0"/>
                         <a:t>AUGUST </a:t>
                       </a:r>
-                      <a:endParaRPr lang="de-CH" baseline="0" dirty="0" smtClean="0"/>
+                      <a:endParaRPr lang="de-CH" baseline="0" dirty="0"/>
                     </a:p>
                   </a:txBody>
                   <a:tcPr/>
@@ -50450,10 +50112,9 @@
                         <a:buNone/>
                       </a:pPr>
                       <a:r>
-                        <a:rPr lang="de-CH" sz="1800" dirty="0" smtClean="0"/>
+                        <a:rPr lang="de-CH" sz="1800" dirty="0"/>
                         <a:t>START WITH OBJECTIVE 2</a:t>
                       </a:r>
-                      <a:endParaRPr lang="de-CH" sz="1800" dirty="0" smtClean="0"/>
                     </a:p>
                   </a:txBody>
                   <a:tcPr/>
@@ -50465,10 +50126,10 @@
                     <a:p>
                       <a:pPr algn="ctr"/>
                       <a:r>
-                        <a:rPr lang="de-CH" dirty="0" smtClean="0"/>
+                        <a:rPr lang="de-CH" dirty="0"/>
                         <a:t>SEPTEMBER</a:t>
                       </a:r>
-                      <a:endParaRPr lang="de-CH" baseline="0" dirty="0" smtClean="0"/>
+                      <a:endParaRPr lang="de-CH" baseline="0" dirty="0"/>
                     </a:p>
                   </a:txBody>
                   <a:tcPr/>
@@ -50493,13 +50154,6 @@
   <p:clrMapOvr>
     <a:masterClrMapping/>
   </p:clrMapOvr>
-  <p:timing>
-    <p:tnLst>
-      <p:par>
-        <p:cTn id="1" dur="indefinite" restart="never" nodeType="tmRoot"/>
-      </p:par>
-    </p:tnLst>
-  </p:timing>
 </p:sld>
 </file>
 
@@ -50541,14 +50195,11 @@
           <a:lstStyle/>
           <a:p>
             <a:r>
-              <a:rPr lang="en-US" sz="4000" b="1" dirty="0" smtClean="0">
+              <a:rPr lang="en-US" sz="4000" b="1" dirty="0">
                 <a:latin typeface="+mn-lt"/>
               </a:rPr>
               <a:t>Thank you for your attention</a:t>
             </a:r>
-            <a:endParaRPr lang="en-US" sz="4000" b="1" dirty="0">
-              <a:latin typeface="+mn-lt"/>
-            </a:endParaRPr>
           </a:p>
         </p:txBody>
       </p:sp>
@@ -50562,13 +50213,6 @@
   <p:clrMapOvr>
     <a:masterClrMapping/>
   </p:clrMapOvr>
-  <p:timing>
-    <p:tnLst>
-      <p:par>
-        <p:cTn id="1" dur="indefinite" restart="never" nodeType="tmRoot"/>
-      </p:par>
-    </p:tnLst>
-  </p:timing>
 </p:sld>
 </file>
 
@@ -50619,7 +50263,7 @@
           <a:lstStyle/>
           <a:p>
             <a:r>
-              <a:rPr lang="en" sz="2800" b="1" dirty="0" smtClean="0">
+              <a:rPr lang="en" sz="2800" b="1" dirty="0">
                 <a:latin typeface="+mn-lt"/>
               </a:rPr>
               <a:t>Malaria Prevalence in Ghana is highly heterogeneous</a:t>
@@ -50677,23 +50321,23 @@
           <a:lstStyle/>
           <a:p>
             <a:r>
-              <a:rPr lang="de-CH" sz="1600" dirty="0" smtClean="0"/>
+              <a:rPr lang="de-CH" sz="1600" dirty="0"/>
               <a:t>Source: NMEP, </a:t>
             </a:r>
             <a:r>
-              <a:rPr lang="de-CH" sz="1600" dirty="0" err="1" smtClean="0"/>
+              <a:rPr lang="de-CH" sz="1600" dirty="0" err="1"/>
               <a:t>figure</a:t>
             </a:r>
             <a:r>
-              <a:rPr lang="de-CH" sz="1600" dirty="0" smtClean="0"/>
+              <a:rPr lang="de-CH" sz="1600" dirty="0"/>
               <a:t> </a:t>
             </a:r>
             <a:r>
-              <a:rPr lang="de-CH" sz="1600" dirty="0" err="1" smtClean="0"/>
+              <a:rPr lang="de-CH" sz="1600" dirty="0" err="1"/>
               <a:t>by</a:t>
             </a:r>
             <a:r>
-              <a:rPr lang="de-CH" sz="1600" dirty="0" smtClean="0"/>
+              <a:rPr lang="de-CH" sz="1600" dirty="0"/>
               <a:t>: ZS</a:t>
             </a:r>
             <a:endParaRPr lang="de-CH" dirty="0"/>
@@ -50886,35 +50530,35 @@
           <a:lstStyle/>
           <a:p>
             <a:r>
-              <a:rPr lang="de-CH" sz="1600" dirty="0" smtClean="0"/>
+              <a:rPr lang="de-CH" sz="1600" dirty="0"/>
               <a:t>Source: MAP, </a:t>
             </a:r>
             <a:r>
-              <a:rPr lang="de-CH" sz="1600" dirty="0" err="1" smtClean="0"/>
+              <a:rPr lang="de-CH" sz="1600" dirty="0" err="1"/>
               <a:t>figure</a:t>
             </a:r>
             <a:r>
-              <a:rPr lang="de-CH" sz="1600" dirty="0" smtClean="0"/>
+              <a:rPr lang="de-CH" sz="1600" dirty="0"/>
               <a:t> </a:t>
             </a:r>
             <a:r>
-              <a:rPr lang="de-CH" sz="1600" dirty="0" err="1" smtClean="0"/>
+              <a:rPr lang="de-CH" sz="1600" dirty="0" err="1"/>
               <a:t>by</a:t>
             </a:r>
             <a:r>
-              <a:rPr lang="de-CH" sz="1600" dirty="0" smtClean="0"/>
+              <a:rPr lang="de-CH" sz="1600" dirty="0"/>
               <a:t>: </a:t>
             </a:r>
             <a:r>
-              <a:rPr lang="de-CH" sz="1600" dirty="0" err="1" smtClean="0"/>
+              <a:rPr lang="de-CH" sz="1600" dirty="0" err="1"/>
               <a:t>Sumaiyya</a:t>
             </a:r>
             <a:r>
-              <a:rPr lang="de-CH" sz="1600" dirty="0" smtClean="0"/>
+              <a:rPr lang="de-CH" sz="1600" dirty="0"/>
               <a:t> </a:t>
             </a:r>
             <a:r>
-              <a:rPr lang="de-CH" sz="1600" dirty="0" err="1" smtClean="0"/>
+              <a:rPr lang="de-CH" sz="1600" dirty="0" err="1"/>
               <a:t>Thawer</a:t>
             </a:r>
             <a:endParaRPr lang="de-CH" dirty="0"/>
@@ -50971,11 +50615,7 @@
             </a:r>
             <a:r>
               <a:rPr lang="en-US" sz="3200" b="1" kern="0" dirty="0"/>
-              <a:t> is used to simulate the impact of interventions for intervention stratification at the sub-national </a:t>
-            </a:r>
-            <a:r>
-              <a:rPr lang="en-US" sz="3200" b="1" kern="0" dirty="0" smtClean="0"/>
-              <a:t>level</a:t>
+              <a:t> is used to simulate the impact of interventions for intervention stratification at the sub-national level</a:t>
             </a:r>
             <a:endParaRPr lang="de-CH" sz="3200" dirty="0"/>
           </a:p>
@@ -51146,22 +50786,10 @@
           <a:lstStyle/>
           <a:p>
             <a:r>
-              <a:rPr lang="en" sz="2800" b="1" dirty="0" smtClean="0">
-                <a:latin typeface="+mn-lt"/>
-              </a:rPr>
-              <a:t>Uncertainty </a:t>
-            </a:r>
-            <a:r>
               <a:rPr lang="en" sz="2800" b="1" dirty="0">
                 <a:latin typeface="+mn-lt"/>
               </a:rPr>
-              <a:t>in </a:t>
-            </a:r>
-            <a:r>
-              <a:rPr lang="en" sz="2800" b="1" dirty="0" smtClean="0">
-                <a:latin typeface="+mn-lt"/>
-              </a:rPr>
-              <a:t>Agent-Based Model outputs stem from different sources</a:t>
+              <a:t>Uncertainty in Agent-Based Model outputs stem from different sources</a:t>
             </a:r>
             <a:endParaRPr sz="2800" b="1" dirty="0">
               <a:latin typeface="+mn-lt"/>
@@ -51173,9 +50801,7 @@
         <p:nvGraphicFramePr>
           <p:cNvPr id="2" name="Diagram 1"/>
           <p:cNvGraphicFramePr/>
-          <p:nvPr>
-            <p:extLst/>
-          </p:nvPr>
+          <p:nvPr/>
         </p:nvGraphicFramePr>
         <p:xfrm>
           <a:off x="1769806" y="889467"/>
@@ -51253,7 +50879,7 @@
               <a:defRPr/>
             </a:pPr>
             <a:r>
-              <a:rPr kumimoji="0" lang="de-CH" sz="1800" b="0" i="0" u="none" strike="noStrike" kern="1200" cap="none" spc="0" normalizeH="0" baseline="0" noProof="0" dirty="0" smtClean="0">
+              <a:rPr kumimoji="0" lang="de-CH" sz="1800" b="0" i="0" u="none" strike="noStrike" kern="1200" cap="none" spc="0" normalizeH="0" baseline="0" noProof="0" dirty="0">
                 <a:ln>
                   <a:noFill/>
                 </a:ln>
@@ -51269,20 +50895,6 @@
               </a:rPr>
               <a:t>Model uncertainty</a:t>
             </a:r>
-            <a:endParaRPr kumimoji="0" lang="de-CH" sz="1800" b="0" i="0" u="none" strike="noStrike" kern="1200" cap="none" spc="0" normalizeH="0" baseline="0" noProof="0" dirty="0">
-              <a:ln>
-                <a:noFill/>
-              </a:ln>
-              <a:solidFill>
-                <a:srgbClr val="FFFFFF"/>
-              </a:solidFill>
-              <a:effectLst/>
-              <a:uLnTx/>
-              <a:uFillTx/>
-              <a:latin typeface="Arial"/>
-              <a:ea typeface="+mn-ea"/>
-              <a:cs typeface="+mn-cs"/>
-            </a:endParaRPr>
           </a:p>
         </p:txBody>
       </p:sp>
@@ -51727,14 +51339,11 @@
           <a:lstStyle/>
           <a:p>
             <a:r>
-              <a:rPr lang="en-US" sz="2800" b="1" dirty="0" smtClean="0">
+              <a:rPr lang="en-US" sz="2800" b="1" dirty="0">
                 <a:latin typeface="+mn-lt"/>
               </a:rPr>
               <a:t>Goal</a:t>
             </a:r>
-            <a:endParaRPr lang="en-US" sz="2800" b="1" dirty="0">
-              <a:latin typeface="+mn-lt"/>
-            </a:endParaRPr>
           </a:p>
         </p:txBody>
       </p:sp>
@@ -51789,16 +51398,8 @@
           <a:p>
             <a:pPr lvl="0"/>
             <a:r>
-              <a:rPr lang="en-US" sz="2800" dirty="0" smtClean="0"/>
-              <a:t>To quantify and propagate the </a:t>
-            </a:r>
-            <a:r>
               <a:rPr lang="en-US" sz="2800" dirty="0"/>
-              <a:t>uncertainty from various parameters in the OpenMalaria Ghana model, beyond just the entomological inoculation rate (EIR) and to determine the impact of these uncertainties on simulating the effect of malaria interventions at the sub-national </a:t>
-            </a:r>
-            <a:r>
-              <a:rPr lang="en-US" sz="2800" dirty="0" smtClean="0"/>
-              <a:t>level.</a:t>
+              <a:t>To quantify and propagate the uncertainty from various parameters in the OpenMalaria Ghana model, beyond just the entomological inoculation rate (EIR) and to determine the impact of these uncertainties on simulating the effect of malaria interventions at the sub-national level.</a:t>
             </a:r>
             <a:endParaRPr lang="de-CH" sz="2800" dirty="0"/>
           </a:p>
@@ -51814,13 +51415,6 @@
   <p:clrMapOvr>
     <a:masterClrMapping/>
   </p:clrMapOvr>
-  <p:timing>
-    <p:tnLst>
-      <p:par>
-        <p:cTn id="1" dur="indefinite" restart="never" nodeType="tmRoot"/>
-      </p:par>
-    </p:tnLst>
-  </p:timing>
 </p:sld>
 </file>
 
@@ -52115,14 +51709,11 @@
           </a:lstStyle>
           <a:p>
             <a:r>
-              <a:rPr lang="en-US" sz="2800" b="1" kern="0" dirty="0" smtClean="0">
+              <a:rPr lang="en-US" sz="2800" b="1" kern="0" dirty="0">
                 <a:latin typeface="+mn-lt"/>
               </a:rPr>
               <a:t>Uncertainty Quantification can be classified in two forms</a:t>
             </a:r>
-            <a:endParaRPr lang="en-US" sz="2800" b="1" kern="0" dirty="0">
-              <a:latin typeface="+mn-lt"/>
-            </a:endParaRPr>
           </a:p>
         </p:txBody>
       </p:sp>
@@ -52130,9 +51721,7 @@
         <p:nvGraphicFramePr>
           <p:cNvPr id="2" name="Diagram 1"/>
           <p:cNvGraphicFramePr/>
-          <p:nvPr>
-            <p:extLst/>
-          </p:nvPr>
+          <p:nvPr/>
         </p:nvGraphicFramePr>
         <p:xfrm>
           <a:off x="1203864" y="1820174"/>
@@ -52187,10 +51776,9 @@
           <a:p>
             <a:pPr algn="ctr"/>
             <a:r>
-              <a:rPr lang="de-CH" sz="2400" dirty="0" smtClean="0"/>
+              <a:rPr lang="de-CH" sz="2400" dirty="0"/>
               <a:t>Sensitivity Analysis</a:t>
             </a:r>
-            <a:endParaRPr lang="de-CH" sz="2400" dirty="0"/>
           </a:p>
         </p:txBody>
       </p:sp>
@@ -52237,10 +51825,9 @@
           <a:p>
             <a:pPr algn="ctr"/>
             <a:r>
-              <a:rPr lang="de-CH" sz="2400" dirty="0" smtClean="0"/>
+              <a:rPr lang="de-CH" sz="2400" dirty="0"/>
               <a:t>Model Calibration</a:t>
             </a:r>
-            <a:endParaRPr lang="de-CH" sz="2400" dirty="0"/>
           </a:p>
         </p:txBody>
       </p:sp>
@@ -52270,32 +51857,8 @@
               <a:buChar char="•"/>
             </a:pPr>
             <a:r>
-              <a:rPr lang="en-US" sz="2400" b="1" dirty="0" smtClean="0"/>
-              <a:t>The </a:t>
-            </a:r>
-            <a:r>
               <a:rPr lang="en-US" sz="2400" b="1" dirty="0"/>
-              <a:t>field of Uncertainty Quantification </a:t>
-            </a:r>
-            <a:r>
-              <a:rPr lang="en-US" sz="2400" b="1" dirty="0" smtClean="0"/>
-              <a:t>offers </a:t>
-            </a:r>
-            <a:r>
-              <a:rPr lang="en-US" sz="2400" b="1" dirty="0"/>
-              <a:t>a means of quantifying and </a:t>
-            </a:r>
-            <a:r>
-              <a:rPr lang="en-US" sz="2400" b="1" dirty="0" smtClean="0"/>
-              <a:t>characterizing </a:t>
-            </a:r>
-            <a:r>
-              <a:rPr lang="en-US" sz="2400" b="1" dirty="0"/>
-              <a:t>uncertainties in models and the real </a:t>
-            </a:r>
-            <a:r>
-              <a:rPr lang="en-US" sz="2400" b="1" dirty="0" smtClean="0"/>
-              <a:t>world.</a:t>
+              <a:t>The field of Uncertainty Quantification offers a means of quantifying and characterizing uncertainties in models and the real world.</a:t>
             </a:r>
             <a:endParaRPr lang="de-CH" sz="2400" b="1" dirty="0"/>
           </a:p>
@@ -52735,7 +52298,7 @@
           <a:lstStyle/>
           <a:p>
             <a:r>
-              <a:rPr lang="en" sz="2800" b="1" dirty="0" smtClean="0">
+              <a:rPr lang="en" sz="2800" b="1" dirty="0">
                 <a:latin typeface="+mn-lt"/>
               </a:rPr>
               <a:t>Research Objectives</a:t>
@@ -52750,9 +52313,7 @@
         <p:nvGraphicFramePr>
           <p:cNvPr id="4" name="Diagram 3"/>
           <p:cNvGraphicFramePr/>
-          <p:nvPr>
-            <p:extLst/>
-          </p:nvPr>
+          <p:nvPr/>
         </p:nvGraphicFramePr>
         <p:xfrm>
           <a:off x="0" y="719668"/>
@@ -52842,7 +52403,7 @@
           <a:lstStyle/>
           <a:p>
             <a:r>
-              <a:rPr lang="de-CH" dirty="0" smtClean="0">
+              <a:rPr lang="de-CH" dirty="0">
                 <a:solidFill>
                   <a:schemeClr val="tx1"/>
                 </a:solidFill>
@@ -52850,7 +52411,7 @@
               <a:t>Perform </a:t>
             </a:r>
             <a:r>
-              <a:rPr lang="de-CH" dirty="0" err="1" smtClean="0">
+              <a:rPr lang="de-CH" dirty="0" err="1">
                 <a:solidFill>
                   <a:schemeClr val="tx1"/>
                 </a:solidFill>
@@ -52858,7 +52419,7 @@
               <a:t>sensitivity</a:t>
             </a:r>
             <a:r>
-              <a:rPr lang="de-CH" dirty="0" smtClean="0">
+              <a:rPr lang="de-CH" dirty="0">
                 <a:solidFill>
                   <a:schemeClr val="tx1"/>
                 </a:solidFill>
@@ -52866,7 +52427,7 @@
               <a:t> </a:t>
             </a:r>
             <a:r>
-              <a:rPr lang="de-CH" dirty="0" err="1" smtClean="0">
+              <a:rPr lang="de-CH" dirty="0" err="1">
                 <a:solidFill>
                   <a:schemeClr val="tx1"/>
                 </a:solidFill>
@@ -52874,7 +52435,7 @@
               <a:t>analysis</a:t>
             </a:r>
             <a:r>
-              <a:rPr lang="de-CH" dirty="0" smtClean="0">
+              <a:rPr lang="de-CH" dirty="0">
                 <a:solidFill>
                   <a:schemeClr val="tx1"/>
                 </a:solidFill>
@@ -52882,7 +52443,7 @@
               <a:t> </a:t>
             </a:r>
             <a:r>
-              <a:rPr lang="de-CH" dirty="0" err="1" smtClean="0">
+              <a:rPr lang="de-CH" dirty="0" err="1">
                 <a:solidFill>
                   <a:schemeClr val="tx1"/>
                 </a:solidFill>
@@ -52890,7 +52451,7 @@
               <a:t>of</a:t>
             </a:r>
             <a:r>
-              <a:rPr lang="de-CH" dirty="0" smtClean="0">
+              <a:rPr lang="de-CH" dirty="0">
                 <a:solidFill>
                   <a:schemeClr val="tx1"/>
                 </a:solidFill>
@@ -52898,7 +52459,7 @@
               <a:t> intervention </a:t>
             </a:r>
             <a:r>
-              <a:rPr lang="de-CH" b="1" dirty="0" err="1" smtClean="0">
+              <a:rPr lang="de-CH" b="1" dirty="0" err="1">
                 <a:solidFill>
                   <a:schemeClr val="tx1"/>
                 </a:solidFill>
@@ -52914,7 +52475,7 @@
               <a:t> </a:t>
             </a:r>
             <a:r>
-              <a:rPr lang="de-CH" dirty="0" err="1" smtClean="0">
+              <a:rPr lang="de-CH" dirty="0" err="1">
                 <a:solidFill>
                   <a:schemeClr val="tx1"/>
                 </a:solidFill>
@@ -52922,7 +52483,7 @@
               <a:t>towards</a:t>
             </a:r>
             <a:r>
-              <a:rPr lang="de-CH" dirty="0" smtClean="0">
+              <a:rPr lang="de-CH" dirty="0">
                 <a:solidFill>
                   <a:schemeClr val="tx1"/>
                 </a:solidFill>
@@ -52930,7 +52491,7 @@
               <a:t> </a:t>
             </a:r>
             <a:r>
-              <a:rPr lang="de-CH" dirty="0" err="1" smtClean="0">
+              <a:rPr lang="de-CH" dirty="0" err="1">
                 <a:solidFill>
                   <a:schemeClr val="tx1"/>
                 </a:solidFill>
@@ -52938,7 +52499,7 @@
               <a:t>incidence</a:t>
             </a:r>
             <a:r>
-              <a:rPr lang="de-CH" dirty="0" smtClean="0">
+              <a:rPr lang="de-CH" dirty="0">
                 <a:solidFill>
                   <a:schemeClr val="tx1"/>
                 </a:solidFill>
@@ -52946,7 +52507,7 @@
               <a:t> </a:t>
             </a:r>
             <a:r>
-              <a:rPr lang="de-CH" dirty="0" err="1" smtClean="0">
+              <a:rPr lang="de-CH" dirty="0" err="1">
                 <a:solidFill>
                   <a:schemeClr val="tx1"/>
                 </a:solidFill>
@@ -52954,7 +52515,7 @@
               <a:t>reduction</a:t>
             </a:r>
             <a:r>
-              <a:rPr lang="de-CH" dirty="0" smtClean="0">
+              <a:rPr lang="de-CH" dirty="0">
                 <a:solidFill>
                   <a:schemeClr val="tx1"/>
                 </a:solidFill>
@@ -52962,7 +52523,7 @@
               <a:t> </a:t>
             </a:r>
             <a:r>
-              <a:rPr lang="de-CH" dirty="0" err="1" smtClean="0">
+              <a:rPr lang="de-CH" dirty="0" err="1">
                 <a:solidFill>
                   <a:schemeClr val="tx1"/>
                 </a:solidFill>
@@ -52970,7 +52531,7 @@
               <a:t>and</a:t>
             </a:r>
             <a:r>
-              <a:rPr lang="de-CH" dirty="0" smtClean="0">
+              <a:rPr lang="de-CH" dirty="0">
                 <a:solidFill>
                   <a:schemeClr val="tx1"/>
                 </a:solidFill>
@@ -52978,23 +52539,15 @@
               <a:t> </a:t>
             </a:r>
             <a:r>
-              <a:rPr lang="de-CH" b="1" dirty="0" smtClean="0">
+              <a:rPr lang="de-CH" b="1" dirty="0">
                 <a:solidFill>
                   <a:schemeClr val="bg1"/>
                 </a:solidFill>
               </a:rPr>
-              <a:t>(</a:t>
+              <a:t>(Forward </a:t>
             </a:r>
             <a:r>
-              <a:rPr lang="de-CH" b="1" dirty="0" smtClean="0">
-                <a:solidFill>
-                  <a:schemeClr val="bg1"/>
-                </a:solidFill>
-              </a:rPr>
-              <a:t>Forward </a:t>
-            </a:r>
-            <a:r>
-              <a:rPr lang="de-CH" b="1" dirty="0" err="1" smtClean="0">
+              <a:rPr lang="de-CH" b="1" dirty="0" err="1">
                 <a:solidFill>
                   <a:schemeClr val="bg1"/>
                 </a:solidFill>
@@ -53002,7 +52555,7 @@
               <a:t>propagation</a:t>
             </a:r>
             <a:r>
-              <a:rPr lang="de-CH" b="1" dirty="0" smtClean="0">
+              <a:rPr lang="de-CH" b="1" dirty="0">
                 <a:solidFill>
                   <a:schemeClr val="bg1"/>
                 </a:solidFill>
@@ -53010,7 +52563,7 @@
               <a:t> </a:t>
             </a:r>
             <a:r>
-              <a:rPr lang="de-CH" b="1" dirty="0" err="1" smtClean="0">
+              <a:rPr lang="de-CH" b="1" dirty="0" err="1">
                 <a:solidFill>
                   <a:schemeClr val="bg1"/>
                 </a:solidFill>
@@ -53018,7 +52571,7 @@
               <a:t>of</a:t>
             </a:r>
             <a:r>
-              <a:rPr lang="de-CH" b="1" dirty="0" smtClean="0">
+              <a:rPr lang="de-CH" b="1" dirty="0">
                 <a:solidFill>
                   <a:schemeClr val="bg1"/>
                 </a:solidFill>
@@ -53101,10 +52654,9 @@
               </a:spcAft>
             </a:pPr>
             <a:r>
-              <a:rPr lang="en-US" sz="2000" kern="1200" dirty="0" smtClean="0"/>
+              <a:rPr lang="en-US" sz="2000" kern="1200" dirty="0"/>
               <a:t>Results of the sensitivity analysis will help the NMEP to carefully choose intervention re-allocation if needed, during the midterm review</a:t>
             </a:r>
-            <a:endParaRPr lang="en-US" sz="2000" kern="1200" dirty="0"/>
           </a:p>
         </p:txBody>
       </p:sp>
@@ -53169,6 +52721,13 @@
               <a:schemeClr val="lt1"/>
             </a:fontRef>
           </p:style>
+          <p:txBody>
+            <a:bodyPr/>
+            <a:lstStyle/>
+            <a:p>
+              <a:endParaRPr lang="en-CH"/>
+            </a:p>
+          </p:txBody>
         </p:sp>
         <p:sp>
           <p:nvSpPr>
@@ -53294,10 +52853,10 @@
               </a:spcAft>
             </a:pPr>
             <a:r>
-              <a:rPr lang="en-US" sz="2000" kern="1200" dirty="0" smtClean="0"/>
+              <a:rPr lang="en-US" sz="2000" kern="1200" dirty="0"/>
               <a:t>The sensitivity analysis will be integrated in the OpenMalaria workflow package, which will be made publicly available</a:t>
             </a:r>
-            <a:endParaRPr lang="de-CH" sz="2000" kern="1200" dirty="0" smtClean="0">
+            <a:endParaRPr lang="de-CH" sz="2000" kern="1200" dirty="0">
               <a:solidFill>
                 <a:schemeClr val="tx1"/>
               </a:solidFill>
@@ -53369,6 +52928,13 @@
               <a:schemeClr val="lt1"/>
             </a:fontRef>
           </p:style>
+          <p:txBody>
+            <a:bodyPr/>
+            <a:lstStyle/>
+            <a:p>
+              <a:endParaRPr lang="en-CH"/>
+            </a:p>
+          </p:txBody>
         </p:sp>
         <p:sp>
           <p:nvSpPr>
@@ -53444,24 +53010,12 @@
           <a:lstStyle/>
           <a:p>
             <a:r>
-              <a:rPr lang="de-CH" sz="1400" dirty="0" smtClean="0"/>
+              <a:rPr lang="de-CH" sz="1400" dirty="0"/>
               <a:t>Source:</a:t>
             </a:r>
             <a:r>
               <a:rPr lang="en-US" sz="1400" dirty="0"/>
-              <a:t> </a:t>
-            </a:r>
-            <a:r>
-              <a:rPr lang="en-US" sz="1400" dirty="0" smtClean="0"/>
-              <a:t>Sensitivity </a:t>
-            </a:r>
-            <a:r>
-              <a:rPr lang="en-US" sz="1400" dirty="0"/>
-              <a:t>Analysis: The </a:t>
-            </a:r>
-            <a:r>
-              <a:rPr lang="en-US" sz="1400" dirty="0" smtClean="0"/>
-              <a:t>Basics</a:t>
+              <a:t> Sensitivity Analysis: The Basics</a:t>
             </a:r>
             <a:endParaRPr lang="de-CH" sz="1400" dirty="0"/>
           </a:p>
@@ -53842,7 +53396,7 @@
           <a:lstStyle/>
           <a:p>
             <a:r>
-              <a:rPr lang="en" sz="2800" b="1" dirty="0" smtClean="0">
+              <a:rPr lang="en" sz="2800" b="1" dirty="0">
                 <a:latin typeface="+mn-lt"/>
               </a:rPr>
               <a:t>Research Objectives</a:t>
@@ -53857,9 +53411,7 @@
         <p:nvGraphicFramePr>
           <p:cNvPr id="4" name="Diagram 3"/>
           <p:cNvGraphicFramePr/>
-          <p:nvPr>
-            <p:extLst/>
-          </p:nvPr>
+          <p:nvPr/>
         </p:nvGraphicFramePr>
         <p:xfrm>
           <a:off x="0" y="719668"/>
@@ -53926,38 +53478,14 @@
                   <a:schemeClr val="tx1"/>
                 </a:solidFill>
               </a:rPr>
-              <a:t>Develop </a:t>
-            </a:r>
-            <a:r>
-              <a:rPr lang="en-US" dirty="0" smtClean="0">
-                <a:solidFill>
-                  <a:schemeClr val="tx1"/>
-                </a:solidFill>
-              </a:rPr>
-              <a:t>framework </a:t>
-            </a:r>
-            <a:r>
-              <a:rPr lang="en-US" dirty="0">
-                <a:solidFill>
-                  <a:schemeClr val="tx1"/>
-                </a:solidFill>
-              </a:rPr>
-              <a:t>to infer multiple parameters and perform uncertainty quantification for malaria interventions applied to the Ghana </a:t>
-            </a:r>
-            <a:r>
-              <a:rPr lang="en-US" dirty="0" smtClean="0">
-                <a:solidFill>
-                  <a:schemeClr val="tx1"/>
-                </a:solidFill>
-              </a:rPr>
-              <a:t>data</a:t>
+              <a:t>Develop framework to infer multiple parameters and perform uncertainty quantification for malaria interventions applied to the Ghana data</a:t>
             </a:r>
             <a:r>
               <a:rPr lang="en-US" dirty="0"/>
               <a:t> </a:t>
             </a:r>
             <a:r>
-              <a:rPr lang="en-US" b="1" dirty="0" smtClean="0"/>
+              <a:rPr lang="en-US" b="1" dirty="0"/>
               <a:t>(Inverse uncertainty quantification)</a:t>
             </a:r>
             <a:endParaRPr lang="de-CH" b="1" dirty="0"/>
@@ -54108,6 +53636,13 @@
               <a:schemeClr val="lt1"/>
             </a:fontRef>
           </p:style>
+          <p:txBody>
+            <a:bodyPr/>
+            <a:lstStyle/>
+            <a:p>
+              <a:endParaRPr lang="en-CH"/>
+            </a:p>
+          </p:txBody>
         </p:sp>
         <p:sp>
           <p:nvSpPr>
@@ -54183,19 +53718,19 @@
           <a:lstStyle/>
           <a:p>
             <a:r>
-              <a:rPr lang="de-CH" sz="1400" dirty="0" smtClean="0"/>
+              <a:rPr lang="de-CH" sz="1400" dirty="0"/>
               <a:t>Source: MAP / </a:t>
             </a:r>
             <a:r>
-              <a:rPr lang="de-CH" sz="1400" dirty="0" err="1" smtClean="0"/>
+              <a:rPr lang="de-CH" sz="1400" dirty="0" err="1"/>
               <a:t>OpenMalaria</a:t>
             </a:r>
             <a:r>
-              <a:rPr lang="de-CH" sz="1400" dirty="0" smtClean="0"/>
+              <a:rPr lang="de-CH" sz="1400" dirty="0"/>
               <a:t> </a:t>
             </a:r>
             <a:r>
-              <a:rPr lang="de-CH" sz="1400" dirty="0" err="1" smtClean="0"/>
+              <a:rPr lang="de-CH" sz="1400" dirty="0" err="1"/>
               <a:t>simulations</a:t>
             </a:r>
             <a:endParaRPr lang="de-CH" sz="1400" i="1" dirty="0"/>
@@ -54225,19 +53760,19 @@
           <a:lstStyle/>
           <a:p>
             <a:r>
-              <a:rPr lang="de-CH" sz="1400" dirty="0" smtClean="0"/>
+              <a:rPr lang="de-CH" sz="1400" dirty="0"/>
               <a:t>Source: MAP / </a:t>
             </a:r>
             <a:r>
-              <a:rPr lang="de-CH" sz="1400" dirty="0" err="1" smtClean="0"/>
+              <a:rPr lang="de-CH" sz="1400" dirty="0" err="1"/>
               <a:t>OpenMalaria</a:t>
             </a:r>
             <a:r>
-              <a:rPr lang="de-CH" sz="1400" dirty="0" smtClean="0"/>
+              <a:rPr lang="de-CH" sz="1400" dirty="0"/>
               <a:t> </a:t>
             </a:r>
             <a:r>
-              <a:rPr lang="de-CH" sz="1400" dirty="0" err="1" smtClean="0"/>
+              <a:rPr lang="de-CH" sz="1400" dirty="0" err="1"/>
               <a:t>simulations</a:t>
             </a:r>
             <a:endParaRPr lang="de-CH" sz="1400" i="1" dirty="0"/>
@@ -54267,19 +53802,19 @@
           <a:lstStyle/>
           <a:p>
             <a:r>
-              <a:rPr lang="de-CH" sz="1400" dirty="0" smtClean="0"/>
+              <a:rPr lang="de-CH" sz="1400" dirty="0"/>
               <a:t>Source: MAP / </a:t>
             </a:r>
             <a:r>
-              <a:rPr lang="de-CH" sz="1400" dirty="0" err="1" smtClean="0"/>
+              <a:rPr lang="de-CH" sz="1400" dirty="0" err="1"/>
               <a:t>OpenMalaria</a:t>
             </a:r>
             <a:r>
-              <a:rPr lang="de-CH" sz="1400" dirty="0" smtClean="0"/>
+              <a:rPr lang="de-CH" sz="1400" dirty="0"/>
               <a:t> </a:t>
             </a:r>
             <a:r>
-              <a:rPr lang="de-CH" sz="1400" dirty="0" err="1" smtClean="0"/>
+              <a:rPr lang="de-CH" sz="1400" dirty="0" err="1"/>
               <a:t>simulations</a:t>
             </a:r>
             <a:endParaRPr lang="de-CH" sz="1400" i="1" dirty="0"/>
@@ -54333,19 +53868,19 @@
           <a:lstStyle/>
           <a:p>
             <a:r>
-              <a:rPr lang="de-CH" sz="1400" dirty="0" smtClean="0"/>
+              <a:rPr lang="de-CH" sz="1400" dirty="0"/>
               <a:t>Source: MAP / </a:t>
             </a:r>
             <a:r>
-              <a:rPr lang="de-CH" sz="1400" dirty="0" err="1" smtClean="0"/>
+              <a:rPr lang="de-CH" sz="1400" dirty="0" err="1"/>
               <a:t>OpenMalaria</a:t>
             </a:r>
             <a:r>
-              <a:rPr lang="de-CH" sz="1400" dirty="0" smtClean="0"/>
+              <a:rPr lang="de-CH" sz="1400" dirty="0"/>
               <a:t> </a:t>
             </a:r>
             <a:r>
-              <a:rPr lang="de-CH" sz="1400" dirty="0" err="1" smtClean="0"/>
+              <a:rPr lang="de-CH" sz="1400" dirty="0" err="1"/>
               <a:t>simulations</a:t>
             </a:r>
             <a:endParaRPr lang="de-CH" sz="1400" i="1" dirty="0"/>
@@ -54636,7 +54171,7 @@
           <a:lstStyle/>
           <a:p>
             <a:r>
-              <a:rPr lang="en" sz="2800" b="1" dirty="0" smtClean="0">
+              <a:rPr lang="en" sz="2800" b="1" dirty="0">
                 <a:latin typeface="+mn-lt"/>
               </a:rPr>
               <a:t>Research Objectives</a:t>
@@ -54651,9 +54186,7 @@
         <p:nvGraphicFramePr>
           <p:cNvPr id="4" name="Diagram 3"/>
           <p:cNvGraphicFramePr/>
-          <p:nvPr>
-            <p:extLst/>
-          </p:nvPr>
+          <p:nvPr/>
         </p:nvGraphicFramePr>
         <p:xfrm>
           <a:off x="0" y="719668"/>
@@ -54716,36 +54249,12 @@
           <a:p>
             <a:pPr algn="ctr"/>
             <a:r>
-              <a:rPr lang="en-US" dirty="0" smtClean="0">
-                <a:solidFill>
-                  <a:schemeClr val="tx1"/>
-                </a:solidFill>
-              </a:rPr>
-              <a:t>refine </a:t>
-            </a:r>
-            <a:r>
               <a:rPr lang="en-US" dirty="0">
                 <a:solidFill>
                   <a:schemeClr val="tx1"/>
                 </a:solidFill>
               </a:rPr>
-              <a:t>modeling scenarios for Ghana at the </a:t>
-            </a:r>
-            <a:r>
-              <a:rPr lang="en-US" dirty="0" smtClean="0">
-                <a:solidFill>
-                  <a:schemeClr val="tx1"/>
-                </a:solidFill>
-              </a:rPr>
-              <a:t>district </a:t>
-            </a:r>
-            <a:r>
-              <a:rPr lang="en-US" dirty="0">
-                <a:solidFill>
-                  <a:schemeClr val="tx1"/>
-                </a:solidFill>
-              </a:rPr>
-              <a:t>level and define prioritization criteria for combinations of interventions</a:t>
+              <a:t>refine modeling scenarios for Ghana at the district level and define prioritization criteria for combinations of interventions</a:t>
             </a:r>
             <a:endParaRPr lang="de-CH" dirty="0">
               <a:solidFill>
@@ -54850,11 +54359,11 @@
           <a:lstStyle/>
           <a:p>
             <a:r>
-              <a:rPr lang="de-CH" sz="1400" dirty="0" smtClean="0"/>
+              <a:rPr lang="de-CH" sz="1400" dirty="0"/>
               <a:t>Source: Ghana NMESP 2024-2028</a:t>
             </a:r>
             <a:r>
-              <a:rPr lang="en-US" sz="1400" i="1" dirty="0" smtClean="0"/>
+              <a:rPr lang="en-US" sz="1400" i="1" dirty="0"/>
               <a:t>.</a:t>
             </a:r>
             <a:endParaRPr lang="de-CH" sz="1400" i="1" dirty="0"/>
